--- a/~sasano/lecture/proglang/26/proglang12.pptx
+++ b/~sasano/lecture/proglang/26/proglang12.pptx
@@ -160,6 +160,20 @@
         </p14:section>
       </p14:sectionLst>
     </p:ext>
+    <p:ext uri="{EFAFB233-063F-42B5-8137-9DF3F51BA10A}">
+      <p15:sldGuideLst xmlns:p15="http://schemas.microsoft.com/office/powerpoint/2012/main">
+        <p15:guide id="1" orient="horz" pos="2160">
+          <p15:clr>
+            <a:srgbClr val="A4A3A4"/>
+          </p15:clr>
+        </p15:guide>
+        <p15:guide id="2" pos="2880">
+          <p15:clr>
+            <a:srgbClr val="A4A3A4"/>
+          </p15:clr>
+        </p15:guide>
+      </p15:sldGuideLst>
+    </p:ext>
   </p:extLst>
 </p:presentation>
 </file>
@@ -202,10 +216,9 @@
           <a:lstStyle/>
           <a:p>
             <a:r>
-              <a:rPr kumimoji="1" lang="ja-JP" altLang="en-US" smtClean="0"/>
+              <a:rPr kumimoji="1" lang="ja-JP" altLang="en-US"/>
               <a:t>マスター タイトルの書式設定</a:t>
             </a:r>
-            <a:endParaRPr kumimoji="1" lang="ja-JP" altLang="en-US"/>
           </a:p>
         </p:txBody>
       </p:sp>
@@ -321,10 +334,9 @@
           </a:lstStyle>
           <a:p>
             <a:r>
-              <a:rPr kumimoji="1" lang="ja-JP" altLang="en-US" smtClean="0"/>
+              <a:rPr kumimoji="1" lang="ja-JP" altLang="en-US"/>
               <a:t>マスター サブタイトルの書式設定</a:t>
             </a:r>
-            <a:endParaRPr kumimoji="1" lang="ja-JP" altLang="en-US"/>
           </a:p>
         </p:txBody>
       </p:sp>
@@ -345,7 +357,7 @@
           <a:p>
             <a:fld id="{6C24F061-2875-984E-A862-A9FFC97B3261}" type="datetimeFigureOut">
               <a:rPr kumimoji="1" lang="ja-JP" altLang="en-US" smtClean="0"/>
-              <a:t>17/09/18</a:t>
+              <a:t>2026/9/28</a:t>
             </a:fld>
             <a:endParaRPr kumimoji="1" lang="ja-JP" altLang="en-US"/>
           </a:p>
@@ -439,10 +451,9 @@
           <a:lstStyle/>
           <a:p>
             <a:r>
-              <a:rPr kumimoji="1" lang="ja-JP" altLang="en-US" smtClean="0"/>
+              <a:rPr kumimoji="1" lang="ja-JP" altLang="en-US"/>
               <a:t>マスター タイトルの書式設定</a:t>
             </a:r>
-            <a:endParaRPr kumimoji="1" lang="ja-JP" altLang="en-US"/>
           </a:p>
         </p:txBody>
       </p:sp>
@@ -463,70 +474,69 @@
           <a:p>
             <a:pPr lvl="0"/>
             <a:r>
-              <a:rPr kumimoji="1" lang="ja-JP" altLang="en-US" smtClean="0"/>
+              <a:rPr kumimoji="1" lang="ja-JP" altLang="en-US"/>
               <a:t>マスター テキストの書式設定</a:t>
             </a:r>
           </a:p>
           <a:p>
             <a:pPr lvl="1"/>
             <a:r>
-              <a:rPr kumimoji="1" lang="ja-JP" altLang="en-US" smtClean="0"/>
+              <a:rPr kumimoji="1" lang="ja-JP" altLang="en-US"/>
               <a:t>第 </a:t>
             </a:r>
             <a:r>
-              <a:rPr kumimoji="1" lang="en-US" altLang="ja-JP" smtClean="0"/>
+              <a:rPr kumimoji="1" lang="en-US" altLang="ja-JP"/>
               <a:t>2 </a:t>
             </a:r>
             <a:r>
-              <a:rPr kumimoji="1" lang="ja-JP" altLang="en-US" smtClean="0"/>
+              <a:rPr kumimoji="1" lang="ja-JP" altLang="en-US"/>
               <a:t>レベル</a:t>
             </a:r>
           </a:p>
           <a:p>
             <a:pPr lvl="2"/>
             <a:r>
-              <a:rPr kumimoji="1" lang="ja-JP" altLang="en-US" smtClean="0"/>
+              <a:rPr kumimoji="1" lang="ja-JP" altLang="en-US"/>
               <a:t>第 </a:t>
             </a:r>
             <a:r>
-              <a:rPr kumimoji="1" lang="en-US" altLang="ja-JP" smtClean="0"/>
+              <a:rPr kumimoji="1" lang="en-US" altLang="ja-JP"/>
               <a:t>3 </a:t>
             </a:r>
             <a:r>
-              <a:rPr kumimoji="1" lang="ja-JP" altLang="en-US" smtClean="0"/>
+              <a:rPr kumimoji="1" lang="ja-JP" altLang="en-US"/>
               <a:t>レベル</a:t>
             </a:r>
           </a:p>
           <a:p>
             <a:pPr lvl="3"/>
             <a:r>
-              <a:rPr kumimoji="1" lang="ja-JP" altLang="en-US" smtClean="0"/>
+              <a:rPr kumimoji="1" lang="ja-JP" altLang="en-US"/>
               <a:t>第 </a:t>
             </a:r>
             <a:r>
-              <a:rPr kumimoji="1" lang="en-US" altLang="ja-JP" smtClean="0"/>
+              <a:rPr kumimoji="1" lang="en-US" altLang="ja-JP"/>
               <a:t>4 </a:t>
             </a:r>
             <a:r>
-              <a:rPr kumimoji="1" lang="ja-JP" altLang="en-US" smtClean="0"/>
+              <a:rPr kumimoji="1" lang="ja-JP" altLang="en-US"/>
               <a:t>レベル</a:t>
             </a:r>
           </a:p>
           <a:p>
             <a:pPr lvl="4"/>
             <a:r>
-              <a:rPr kumimoji="1" lang="ja-JP" altLang="en-US" smtClean="0"/>
+              <a:rPr kumimoji="1" lang="ja-JP" altLang="en-US"/>
               <a:t>第 </a:t>
             </a:r>
             <a:r>
-              <a:rPr kumimoji="1" lang="en-US" altLang="ja-JP" smtClean="0"/>
+              <a:rPr kumimoji="1" lang="en-US" altLang="ja-JP"/>
               <a:t>5 </a:t>
             </a:r>
             <a:r>
-              <a:rPr kumimoji="1" lang="ja-JP" altLang="en-US" smtClean="0"/>
+              <a:rPr kumimoji="1" lang="ja-JP" altLang="en-US"/>
               <a:t>レベル</a:t>
             </a:r>
-            <a:endParaRPr kumimoji="1" lang="ja-JP" altLang="en-US"/>
           </a:p>
         </p:txBody>
       </p:sp>
@@ -547,7 +557,7 @@
           <a:p>
             <a:fld id="{6C24F061-2875-984E-A862-A9FFC97B3261}" type="datetimeFigureOut">
               <a:rPr kumimoji="1" lang="ja-JP" altLang="en-US" smtClean="0"/>
-              <a:t>17/09/18</a:t>
+              <a:t>2026/9/28</a:t>
             </a:fld>
             <a:endParaRPr kumimoji="1" lang="ja-JP" altLang="en-US"/>
           </a:p>
@@ -646,10 +656,9 @@
           <a:lstStyle/>
           <a:p>
             <a:r>
-              <a:rPr kumimoji="1" lang="ja-JP" altLang="en-US" smtClean="0"/>
+              <a:rPr kumimoji="1" lang="ja-JP" altLang="en-US"/>
               <a:t>マスター タイトルの書式設定</a:t>
             </a:r>
-            <a:endParaRPr kumimoji="1" lang="ja-JP" altLang="en-US"/>
           </a:p>
         </p:txBody>
       </p:sp>
@@ -675,70 +684,69 @@
           <a:p>
             <a:pPr lvl="0"/>
             <a:r>
-              <a:rPr kumimoji="1" lang="ja-JP" altLang="en-US" smtClean="0"/>
+              <a:rPr kumimoji="1" lang="ja-JP" altLang="en-US"/>
               <a:t>マスター テキストの書式設定</a:t>
             </a:r>
           </a:p>
           <a:p>
             <a:pPr lvl="1"/>
             <a:r>
-              <a:rPr kumimoji="1" lang="ja-JP" altLang="en-US" smtClean="0"/>
+              <a:rPr kumimoji="1" lang="ja-JP" altLang="en-US"/>
               <a:t>第 </a:t>
             </a:r>
             <a:r>
-              <a:rPr kumimoji="1" lang="en-US" altLang="ja-JP" smtClean="0"/>
+              <a:rPr kumimoji="1" lang="en-US" altLang="ja-JP"/>
               <a:t>2 </a:t>
             </a:r>
             <a:r>
-              <a:rPr kumimoji="1" lang="ja-JP" altLang="en-US" smtClean="0"/>
+              <a:rPr kumimoji="1" lang="ja-JP" altLang="en-US"/>
               <a:t>レベル</a:t>
             </a:r>
           </a:p>
           <a:p>
             <a:pPr lvl="2"/>
             <a:r>
-              <a:rPr kumimoji="1" lang="ja-JP" altLang="en-US" smtClean="0"/>
+              <a:rPr kumimoji="1" lang="ja-JP" altLang="en-US"/>
               <a:t>第 </a:t>
             </a:r>
             <a:r>
-              <a:rPr kumimoji="1" lang="en-US" altLang="ja-JP" smtClean="0"/>
+              <a:rPr kumimoji="1" lang="en-US" altLang="ja-JP"/>
               <a:t>3 </a:t>
             </a:r>
             <a:r>
-              <a:rPr kumimoji="1" lang="ja-JP" altLang="en-US" smtClean="0"/>
+              <a:rPr kumimoji="1" lang="ja-JP" altLang="en-US"/>
               <a:t>レベル</a:t>
             </a:r>
           </a:p>
           <a:p>
             <a:pPr lvl="3"/>
             <a:r>
-              <a:rPr kumimoji="1" lang="ja-JP" altLang="en-US" smtClean="0"/>
+              <a:rPr kumimoji="1" lang="ja-JP" altLang="en-US"/>
               <a:t>第 </a:t>
             </a:r>
             <a:r>
-              <a:rPr kumimoji="1" lang="en-US" altLang="ja-JP" smtClean="0"/>
+              <a:rPr kumimoji="1" lang="en-US" altLang="ja-JP"/>
               <a:t>4 </a:t>
             </a:r>
             <a:r>
-              <a:rPr kumimoji="1" lang="ja-JP" altLang="en-US" smtClean="0"/>
+              <a:rPr kumimoji="1" lang="ja-JP" altLang="en-US"/>
               <a:t>レベル</a:t>
             </a:r>
           </a:p>
           <a:p>
             <a:pPr lvl="4"/>
             <a:r>
-              <a:rPr kumimoji="1" lang="ja-JP" altLang="en-US" smtClean="0"/>
+              <a:rPr kumimoji="1" lang="ja-JP" altLang="en-US"/>
               <a:t>第 </a:t>
             </a:r>
             <a:r>
-              <a:rPr kumimoji="1" lang="en-US" altLang="ja-JP" smtClean="0"/>
+              <a:rPr kumimoji="1" lang="en-US" altLang="ja-JP"/>
               <a:t>5 </a:t>
             </a:r>
             <a:r>
-              <a:rPr kumimoji="1" lang="ja-JP" altLang="en-US" smtClean="0"/>
+              <a:rPr kumimoji="1" lang="ja-JP" altLang="en-US"/>
               <a:t>レベル</a:t>
             </a:r>
-            <a:endParaRPr kumimoji="1" lang="ja-JP" altLang="en-US"/>
           </a:p>
         </p:txBody>
       </p:sp>
@@ -759,7 +767,7 @@
           <a:p>
             <a:fld id="{6C24F061-2875-984E-A862-A9FFC97B3261}" type="datetimeFigureOut">
               <a:rPr kumimoji="1" lang="ja-JP" altLang="en-US" smtClean="0"/>
-              <a:t>17/09/18</a:t>
+              <a:t>2026/9/28</a:t>
             </a:fld>
             <a:endParaRPr kumimoji="1" lang="ja-JP" altLang="en-US"/>
           </a:p>
@@ -853,10 +861,9 @@
           <a:lstStyle/>
           <a:p>
             <a:r>
-              <a:rPr kumimoji="1" lang="ja-JP" altLang="en-US" smtClean="0"/>
+              <a:rPr kumimoji="1" lang="ja-JP" altLang="en-US"/>
               <a:t>マスター タイトルの書式設定</a:t>
             </a:r>
-            <a:endParaRPr kumimoji="1" lang="ja-JP" altLang="en-US"/>
           </a:p>
         </p:txBody>
       </p:sp>
@@ -877,70 +884,69 @@
           <a:p>
             <a:pPr lvl="0"/>
             <a:r>
-              <a:rPr kumimoji="1" lang="ja-JP" altLang="en-US" smtClean="0"/>
+              <a:rPr kumimoji="1" lang="ja-JP" altLang="en-US"/>
               <a:t>マスター テキストの書式設定</a:t>
             </a:r>
           </a:p>
           <a:p>
             <a:pPr lvl="1"/>
             <a:r>
-              <a:rPr kumimoji="1" lang="ja-JP" altLang="en-US" smtClean="0"/>
+              <a:rPr kumimoji="1" lang="ja-JP" altLang="en-US"/>
               <a:t>第 </a:t>
             </a:r>
             <a:r>
-              <a:rPr kumimoji="1" lang="en-US" altLang="ja-JP" smtClean="0"/>
+              <a:rPr kumimoji="1" lang="en-US" altLang="ja-JP"/>
               <a:t>2 </a:t>
             </a:r>
             <a:r>
-              <a:rPr kumimoji="1" lang="ja-JP" altLang="en-US" smtClean="0"/>
+              <a:rPr kumimoji="1" lang="ja-JP" altLang="en-US"/>
               <a:t>レベル</a:t>
             </a:r>
           </a:p>
           <a:p>
             <a:pPr lvl="2"/>
             <a:r>
-              <a:rPr kumimoji="1" lang="ja-JP" altLang="en-US" smtClean="0"/>
+              <a:rPr kumimoji="1" lang="ja-JP" altLang="en-US"/>
               <a:t>第 </a:t>
             </a:r>
             <a:r>
-              <a:rPr kumimoji="1" lang="en-US" altLang="ja-JP" smtClean="0"/>
+              <a:rPr kumimoji="1" lang="en-US" altLang="ja-JP"/>
               <a:t>3 </a:t>
             </a:r>
             <a:r>
-              <a:rPr kumimoji="1" lang="ja-JP" altLang="en-US" smtClean="0"/>
+              <a:rPr kumimoji="1" lang="ja-JP" altLang="en-US"/>
               <a:t>レベル</a:t>
             </a:r>
           </a:p>
           <a:p>
             <a:pPr lvl="3"/>
             <a:r>
-              <a:rPr kumimoji="1" lang="ja-JP" altLang="en-US" smtClean="0"/>
+              <a:rPr kumimoji="1" lang="ja-JP" altLang="en-US"/>
               <a:t>第 </a:t>
             </a:r>
             <a:r>
-              <a:rPr kumimoji="1" lang="en-US" altLang="ja-JP" smtClean="0"/>
+              <a:rPr kumimoji="1" lang="en-US" altLang="ja-JP"/>
               <a:t>4 </a:t>
             </a:r>
             <a:r>
-              <a:rPr kumimoji="1" lang="ja-JP" altLang="en-US" smtClean="0"/>
+              <a:rPr kumimoji="1" lang="ja-JP" altLang="en-US"/>
               <a:t>レベル</a:t>
             </a:r>
           </a:p>
           <a:p>
             <a:pPr lvl="4"/>
             <a:r>
-              <a:rPr kumimoji="1" lang="ja-JP" altLang="en-US" smtClean="0"/>
+              <a:rPr kumimoji="1" lang="ja-JP" altLang="en-US"/>
               <a:t>第 </a:t>
             </a:r>
             <a:r>
-              <a:rPr kumimoji="1" lang="en-US" altLang="ja-JP" smtClean="0"/>
+              <a:rPr kumimoji="1" lang="en-US" altLang="ja-JP"/>
               <a:t>5 </a:t>
             </a:r>
             <a:r>
-              <a:rPr kumimoji="1" lang="ja-JP" altLang="en-US" smtClean="0"/>
+              <a:rPr kumimoji="1" lang="ja-JP" altLang="en-US"/>
               <a:t>レベル</a:t>
             </a:r>
-            <a:endParaRPr kumimoji="1" lang="ja-JP" altLang="en-US"/>
           </a:p>
         </p:txBody>
       </p:sp>
@@ -961,7 +967,7 @@
           <a:p>
             <a:fld id="{6C24F061-2875-984E-A862-A9FFC97B3261}" type="datetimeFigureOut">
               <a:rPr kumimoji="1" lang="ja-JP" altLang="en-US" smtClean="0"/>
-              <a:t>17/09/18</a:t>
+              <a:t>2026/9/28</a:t>
             </a:fld>
             <a:endParaRPr kumimoji="1" lang="ja-JP" altLang="en-US"/>
           </a:p>
@@ -1064,10 +1070,9 @@
           </a:lstStyle>
           <a:p>
             <a:r>
-              <a:rPr kumimoji="1" lang="ja-JP" altLang="en-US" smtClean="0"/>
+              <a:rPr kumimoji="1" lang="ja-JP" altLang="en-US"/>
               <a:t>マスター タイトルの書式設定</a:t>
             </a:r>
-            <a:endParaRPr kumimoji="1" lang="ja-JP" altLang="en-US"/>
           </a:p>
         </p:txBody>
       </p:sp>
@@ -1184,7 +1189,7 @@
           <a:p>
             <a:pPr lvl="0"/>
             <a:r>
-              <a:rPr kumimoji="1" lang="ja-JP" altLang="en-US" smtClean="0"/>
+              <a:rPr kumimoji="1" lang="ja-JP" altLang="en-US"/>
               <a:t>マスター テキストの書式設定</a:t>
             </a:r>
           </a:p>
@@ -1207,7 +1212,7 @@
           <a:p>
             <a:fld id="{6C24F061-2875-984E-A862-A9FFC97B3261}" type="datetimeFigureOut">
               <a:rPr kumimoji="1" lang="ja-JP" altLang="en-US" smtClean="0"/>
-              <a:t>17/09/18</a:t>
+              <a:t>2026/9/28</a:t>
             </a:fld>
             <a:endParaRPr kumimoji="1" lang="ja-JP" altLang="en-US"/>
           </a:p>
@@ -1301,10 +1306,9 @@
           <a:lstStyle/>
           <a:p>
             <a:r>
-              <a:rPr kumimoji="1" lang="ja-JP" altLang="en-US" smtClean="0"/>
+              <a:rPr kumimoji="1" lang="ja-JP" altLang="en-US"/>
               <a:t>マスター タイトルの書式設定</a:t>
             </a:r>
-            <a:endParaRPr kumimoji="1" lang="ja-JP" altLang="en-US"/>
           </a:p>
         </p:txBody>
       </p:sp>
@@ -1358,70 +1362,69 @@
           <a:p>
             <a:pPr lvl="0"/>
             <a:r>
-              <a:rPr kumimoji="1" lang="ja-JP" altLang="en-US" smtClean="0"/>
+              <a:rPr kumimoji="1" lang="ja-JP" altLang="en-US"/>
               <a:t>マスター テキストの書式設定</a:t>
             </a:r>
           </a:p>
           <a:p>
             <a:pPr lvl="1"/>
             <a:r>
-              <a:rPr kumimoji="1" lang="ja-JP" altLang="en-US" smtClean="0"/>
+              <a:rPr kumimoji="1" lang="ja-JP" altLang="en-US"/>
               <a:t>第 </a:t>
             </a:r>
             <a:r>
-              <a:rPr kumimoji="1" lang="en-US" altLang="ja-JP" smtClean="0"/>
+              <a:rPr kumimoji="1" lang="en-US" altLang="ja-JP"/>
               <a:t>2 </a:t>
             </a:r>
             <a:r>
-              <a:rPr kumimoji="1" lang="ja-JP" altLang="en-US" smtClean="0"/>
+              <a:rPr kumimoji="1" lang="ja-JP" altLang="en-US"/>
               <a:t>レベル</a:t>
             </a:r>
           </a:p>
           <a:p>
             <a:pPr lvl="2"/>
             <a:r>
-              <a:rPr kumimoji="1" lang="ja-JP" altLang="en-US" smtClean="0"/>
+              <a:rPr kumimoji="1" lang="ja-JP" altLang="en-US"/>
               <a:t>第 </a:t>
             </a:r>
             <a:r>
-              <a:rPr kumimoji="1" lang="en-US" altLang="ja-JP" smtClean="0"/>
+              <a:rPr kumimoji="1" lang="en-US" altLang="ja-JP"/>
               <a:t>3 </a:t>
             </a:r>
             <a:r>
-              <a:rPr kumimoji="1" lang="ja-JP" altLang="en-US" smtClean="0"/>
+              <a:rPr kumimoji="1" lang="ja-JP" altLang="en-US"/>
               <a:t>レベル</a:t>
             </a:r>
           </a:p>
           <a:p>
             <a:pPr lvl="3"/>
             <a:r>
-              <a:rPr kumimoji="1" lang="ja-JP" altLang="en-US" smtClean="0"/>
+              <a:rPr kumimoji="1" lang="ja-JP" altLang="en-US"/>
               <a:t>第 </a:t>
             </a:r>
             <a:r>
-              <a:rPr kumimoji="1" lang="en-US" altLang="ja-JP" smtClean="0"/>
+              <a:rPr kumimoji="1" lang="en-US" altLang="ja-JP"/>
               <a:t>4 </a:t>
             </a:r>
             <a:r>
-              <a:rPr kumimoji="1" lang="ja-JP" altLang="en-US" smtClean="0"/>
+              <a:rPr kumimoji="1" lang="ja-JP" altLang="en-US"/>
               <a:t>レベル</a:t>
             </a:r>
           </a:p>
           <a:p>
             <a:pPr lvl="4"/>
             <a:r>
-              <a:rPr kumimoji="1" lang="ja-JP" altLang="en-US" smtClean="0"/>
+              <a:rPr kumimoji="1" lang="ja-JP" altLang="en-US"/>
               <a:t>第 </a:t>
             </a:r>
             <a:r>
-              <a:rPr kumimoji="1" lang="en-US" altLang="ja-JP" smtClean="0"/>
+              <a:rPr kumimoji="1" lang="en-US" altLang="ja-JP"/>
               <a:t>5 </a:t>
             </a:r>
             <a:r>
-              <a:rPr kumimoji="1" lang="ja-JP" altLang="en-US" smtClean="0"/>
+              <a:rPr kumimoji="1" lang="ja-JP" altLang="en-US"/>
               <a:t>レベル</a:t>
             </a:r>
-            <a:endParaRPr kumimoji="1" lang="ja-JP" altLang="en-US"/>
           </a:p>
         </p:txBody>
       </p:sp>
@@ -1475,70 +1478,69 @@
           <a:p>
             <a:pPr lvl="0"/>
             <a:r>
-              <a:rPr kumimoji="1" lang="ja-JP" altLang="en-US" smtClean="0"/>
+              <a:rPr kumimoji="1" lang="ja-JP" altLang="en-US"/>
               <a:t>マスター テキストの書式設定</a:t>
             </a:r>
           </a:p>
           <a:p>
             <a:pPr lvl="1"/>
             <a:r>
-              <a:rPr kumimoji="1" lang="ja-JP" altLang="en-US" smtClean="0"/>
+              <a:rPr kumimoji="1" lang="ja-JP" altLang="en-US"/>
               <a:t>第 </a:t>
             </a:r>
             <a:r>
-              <a:rPr kumimoji="1" lang="en-US" altLang="ja-JP" smtClean="0"/>
+              <a:rPr kumimoji="1" lang="en-US" altLang="ja-JP"/>
               <a:t>2 </a:t>
             </a:r>
             <a:r>
-              <a:rPr kumimoji="1" lang="ja-JP" altLang="en-US" smtClean="0"/>
+              <a:rPr kumimoji="1" lang="ja-JP" altLang="en-US"/>
               <a:t>レベル</a:t>
             </a:r>
           </a:p>
           <a:p>
             <a:pPr lvl="2"/>
             <a:r>
-              <a:rPr kumimoji="1" lang="ja-JP" altLang="en-US" smtClean="0"/>
+              <a:rPr kumimoji="1" lang="ja-JP" altLang="en-US"/>
               <a:t>第 </a:t>
             </a:r>
             <a:r>
-              <a:rPr kumimoji="1" lang="en-US" altLang="ja-JP" smtClean="0"/>
+              <a:rPr kumimoji="1" lang="en-US" altLang="ja-JP"/>
               <a:t>3 </a:t>
             </a:r>
             <a:r>
-              <a:rPr kumimoji="1" lang="ja-JP" altLang="en-US" smtClean="0"/>
+              <a:rPr kumimoji="1" lang="ja-JP" altLang="en-US"/>
               <a:t>レベル</a:t>
             </a:r>
           </a:p>
           <a:p>
             <a:pPr lvl="3"/>
             <a:r>
-              <a:rPr kumimoji="1" lang="ja-JP" altLang="en-US" smtClean="0"/>
+              <a:rPr kumimoji="1" lang="ja-JP" altLang="en-US"/>
               <a:t>第 </a:t>
             </a:r>
             <a:r>
-              <a:rPr kumimoji="1" lang="en-US" altLang="ja-JP" smtClean="0"/>
+              <a:rPr kumimoji="1" lang="en-US" altLang="ja-JP"/>
               <a:t>4 </a:t>
             </a:r>
             <a:r>
-              <a:rPr kumimoji="1" lang="ja-JP" altLang="en-US" smtClean="0"/>
+              <a:rPr kumimoji="1" lang="ja-JP" altLang="en-US"/>
               <a:t>レベル</a:t>
             </a:r>
           </a:p>
           <a:p>
             <a:pPr lvl="4"/>
             <a:r>
-              <a:rPr kumimoji="1" lang="ja-JP" altLang="en-US" smtClean="0"/>
+              <a:rPr kumimoji="1" lang="ja-JP" altLang="en-US"/>
               <a:t>第 </a:t>
             </a:r>
             <a:r>
-              <a:rPr kumimoji="1" lang="en-US" altLang="ja-JP" smtClean="0"/>
+              <a:rPr kumimoji="1" lang="en-US" altLang="ja-JP"/>
               <a:t>5 </a:t>
             </a:r>
             <a:r>
-              <a:rPr kumimoji="1" lang="ja-JP" altLang="en-US" smtClean="0"/>
+              <a:rPr kumimoji="1" lang="ja-JP" altLang="en-US"/>
               <a:t>レベル</a:t>
             </a:r>
-            <a:endParaRPr kumimoji="1" lang="ja-JP" altLang="en-US"/>
           </a:p>
         </p:txBody>
       </p:sp>
@@ -1559,7 +1561,7 @@
           <a:p>
             <a:fld id="{6C24F061-2875-984E-A862-A9FFC97B3261}" type="datetimeFigureOut">
               <a:rPr kumimoji="1" lang="ja-JP" altLang="en-US" smtClean="0"/>
-              <a:t>17/09/18</a:t>
+              <a:t>2026/9/28</a:t>
             </a:fld>
             <a:endParaRPr kumimoji="1" lang="ja-JP" altLang="en-US"/>
           </a:p>
@@ -1657,10 +1659,9 @@
           </a:lstStyle>
           <a:p>
             <a:r>
-              <a:rPr kumimoji="1" lang="ja-JP" altLang="en-US" smtClean="0"/>
+              <a:rPr kumimoji="1" lang="ja-JP" altLang="en-US"/>
               <a:t>マスター タイトルの書式設定</a:t>
             </a:r>
-            <a:endParaRPr kumimoji="1" lang="ja-JP" altLang="en-US"/>
           </a:p>
         </p:txBody>
       </p:sp>
@@ -1723,7 +1724,7 @@
           <a:p>
             <a:pPr lvl="0"/>
             <a:r>
-              <a:rPr kumimoji="1" lang="ja-JP" altLang="en-US" smtClean="0"/>
+              <a:rPr kumimoji="1" lang="ja-JP" altLang="en-US"/>
               <a:t>マスター テキストの書式設定</a:t>
             </a:r>
           </a:p>
@@ -1779,70 +1780,69 @@
           <a:p>
             <a:pPr lvl="0"/>
             <a:r>
-              <a:rPr kumimoji="1" lang="ja-JP" altLang="en-US" smtClean="0"/>
+              <a:rPr kumimoji="1" lang="ja-JP" altLang="en-US"/>
               <a:t>マスター テキストの書式設定</a:t>
             </a:r>
           </a:p>
           <a:p>
             <a:pPr lvl="1"/>
             <a:r>
-              <a:rPr kumimoji="1" lang="ja-JP" altLang="en-US" smtClean="0"/>
+              <a:rPr kumimoji="1" lang="ja-JP" altLang="en-US"/>
               <a:t>第 </a:t>
             </a:r>
             <a:r>
-              <a:rPr kumimoji="1" lang="en-US" altLang="ja-JP" smtClean="0"/>
+              <a:rPr kumimoji="1" lang="en-US" altLang="ja-JP"/>
               <a:t>2 </a:t>
             </a:r>
             <a:r>
-              <a:rPr kumimoji="1" lang="ja-JP" altLang="en-US" smtClean="0"/>
+              <a:rPr kumimoji="1" lang="ja-JP" altLang="en-US"/>
               <a:t>レベル</a:t>
             </a:r>
           </a:p>
           <a:p>
             <a:pPr lvl="2"/>
             <a:r>
-              <a:rPr kumimoji="1" lang="ja-JP" altLang="en-US" smtClean="0"/>
+              <a:rPr kumimoji="1" lang="ja-JP" altLang="en-US"/>
               <a:t>第 </a:t>
             </a:r>
             <a:r>
-              <a:rPr kumimoji="1" lang="en-US" altLang="ja-JP" smtClean="0"/>
+              <a:rPr kumimoji="1" lang="en-US" altLang="ja-JP"/>
               <a:t>3 </a:t>
             </a:r>
             <a:r>
-              <a:rPr kumimoji="1" lang="ja-JP" altLang="en-US" smtClean="0"/>
+              <a:rPr kumimoji="1" lang="ja-JP" altLang="en-US"/>
               <a:t>レベル</a:t>
             </a:r>
           </a:p>
           <a:p>
             <a:pPr lvl="3"/>
             <a:r>
-              <a:rPr kumimoji="1" lang="ja-JP" altLang="en-US" smtClean="0"/>
+              <a:rPr kumimoji="1" lang="ja-JP" altLang="en-US"/>
               <a:t>第 </a:t>
             </a:r>
             <a:r>
-              <a:rPr kumimoji="1" lang="en-US" altLang="ja-JP" smtClean="0"/>
+              <a:rPr kumimoji="1" lang="en-US" altLang="ja-JP"/>
               <a:t>4 </a:t>
             </a:r>
             <a:r>
-              <a:rPr kumimoji="1" lang="ja-JP" altLang="en-US" smtClean="0"/>
+              <a:rPr kumimoji="1" lang="ja-JP" altLang="en-US"/>
               <a:t>レベル</a:t>
             </a:r>
           </a:p>
           <a:p>
             <a:pPr lvl="4"/>
             <a:r>
-              <a:rPr kumimoji="1" lang="ja-JP" altLang="en-US" smtClean="0"/>
+              <a:rPr kumimoji="1" lang="ja-JP" altLang="en-US"/>
               <a:t>第 </a:t>
             </a:r>
             <a:r>
-              <a:rPr kumimoji="1" lang="en-US" altLang="ja-JP" smtClean="0"/>
+              <a:rPr kumimoji="1" lang="en-US" altLang="ja-JP"/>
               <a:t>5 </a:t>
             </a:r>
             <a:r>
-              <a:rPr kumimoji="1" lang="ja-JP" altLang="en-US" smtClean="0"/>
+              <a:rPr kumimoji="1" lang="ja-JP" altLang="en-US"/>
               <a:t>レベル</a:t>
             </a:r>
-            <a:endParaRPr kumimoji="1" lang="ja-JP" altLang="en-US"/>
           </a:p>
         </p:txBody>
       </p:sp>
@@ -1905,7 +1905,7 @@
           <a:p>
             <a:pPr lvl="0"/>
             <a:r>
-              <a:rPr kumimoji="1" lang="ja-JP" altLang="en-US" smtClean="0"/>
+              <a:rPr kumimoji="1" lang="ja-JP" altLang="en-US"/>
               <a:t>マスター テキストの書式設定</a:t>
             </a:r>
           </a:p>
@@ -1961,70 +1961,69 @@
           <a:p>
             <a:pPr lvl="0"/>
             <a:r>
-              <a:rPr kumimoji="1" lang="ja-JP" altLang="en-US" smtClean="0"/>
+              <a:rPr kumimoji="1" lang="ja-JP" altLang="en-US"/>
               <a:t>マスター テキストの書式設定</a:t>
             </a:r>
           </a:p>
           <a:p>
             <a:pPr lvl="1"/>
             <a:r>
-              <a:rPr kumimoji="1" lang="ja-JP" altLang="en-US" smtClean="0"/>
+              <a:rPr kumimoji="1" lang="ja-JP" altLang="en-US"/>
               <a:t>第 </a:t>
             </a:r>
             <a:r>
-              <a:rPr kumimoji="1" lang="en-US" altLang="ja-JP" smtClean="0"/>
+              <a:rPr kumimoji="1" lang="en-US" altLang="ja-JP"/>
               <a:t>2 </a:t>
             </a:r>
             <a:r>
-              <a:rPr kumimoji="1" lang="ja-JP" altLang="en-US" smtClean="0"/>
+              <a:rPr kumimoji="1" lang="ja-JP" altLang="en-US"/>
               <a:t>レベル</a:t>
             </a:r>
           </a:p>
           <a:p>
             <a:pPr lvl="2"/>
             <a:r>
-              <a:rPr kumimoji="1" lang="ja-JP" altLang="en-US" smtClean="0"/>
+              <a:rPr kumimoji="1" lang="ja-JP" altLang="en-US"/>
               <a:t>第 </a:t>
             </a:r>
             <a:r>
-              <a:rPr kumimoji="1" lang="en-US" altLang="ja-JP" smtClean="0"/>
+              <a:rPr kumimoji="1" lang="en-US" altLang="ja-JP"/>
               <a:t>3 </a:t>
             </a:r>
             <a:r>
-              <a:rPr kumimoji="1" lang="ja-JP" altLang="en-US" smtClean="0"/>
+              <a:rPr kumimoji="1" lang="ja-JP" altLang="en-US"/>
               <a:t>レベル</a:t>
             </a:r>
           </a:p>
           <a:p>
             <a:pPr lvl="3"/>
             <a:r>
-              <a:rPr kumimoji="1" lang="ja-JP" altLang="en-US" smtClean="0"/>
+              <a:rPr kumimoji="1" lang="ja-JP" altLang="en-US"/>
               <a:t>第 </a:t>
             </a:r>
             <a:r>
-              <a:rPr kumimoji="1" lang="en-US" altLang="ja-JP" smtClean="0"/>
+              <a:rPr kumimoji="1" lang="en-US" altLang="ja-JP"/>
               <a:t>4 </a:t>
             </a:r>
             <a:r>
-              <a:rPr kumimoji="1" lang="ja-JP" altLang="en-US" smtClean="0"/>
+              <a:rPr kumimoji="1" lang="ja-JP" altLang="en-US"/>
               <a:t>レベル</a:t>
             </a:r>
           </a:p>
           <a:p>
             <a:pPr lvl="4"/>
             <a:r>
-              <a:rPr kumimoji="1" lang="ja-JP" altLang="en-US" smtClean="0"/>
+              <a:rPr kumimoji="1" lang="ja-JP" altLang="en-US"/>
               <a:t>第 </a:t>
             </a:r>
             <a:r>
-              <a:rPr kumimoji="1" lang="en-US" altLang="ja-JP" smtClean="0"/>
+              <a:rPr kumimoji="1" lang="en-US" altLang="ja-JP"/>
               <a:t>5 </a:t>
             </a:r>
             <a:r>
-              <a:rPr kumimoji="1" lang="ja-JP" altLang="en-US" smtClean="0"/>
+              <a:rPr kumimoji="1" lang="ja-JP" altLang="en-US"/>
               <a:t>レベル</a:t>
             </a:r>
-            <a:endParaRPr kumimoji="1" lang="ja-JP" altLang="en-US"/>
           </a:p>
         </p:txBody>
       </p:sp>
@@ -2045,7 +2044,7 @@
           <a:p>
             <a:fld id="{6C24F061-2875-984E-A862-A9FFC97B3261}" type="datetimeFigureOut">
               <a:rPr kumimoji="1" lang="ja-JP" altLang="en-US" smtClean="0"/>
-              <a:t>17/09/18</a:t>
+              <a:t>2026/9/28</a:t>
             </a:fld>
             <a:endParaRPr kumimoji="1" lang="ja-JP" altLang="en-US"/>
           </a:p>
@@ -2139,10 +2138,9 @@
           <a:lstStyle/>
           <a:p>
             <a:r>
-              <a:rPr kumimoji="1" lang="ja-JP" altLang="en-US" smtClean="0"/>
+              <a:rPr kumimoji="1" lang="ja-JP" altLang="en-US"/>
               <a:t>マスター タイトルの書式設定</a:t>
             </a:r>
-            <a:endParaRPr kumimoji="1" lang="ja-JP" altLang="en-US"/>
           </a:p>
         </p:txBody>
       </p:sp>
@@ -2163,7 +2161,7 @@
           <a:p>
             <a:fld id="{6C24F061-2875-984E-A862-A9FFC97B3261}" type="datetimeFigureOut">
               <a:rPr kumimoji="1" lang="ja-JP" altLang="en-US" smtClean="0"/>
-              <a:t>17/09/18</a:t>
+              <a:t>2026/9/28</a:t>
             </a:fld>
             <a:endParaRPr kumimoji="1" lang="ja-JP" altLang="en-US"/>
           </a:p>
@@ -2258,7 +2256,7 @@
           <a:p>
             <a:fld id="{6C24F061-2875-984E-A862-A9FFC97B3261}" type="datetimeFigureOut">
               <a:rPr kumimoji="1" lang="ja-JP" altLang="en-US" smtClean="0"/>
-              <a:t>17/09/18</a:t>
+              <a:t>2026/9/28</a:t>
             </a:fld>
             <a:endParaRPr kumimoji="1" lang="ja-JP" altLang="en-US"/>
           </a:p>
@@ -2361,10 +2359,9 @@
           </a:lstStyle>
           <a:p>
             <a:r>
-              <a:rPr kumimoji="1" lang="ja-JP" altLang="en-US" smtClean="0"/>
+              <a:rPr kumimoji="1" lang="ja-JP" altLang="en-US"/>
               <a:t>マスター タイトルの書式設定</a:t>
             </a:r>
-            <a:endParaRPr kumimoji="1" lang="ja-JP" altLang="en-US"/>
           </a:p>
         </p:txBody>
       </p:sp>
@@ -2418,70 +2415,69 @@
           <a:p>
             <a:pPr lvl="0"/>
             <a:r>
-              <a:rPr kumimoji="1" lang="ja-JP" altLang="en-US" smtClean="0"/>
+              <a:rPr kumimoji="1" lang="ja-JP" altLang="en-US"/>
               <a:t>マスター テキストの書式設定</a:t>
             </a:r>
           </a:p>
           <a:p>
             <a:pPr lvl="1"/>
             <a:r>
-              <a:rPr kumimoji="1" lang="ja-JP" altLang="en-US" smtClean="0"/>
+              <a:rPr kumimoji="1" lang="ja-JP" altLang="en-US"/>
               <a:t>第 </a:t>
             </a:r>
             <a:r>
-              <a:rPr kumimoji="1" lang="en-US" altLang="ja-JP" smtClean="0"/>
+              <a:rPr kumimoji="1" lang="en-US" altLang="ja-JP"/>
               <a:t>2 </a:t>
             </a:r>
             <a:r>
-              <a:rPr kumimoji="1" lang="ja-JP" altLang="en-US" smtClean="0"/>
+              <a:rPr kumimoji="1" lang="ja-JP" altLang="en-US"/>
               <a:t>レベル</a:t>
             </a:r>
           </a:p>
           <a:p>
             <a:pPr lvl="2"/>
             <a:r>
-              <a:rPr kumimoji="1" lang="ja-JP" altLang="en-US" smtClean="0"/>
+              <a:rPr kumimoji="1" lang="ja-JP" altLang="en-US"/>
               <a:t>第 </a:t>
             </a:r>
             <a:r>
-              <a:rPr kumimoji="1" lang="en-US" altLang="ja-JP" smtClean="0"/>
+              <a:rPr kumimoji="1" lang="en-US" altLang="ja-JP"/>
               <a:t>3 </a:t>
             </a:r>
             <a:r>
-              <a:rPr kumimoji="1" lang="ja-JP" altLang="en-US" smtClean="0"/>
+              <a:rPr kumimoji="1" lang="ja-JP" altLang="en-US"/>
               <a:t>レベル</a:t>
             </a:r>
           </a:p>
           <a:p>
             <a:pPr lvl="3"/>
             <a:r>
-              <a:rPr kumimoji="1" lang="ja-JP" altLang="en-US" smtClean="0"/>
+              <a:rPr kumimoji="1" lang="ja-JP" altLang="en-US"/>
               <a:t>第 </a:t>
             </a:r>
             <a:r>
-              <a:rPr kumimoji="1" lang="en-US" altLang="ja-JP" smtClean="0"/>
+              <a:rPr kumimoji="1" lang="en-US" altLang="ja-JP"/>
               <a:t>4 </a:t>
             </a:r>
             <a:r>
-              <a:rPr kumimoji="1" lang="ja-JP" altLang="en-US" smtClean="0"/>
+              <a:rPr kumimoji="1" lang="ja-JP" altLang="en-US"/>
               <a:t>レベル</a:t>
             </a:r>
           </a:p>
           <a:p>
             <a:pPr lvl="4"/>
             <a:r>
-              <a:rPr kumimoji="1" lang="ja-JP" altLang="en-US" smtClean="0"/>
+              <a:rPr kumimoji="1" lang="ja-JP" altLang="en-US"/>
               <a:t>第 </a:t>
             </a:r>
             <a:r>
-              <a:rPr kumimoji="1" lang="en-US" altLang="ja-JP" smtClean="0"/>
+              <a:rPr kumimoji="1" lang="en-US" altLang="ja-JP"/>
               <a:t>5 </a:t>
             </a:r>
             <a:r>
-              <a:rPr kumimoji="1" lang="ja-JP" altLang="en-US" smtClean="0"/>
+              <a:rPr kumimoji="1" lang="ja-JP" altLang="en-US"/>
               <a:t>レベル</a:t>
             </a:r>
-            <a:endParaRPr kumimoji="1" lang="ja-JP" altLang="en-US"/>
           </a:p>
         </p:txBody>
       </p:sp>
@@ -2544,7 +2540,7 @@
           <a:p>
             <a:pPr lvl="0"/>
             <a:r>
-              <a:rPr kumimoji="1" lang="ja-JP" altLang="en-US" smtClean="0"/>
+              <a:rPr kumimoji="1" lang="ja-JP" altLang="en-US"/>
               <a:t>マスター テキストの書式設定</a:t>
             </a:r>
           </a:p>
@@ -2567,7 +2563,7 @@
           <a:p>
             <a:fld id="{6C24F061-2875-984E-A862-A9FFC97B3261}" type="datetimeFigureOut">
               <a:rPr kumimoji="1" lang="ja-JP" altLang="en-US" smtClean="0"/>
-              <a:t>17/09/18</a:t>
+              <a:t>2026/9/28</a:t>
             </a:fld>
             <a:endParaRPr kumimoji="1" lang="ja-JP" altLang="en-US"/>
           </a:p>
@@ -2670,10 +2666,9 @@
           </a:lstStyle>
           <a:p>
             <a:r>
-              <a:rPr kumimoji="1" lang="ja-JP" altLang="en-US" smtClean="0"/>
+              <a:rPr kumimoji="1" lang="ja-JP" altLang="en-US"/>
               <a:t>マスター タイトルの書式設定</a:t>
             </a:r>
-            <a:endParaRPr kumimoji="1" lang="ja-JP" altLang="en-US"/>
           </a:p>
         </p:txBody>
       </p:sp>
@@ -2797,7 +2792,7 @@
           <a:p>
             <a:pPr lvl="0"/>
             <a:r>
-              <a:rPr kumimoji="1" lang="ja-JP" altLang="en-US" smtClean="0"/>
+              <a:rPr kumimoji="1" lang="ja-JP" altLang="en-US"/>
               <a:t>マスター テキストの書式設定</a:t>
             </a:r>
           </a:p>
@@ -2820,7 +2815,7 @@
           <a:p>
             <a:fld id="{6C24F061-2875-984E-A862-A9FFC97B3261}" type="datetimeFigureOut">
               <a:rPr kumimoji="1" lang="ja-JP" altLang="en-US" smtClean="0"/>
-              <a:t>17/09/18</a:t>
+              <a:t>2026/9/28</a:t>
             </a:fld>
             <a:endParaRPr kumimoji="1" lang="ja-JP" altLang="en-US"/>
           </a:p>
@@ -2929,10 +2924,9 @@
           <a:lstStyle/>
           <a:p>
             <a:r>
-              <a:rPr kumimoji="1" lang="ja-JP" altLang="en-US" smtClean="0"/>
+              <a:rPr kumimoji="1" lang="ja-JP" altLang="en-US"/>
               <a:t>マスター タイトルの書式設定</a:t>
             </a:r>
-            <a:endParaRPr kumimoji="1" lang="ja-JP" altLang="en-US"/>
           </a:p>
         </p:txBody>
       </p:sp>
@@ -2963,70 +2957,69 @@
           <a:p>
             <a:pPr lvl="0"/>
             <a:r>
-              <a:rPr kumimoji="1" lang="ja-JP" altLang="en-US" smtClean="0"/>
+              <a:rPr kumimoji="1" lang="ja-JP" altLang="en-US"/>
               <a:t>マスター テキストの書式設定</a:t>
             </a:r>
           </a:p>
           <a:p>
             <a:pPr lvl="1"/>
             <a:r>
-              <a:rPr kumimoji="1" lang="ja-JP" altLang="en-US" smtClean="0"/>
+              <a:rPr kumimoji="1" lang="ja-JP" altLang="en-US"/>
               <a:t>第 </a:t>
             </a:r>
             <a:r>
-              <a:rPr kumimoji="1" lang="en-US" altLang="ja-JP" smtClean="0"/>
+              <a:rPr kumimoji="1" lang="en-US" altLang="ja-JP"/>
               <a:t>2 </a:t>
             </a:r>
             <a:r>
-              <a:rPr kumimoji="1" lang="ja-JP" altLang="en-US" smtClean="0"/>
+              <a:rPr kumimoji="1" lang="ja-JP" altLang="en-US"/>
               <a:t>レベル</a:t>
             </a:r>
           </a:p>
           <a:p>
             <a:pPr lvl="2"/>
             <a:r>
-              <a:rPr kumimoji="1" lang="ja-JP" altLang="en-US" smtClean="0"/>
+              <a:rPr kumimoji="1" lang="ja-JP" altLang="en-US"/>
               <a:t>第 </a:t>
             </a:r>
             <a:r>
-              <a:rPr kumimoji="1" lang="en-US" altLang="ja-JP" smtClean="0"/>
+              <a:rPr kumimoji="1" lang="en-US" altLang="ja-JP"/>
               <a:t>3 </a:t>
             </a:r>
             <a:r>
-              <a:rPr kumimoji="1" lang="ja-JP" altLang="en-US" smtClean="0"/>
+              <a:rPr kumimoji="1" lang="ja-JP" altLang="en-US"/>
               <a:t>レベル</a:t>
             </a:r>
           </a:p>
           <a:p>
             <a:pPr lvl="3"/>
             <a:r>
-              <a:rPr kumimoji="1" lang="ja-JP" altLang="en-US" smtClean="0"/>
+              <a:rPr kumimoji="1" lang="ja-JP" altLang="en-US"/>
               <a:t>第 </a:t>
             </a:r>
             <a:r>
-              <a:rPr kumimoji="1" lang="en-US" altLang="ja-JP" smtClean="0"/>
+              <a:rPr kumimoji="1" lang="en-US" altLang="ja-JP"/>
               <a:t>4 </a:t>
             </a:r>
             <a:r>
-              <a:rPr kumimoji="1" lang="ja-JP" altLang="en-US" smtClean="0"/>
+              <a:rPr kumimoji="1" lang="ja-JP" altLang="en-US"/>
               <a:t>レベル</a:t>
             </a:r>
           </a:p>
           <a:p>
             <a:pPr lvl="4"/>
             <a:r>
-              <a:rPr kumimoji="1" lang="ja-JP" altLang="en-US" smtClean="0"/>
+              <a:rPr kumimoji="1" lang="ja-JP" altLang="en-US"/>
               <a:t>第 </a:t>
             </a:r>
             <a:r>
-              <a:rPr kumimoji="1" lang="en-US" altLang="ja-JP" smtClean="0"/>
+              <a:rPr kumimoji="1" lang="en-US" altLang="ja-JP"/>
               <a:t>5 </a:t>
             </a:r>
             <a:r>
-              <a:rPr kumimoji="1" lang="ja-JP" altLang="en-US" smtClean="0"/>
+              <a:rPr kumimoji="1" lang="ja-JP" altLang="en-US"/>
               <a:t>レベル</a:t>
             </a:r>
-            <a:endParaRPr kumimoji="1" lang="ja-JP" altLang="en-US"/>
           </a:p>
         </p:txBody>
       </p:sp>
@@ -3065,7 +3058,7 @@
           <a:p>
             <a:fld id="{6C24F061-2875-984E-A862-A9FFC97B3261}" type="datetimeFigureOut">
               <a:rPr kumimoji="1" lang="ja-JP" altLang="en-US" smtClean="0"/>
-              <a:t>17/09/18</a:t>
+              <a:t>2026/9/28</a:t>
             </a:fld>
             <a:endParaRPr kumimoji="1" lang="ja-JP" altLang="en-US"/>
           </a:p>
@@ -3463,10 +3456,9 @@
           <a:lstStyle/>
           <a:p>
             <a:r>
-              <a:rPr kumimoji="1" lang="ja-JP" altLang="en-US" dirty="0" smtClean="0"/>
+              <a:rPr kumimoji="1" lang="ja-JP" altLang="en-US" dirty="0"/>
               <a:t>プログラミング言語論</a:t>
             </a:r>
-            <a:endParaRPr kumimoji="1" lang="ja-JP" altLang="en-US" dirty="0"/>
           </a:p>
         </p:txBody>
       </p:sp>
@@ -3496,22 +3488,21 @@
               <a:t>第</a:t>
             </a:r>
             <a:r>
-              <a:rPr lang="en-US" altLang="ja-JP" sz="3200" dirty="0" smtClean="0"/>
+              <a:rPr lang="en-US" altLang="ja-JP" sz="3200" dirty="0"/>
               <a:t>12</a:t>
             </a:r>
             <a:r>
-              <a:rPr lang="ja-JP" altLang="en-US" sz="3200" dirty="0" smtClean="0"/>
+              <a:rPr lang="ja-JP" altLang="en-US" sz="3200" dirty="0"/>
               <a:t>回</a:t>
             </a:r>
             <a:r>
-              <a:rPr lang="en-US" altLang="ja-JP" sz="3200" dirty="0" smtClean="0"/>
+              <a:rPr lang="en-US" altLang="ja-JP" sz="3200" dirty="0"/>
               <a:t> </a:t>
             </a:r>
             <a:r>
-              <a:rPr lang="ja-JP" altLang="en-US" sz="3200" dirty="0" smtClean="0"/>
+              <a:rPr lang="ja-JP" altLang="en-US" sz="3200" dirty="0"/>
               <a:t>関数型プログラミング</a:t>
             </a:r>
-            <a:endParaRPr lang="ja-JP" altLang="en-US" sz="3200" dirty="0"/>
           </a:p>
         </p:txBody>
       </p:sp>
@@ -3523,7 +3514,7 @@
         </p:nvSpPr>
         <p:spPr>
           <a:xfrm>
-            <a:off x="2373570" y="5116286"/>
+            <a:off x="2485007" y="5126796"/>
             <a:ext cx="4173985" cy="584776"/>
           </a:xfrm>
           <a:prstGeom prst="rect">
@@ -3539,16 +3530,12 @@
           <a:p>
             <a:pPr algn="ctr"/>
             <a:r>
-              <a:rPr kumimoji="1" lang="ja-JP" altLang="en-US" sz="3200" dirty="0" smtClean="0"/>
-              <a:t>情報工学科</a:t>
-            </a:r>
-            <a:r>
-              <a:rPr kumimoji="1" lang="en-US" altLang="ja-JP" sz="3200" dirty="0" smtClean="0"/>
-              <a:t>  </a:t>
-            </a:r>
-            <a:r>
-              <a:rPr lang="ja-JP" altLang="en-US" sz="3200" dirty="0" smtClean="0"/>
-              <a:t>篠埜　功</a:t>
+              <a:rPr lang="ja-JP" altLang="en-US" sz="3200"/>
+              <a:t>篠埜　</a:t>
+            </a:r>
+            <a:r>
+              <a:rPr lang="ja-JP" altLang="en-US" sz="3200" dirty="0"/>
+              <a:t>功</a:t>
             </a:r>
             <a:endParaRPr kumimoji="1" lang="ja-JP" altLang="en-US" sz="3200" dirty="0"/>
           </a:p>
@@ -3600,22 +3587,21 @@
           <a:lstStyle/>
           <a:p>
             <a:r>
-              <a:rPr kumimoji="1" lang="en-US" altLang="ja-JP" dirty="0" smtClean="0"/>
+              <a:rPr kumimoji="1" lang="en-US" altLang="ja-JP" dirty="0"/>
               <a:t>C</a:t>
             </a:r>
             <a:r>
-              <a:rPr kumimoji="1" lang="ja-JP" altLang="en-US" dirty="0" smtClean="0"/>
+              <a:rPr kumimoji="1" lang="ja-JP" altLang="en-US" dirty="0"/>
               <a:t>や</a:t>
             </a:r>
             <a:r>
-              <a:rPr kumimoji="1" lang="en-US" altLang="ja-JP" dirty="0" smtClean="0"/>
+              <a:rPr kumimoji="1" lang="en-US" altLang="ja-JP" dirty="0"/>
               <a:t>Pascal</a:t>
             </a:r>
             <a:r>
-              <a:rPr kumimoji="1" lang="ja-JP" altLang="en-US" dirty="0" smtClean="0"/>
+              <a:rPr kumimoji="1" lang="ja-JP" altLang="en-US" dirty="0"/>
               <a:t>における識別子</a:t>
             </a:r>
-            <a:endParaRPr kumimoji="1" lang="ja-JP" altLang="en-US" dirty="0"/>
           </a:p>
         </p:txBody>
       </p:sp>
@@ -3635,62 +3621,61 @@
           <a:lstStyle/>
           <a:p>
             <a:r>
-              <a:rPr kumimoji="1" lang="en-US" altLang="ja-JP" dirty="0" smtClean="0"/>
+              <a:rPr kumimoji="1" lang="en-US" altLang="ja-JP" dirty="0"/>
               <a:t>C</a:t>
             </a:r>
             <a:r>
-              <a:rPr kumimoji="1" lang="ja-JP" altLang="en-US" dirty="0" smtClean="0"/>
+              <a:rPr kumimoji="1" lang="ja-JP" altLang="en-US" dirty="0"/>
               <a:t>や</a:t>
             </a:r>
             <a:r>
-              <a:rPr kumimoji="1" lang="en-US" altLang="ja-JP" dirty="0" smtClean="0"/>
+              <a:rPr kumimoji="1" lang="en-US" altLang="ja-JP" dirty="0"/>
               <a:t>Pascal</a:t>
             </a:r>
             <a:r>
-              <a:rPr kumimoji="1" lang="ja-JP" altLang="en-US" dirty="0" smtClean="0"/>
+              <a:rPr kumimoji="1" lang="ja-JP" altLang="en-US" dirty="0"/>
               <a:t>の識別子は、</a:t>
             </a:r>
             <a:r>
-              <a:rPr kumimoji="1" lang="en-US" altLang="ja-JP" dirty="0" err="1" smtClean="0"/>
+              <a:rPr kumimoji="1" lang="en-US" altLang="ja-JP" dirty="0" err="1"/>
               <a:t>int</a:t>
             </a:r>
             <a:r>
-              <a:rPr kumimoji="1" lang="ja-JP" altLang="en-US" dirty="0" smtClean="0"/>
+              <a:rPr kumimoji="1" lang="ja-JP" altLang="en-US" dirty="0"/>
               <a:t>型の変数は代入可能な変数であるが、関数宣言をした場合に関数名は</a:t>
             </a:r>
             <a:r>
-              <a:rPr kumimoji="1" lang="en-US" altLang="ja-JP" dirty="0" smtClean="0"/>
+              <a:rPr kumimoji="1" lang="en-US" altLang="ja-JP" dirty="0"/>
               <a:t>constant</a:t>
             </a:r>
             <a:r>
-              <a:rPr kumimoji="1" lang="ja-JP" altLang="en-US" dirty="0" smtClean="0"/>
+              <a:rPr kumimoji="1" lang="ja-JP" altLang="en-US" dirty="0"/>
               <a:t>であり、代入によって別の関数に変更することはできない。つまり</a:t>
             </a:r>
             <a:r>
-              <a:rPr kumimoji="1" lang="en-US" altLang="ja-JP" dirty="0" smtClean="0"/>
+              <a:rPr kumimoji="1" lang="en-US" altLang="ja-JP" dirty="0"/>
               <a:t>C</a:t>
             </a:r>
             <a:r>
-              <a:rPr kumimoji="1" lang="ja-JP" altLang="en-US" dirty="0" smtClean="0"/>
+              <a:rPr kumimoji="1" lang="ja-JP" altLang="en-US" dirty="0"/>
               <a:t>や</a:t>
             </a:r>
             <a:r>
-              <a:rPr kumimoji="1" lang="en-US" altLang="ja-JP" dirty="0" smtClean="0"/>
+              <a:rPr kumimoji="1" lang="en-US" altLang="ja-JP" dirty="0"/>
               <a:t>Pascal</a:t>
             </a:r>
             <a:r>
-              <a:rPr kumimoji="1" lang="ja-JP" altLang="en-US" dirty="0" smtClean="0"/>
+              <a:rPr kumimoji="1" lang="ja-JP" altLang="en-US" dirty="0"/>
               <a:t>では型に応じて</a:t>
             </a:r>
             <a:r>
-              <a:rPr kumimoji="1" lang="en-US" altLang="ja-JP" dirty="0" smtClean="0"/>
+              <a:rPr kumimoji="1" lang="en-US" altLang="ja-JP" dirty="0"/>
               <a:t>constant</a:t>
             </a:r>
             <a:r>
-              <a:rPr kumimoji="1" lang="ja-JP" altLang="en-US" dirty="0" smtClean="0"/>
+              <a:rPr kumimoji="1" lang="ja-JP" altLang="en-US" dirty="0"/>
               <a:t>かどうかが決まる。</a:t>
             </a:r>
-            <a:endParaRPr kumimoji="1" lang="ja-JP" altLang="en-US" dirty="0"/>
           </a:p>
         </p:txBody>
       </p:sp>
@@ -3740,11 +3725,11 @@
           <a:lstStyle/>
           <a:p>
             <a:r>
-              <a:rPr kumimoji="1" lang="ja-JP" altLang="en-US" dirty="0" smtClean="0"/>
+              <a:rPr kumimoji="1" lang="ja-JP" altLang="en-US" dirty="0"/>
               <a:t>型</a:t>
             </a:r>
             <a:r>
-              <a:rPr kumimoji="1" lang="en-US" altLang="ja-JP" dirty="0" smtClean="0"/>
+              <a:rPr kumimoji="1" lang="en-US" altLang="ja-JP" dirty="0"/>
               <a:t>(type)</a:t>
             </a:r>
             <a:endParaRPr kumimoji="1" lang="ja-JP" altLang="en-US" dirty="0"/>
@@ -3772,49 +3757,49 @@
           <a:lstStyle/>
           <a:p>
             <a:r>
-              <a:rPr kumimoji="1" lang="ja-JP" altLang="en-US" dirty="0" smtClean="0"/>
+              <a:rPr kumimoji="1" lang="ja-JP" altLang="en-US" dirty="0"/>
               <a:t>型は、値</a:t>
             </a:r>
             <a:r>
-              <a:rPr kumimoji="1" lang="en-US" altLang="ja-JP" dirty="0" smtClean="0"/>
+              <a:rPr kumimoji="1" lang="en-US" altLang="ja-JP" dirty="0"/>
               <a:t>(value)</a:t>
             </a:r>
             <a:r>
-              <a:rPr kumimoji="1" lang="ja-JP" altLang="en-US" dirty="0" smtClean="0"/>
+              <a:rPr kumimoji="1" lang="ja-JP" altLang="en-US" dirty="0"/>
               <a:t>の集合と操作</a:t>
             </a:r>
             <a:r>
-              <a:rPr kumimoji="1" lang="en-US" altLang="ja-JP" dirty="0" smtClean="0"/>
+              <a:rPr kumimoji="1" lang="en-US" altLang="ja-JP" dirty="0"/>
               <a:t>(operation)</a:t>
             </a:r>
             <a:r>
-              <a:rPr lang="ja-JP" altLang="en-US" dirty="0" smtClean="0"/>
+              <a:rPr lang="ja-JP" altLang="en-US" dirty="0"/>
               <a:t>の</a:t>
             </a:r>
             <a:r>
-              <a:rPr kumimoji="1" lang="ja-JP" altLang="en-US" dirty="0" smtClean="0"/>
+              <a:rPr kumimoji="1" lang="ja-JP" altLang="en-US" dirty="0"/>
               <a:t>集合から成る。</a:t>
             </a:r>
-            <a:endParaRPr kumimoji="1" lang="en-US" altLang="ja-JP" dirty="0" smtClean="0"/>
-          </a:p>
-          <a:p>
-            <a:r>
-              <a:rPr kumimoji="1" lang="ja-JP" altLang="en-US" dirty="0" smtClean="0"/>
+            <a:endParaRPr kumimoji="1" lang="en-US" altLang="ja-JP" dirty="0"/>
+          </a:p>
+          <a:p>
+            <a:r>
+              <a:rPr kumimoji="1" lang="ja-JP" altLang="en-US" dirty="0"/>
               <a:t>型は、型式</a:t>
             </a:r>
             <a:r>
-              <a:rPr kumimoji="1" lang="en-US" altLang="ja-JP" dirty="0" smtClean="0"/>
+              <a:rPr kumimoji="1" lang="en-US" altLang="ja-JP" dirty="0"/>
               <a:t>(type expression)</a:t>
             </a:r>
             <a:r>
-              <a:rPr lang="ja-JP" altLang="en-US" dirty="0" smtClean="0"/>
+              <a:rPr lang="ja-JP" altLang="en-US" dirty="0"/>
               <a:t>を用いて</a:t>
             </a:r>
             <a:r>
-              <a:rPr kumimoji="1" lang="ja-JP" altLang="en-US" dirty="0" smtClean="0"/>
+              <a:rPr kumimoji="1" lang="ja-JP" altLang="en-US" dirty="0"/>
               <a:t>表される。</a:t>
             </a:r>
-            <a:endParaRPr kumimoji="1" lang="en-US" altLang="ja-JP" dirty="0" smtClean="0"/>
+            <a:endParaRPr kumimoji="1" lang="en-US" altLang="ja-JP" dirty="0"/>
           </a:p>
         </p:txBody>
       </p:sp>
@@ -3841,129 +3826,113 @@
           <a:lstStyle/>
           <a:p>
             <a:r>
-              <a:rPr kumimoji="1" lang="en-US" altLang="ja-JP" sz="2800" dirty="0" smtClean="0"/>
+              <a:rPr kumimoji="1" lang="en-US" altLang="ja-JP" sz="2800" dirty="0"/>
               <a:t>&lt;ty</a:t>
             </a:r>
             <a:r>
-              <a:rPr lang="en-US" altLang="ja-JP" sz="2800" dirty="0" smtClean="0"/>
+              <a:rPr lang="en-US" altLang="ja-JP" sz="2800" dirty="0"/>
               <a:t>pe-</a:t>
             </a:r>
             <a:r>
-              <a:rPr lang="en-US" altLang="ja-JP" sz="2800" dirty="0" err="1" smtClean="0"/>
+              <a:rPr lang="en-US" altLang="ja-JP" sz="2800" dirty="0" err="1"/>
               <a:t>exp</a:t>
             </a:r>
             <a:r>
-              <a:rPr lang="en-US" altLang="ja-JP" sz="2800" dirty="0" smtClean="0"/>
+              <a:rPr lang="en-US" altLang="ja-JP" sz="2800" dirty="0"/>
               <a:t>&gt; ::= </a:t>
             </a:r>
           </a:p>
           <a:p>
             <a:r>
               <a:rPr lang="en-US" altLang="ja-JP" sz="2800" dirty="0"/>
-              <a:t> </a:t>
-            </a:r>
-            <a:r>
-              <a:rPr lang="en-US" altLang="ja-JP" sz="2800" dirty="0" smtClean="0"/>
-              <a:t>               &lt;type-name&gt;</a:t>
+              <a:t>                &lt;type-name&gt;</a:t>
             </a:r>
           </a:p>
           <a:p>
             <a:r>
               <a:rPr kumimoji="1" lang="en-US" altLang="ja-JP" sz="2800" dirty="0"/>
-              <a:t> </a:t>
-            </a:r>
-            <a:r>
-              <a:rPr kumimoji="1" lang="en-US" altLang="ja-JP" sz="2800" dirty="0" smtClean="0"/>
-              <a:t>           |  &lt;type-</a:t>
-            </a:r>
-            <a:r>
-              <a:rPr kumimoji="1" lang="en-US" altLang="ja-JP" sz="2800" dirty="0" err="1" smtClean="0"/>
+              <a:t>            |  &lt;type-</a:t>
+            </a:r>
+            <a:r>
+              <a:rPr kumimoji="1" lang="en-US" altLang="ja-JP" sz="2800" dirty="0" err="1"/>
               <a:t>exp</a:t>
             </a:r>
             <a:r>
-              <a:rPr kumimoji="1" lang="en-US" altLang="ja-JP" sz="2800" dirty="0" smtClean="0"/>
+              <a:rPr kumimoji="1" lang="en-US" altLang="ja-JP" sz="2800" dirty="0"/>
               <a:t>&gt; -&gt; &lt;type-</a:t>
             </a:r>
             <a:r>
-              <a:rPr kumimoji="1" lang="en-US" altLang="ja-JP" sz="2800" dirty="0" err="1" smtClean="0"/>
+              <a:rPr kumimoji="1" lang="en-US" altLang="ja-JP" sz="2800" dirty="0" err="1"/>
               <a:t>exp</a:t>
             </a:r>
             <a:r>
-              <a:rPr kumimoji="1" lang="en-US" altLang="ja-JP" sz="2800" dirty="0" smtClean="0"/>
+              <a:rPr kumimoji="1" lang="en-US" altLang="ja-JP" sz="2800" dirty="0"/>
               <a:t>&gt;</a:t>
             </a:r>
           </a:p>
           <a:p>
             <a:r>
               <a:rPr lang="en-US" altLang="ja-JP" sz="2800" dirty="0"/>
-              <a:t> </a:t>
-            </a:r>
-            <a:r>
-              <a:rPr lang="en-US" altLang="ja-JP" sz="2800" dirty="0" smtClean="0"/>
-              <a:t>           |  &lt;type-</a:t>
-            </a:r>
-            <a:r>
-              <a:rPr lang="en-US" altLang="ja-JP" sz="2800" dirty="0" err="1" smtClean="0"/>
+              <a:t>            |  &lt;type-</a:t>
+            </a:r>
+            <a:r>
+              <a:rPr lang="en-US" altLang="ja-JP" sz="2800" dirty="0" err="1"/>
               <a:t>exp</a:t>
             </a:r>
             <a:r>
-              <a:rPr lang="en-US" altLang="ja-JP" sz="2800" dirty="0" smtClean="0"/>
+              <a:rPr lang="en-US" altLang="ja-JP" sz="2800" dirty="0"/>
               <a:t>&gt; * &lt;type-</a:t>
             </a:r>
             <a:r>
-              <a:rPr lang="en-US" altLang="ja-JP" sz="2800" dirty="0" err="1" smtClean="0"/>
+              <a:rPr lang="en-US" altLang="ja-JP" sz="2800" dirty="0" err="1"/>
               <a:t>exp</a:t>
             </a:r>
             <a:r>
-              <a:rPr lang="en-US" altLang="ja-JP" sz="2800" dirty="0" smtClean="0"/>
+              <a:rPr lang="en-US" altLang="ja-JP" sz="2800" dirty="0"/>
               <a:t>&gt;</a:t>
             </a:r>
           </a:p>
           <a:p>
             <a:r>
               <a:rPr kumimoji="1" lang="en-US" altLang="ja-JP" sz="2800" dirty="0"/>
-              <a:t> </a:t>
-            </a:r>
-            <a:r>
-              <a:rPr kumimoji="1" lang="en-US" altLang="ja-JP" sz="2800" dirty="0" smtClean="0"/>
-              <a:t>           |  &lt;type-</a:t>
-            </a:r>
-            <a:r>
-              <a:rPr kumimoji="1" lang="en-US" altLang="ja-JP" sz="2800" dirty="0" err="1" smtClean="0"/>
+              <a:t>            |  &lt;type-</a:t>
+            </a:r>
+            <a:r>
+              <a:rPr kumimoji="1" lang="en-US" altLang="ja-JP" sz="2800" dirty="0" err="1"/>
               <a:t>exp</a:t>
             </a:r>
             <a:r>
-              <a:rPr kumimoji="1" lang="en-US" altLang="ja-JP" sz="2800" dirty="0" smtClean="0"/>
+              <a:rPr kumimoji="1" lang="en-US" altLang="ja-JP" sz="2800" dirty="0"/>
               <a:t>&gt; </a:t>
             </a:r>
             <a:r>
-              <a:rPr kumimoji="1" lang="en-US" altLang="ja-JP" sz="2800" b="1" dirty="0" smtClean="0"/>
+              <a:rPr kumimoji="1" lang="en-US" altLang="ja-JP" sz="2800" b="1" dirty="0"/>
               <a:t>list</a:t>
             </a:r>
           </a:p>
           <a:p>
             <a:r>
-              <a:rPr lang="en-US" altLang="ja-JP" sz="2800" b="1" dirty="0" smtClean="0"/>
+              <a:rPr lang="en-US" altLang="ja-JP" sz="2800" b="1" dirty="0"/>
               <a:t>            </a:t>
             </a:r>
             <a:r>
-              <a:rPr lang="en-US" altLang="ja-JP" sz="2800" dirty="0" smtClean="0"/>
+              <a:rPr lang="en-US" altLang="ja-JP" sz="2800" dirty="0"/>
               <a:t>| {&lt;id&gt;:&lt;type-</a:t>
             </a:r>
             <a:r>
-              <a:rPr lang="en-US" altLang="ja-JP" sz="2800" dirty="0" err="1" smtClean="0"/>
+              <a:rPr lang="en-US" altLang="ja-JP" sz="2800" dirty="0" err="1"/>
               <a:t>exp</a:t>
             </a:r>
             <a:r>
-              <a:rPr lang="en-US" altLang="ja-JP" sz="2800" dirty="0" smtClean="0"/>
+              <a:rPr lang="en-US" altLang="ja-JP" sz="2800" dirty="0"/>
               <a:t>&gt;,…,&lt;id&gt;:&lt;type-</a:t>
             </a:r>
             <a:r>
-              <a:rPr lang="en-US" altLang="ja-JP" sz="2800" dirty="0" err="1" smtClean="0"/>
+              <a:rPr lang="en-US" altLang="ja-JP" sz="2800" dirty="0" err="1"/>
               <a:t>exp</a:t>
             </a:r>
             <a:r>
-              <a:rPr lang="en-US" altLang="ja-JP" sz="2800" dirty="0" smtClean="0"/>
+              <a:rPr lang="en-US" altLang="ja-JP" sz="2800" dirty="0"/>
               <a:t>&gt;}</a:t>
             </a:r>
             <a:endParaRPr kumimoji="1" lang="ja-JP" altLang="en-US" sz="2800" dirty="0"/>
@@ -3993,10 +3962,9 @@
           <a:lstStyle/>
           <a:p>
             <a:r>
-              <a:rPr kumimoji="1" lang="ja-JP" altLang="en-US" sz="2800" dirty="0" smtClean="0"/>
+              <a:rPr kumimoji="1" lang="ja-JP" altLang="en-US" sz="2800" dirty="0"/>
               <a:t>（型式の定義）</a:t>
             </a:r>
-            <a:endParaRPr kumimoji="1" lang="ja-JP" altLang="en-US" sz="2800" dirty="0"/>
           </a:p>
         </p:txBody>
       </p:sp>
@@ -4046,11 +4014,11 @@
           <a:lstStyle/>
           <a:p>
             <a:r>
-              <a:rPr kumimoji="1" lang="ja-JP" altLang="en-US" dirty="0" smtClean="0"/>
+              <a:rPr kumimoji="1" lang="ja-JP" altLang="en-US" dirty="0"/>
               <a:t>基本型</a:t>
             </a:r>
             <a:r>
-              <a:rPr kumimoji="1" lang="en-US" altLang="ja-JP" dirty="0" smtClean="0"/>
+              <a:rPr kumimoji="1" lang="en-US" altLang="ja-JP" dirty="0"/>
               <a:t>(basic type)</a:t>
             </a:r>
             <a:endParaRPr kumimoji="1" lang="ja-JP" altLang="en-US" dirty="0"/>
@@ -4073,101 +4041,101 @@
           <a:lstStyle/>
           <a:p>
             <a:r>
-              <a:rPr kumimoji="1" lang="ja-JP" altLang="en-US" dirty="0" smtClean="0"/>
+              <a:rPr kumimoji="1" lang="ja-JP" altLang="en-US" dirty="0"/>
               <a:t>値が</a:t>
             </a:r>
             <a:r>
-              <a:rPr kumimoji="1" lang="en-US" altLang="ja-JP" dirty="0" smtClean="0"/>
+              <a:rPr kumimoji="1" lang="en-US" altLang="ja-JP" dirty="0"/>
               <a:t>atomic</a:t>
             </a:r>
             <a:r>
-              <a:rPr kumimoji="1" lang="ja-JP" altLang="en-US" dirty="0" smtClean="0"/>
+              <a:rPr kumimoji="1" lang="ja-JP" altLang="en-US" dirty="0"/>
               <a:t>な場合、その型は基本型である</a:t>
             </a:r>
             <a:r>
-              <a:rPr lang="ja-JP" altLang="en-US" dirty="0" smtClean="0"/>
+              <a:rPr lang="ja-JP" altLang="en-US" dirty="0"/>
               <a:t>という。値がそれ以上分解できない場合その値は</a:t>
             </a:r>
             <a:r>
-              <a:rPr lang="en-US" altLang="ja-JP" dirty="0" smtClean="0"/>
+              <a:rPr lang="en-US" altLang="ja-JP" dirty="0"/>
               <a:t>atomic</a:t>
             </a:r>
             <a:r>
-              <a:rPr lang="ja-JP" altLang="en-US" dirty="0" smtClean="0"/>
+              <a:rPr lang="ja-JP" altLang="en-US" dirty="0"/>
               <a:t>であるという。</a:t>
             </a:r>
-            <a:endParaRPr lang="en-US" altLang="ja-JP" dirty="0" smtClean="0"/>
+            <a:endParaRPr lang="en-US" altLang="ja-JP" dirty="0"/>
           </a:p>
           <a:p>
             <a:pPr lvl="1"/>
             <a:r>
-              <a:rPr kumimoji="1" lang="ja-JP" altLang="en-US" dirty="0" smtClean="0"/>
+              <a:rPr kumimoji="1" lang="ja-JP" altLang="en-US" dirty="0"/>
               <a:t>（例）集合</a:t>
             </a:r>
             <a:r>
-              <a:rPr lang="en-US" altLang="ja-JP" dirty="0" smtClean="0"/>
+              <a:rPr lang="en-US" altLang="ja-JP" dirty="0"/>
               <a:t>{true, false}</a:t>
             </a:r>
             <a:r>
-              <a:rPr lang="ja-JP" altLang="en-US" dirty="0" smtClean="0"/>
+              <a:rPr lang="ja-JP" altLang="en-US" dirty="0"/>
               <a:t>の値は</a:t>
             </a:r>
             <a:r>
-              <a:rPr lang="en-US" altLang="ja-JP" dirty="0" smtClean="0"/>
+              <a:rPr lang="en-US" altLang="ja-JP" dirty="0"/>
               <a:t>atomic</a:t>
             </a:r>
             <a:r>
-              <a:rPr lang="ja-JP" altLang="en-US" dirty="0" smtClean="0"/>
+              <a:rPr lang="ja-JP" altLang="en-US" dirty="0"/>
               <a:t>な値である。</a:t>
             </a:r>
-            <a:endParaRPr lang="en-US" altLang="ja-JP" dirty="0" smtClean="0"/>
-          </a:p>
-          <a:p>
-            <a:r>
-              <a:rPr lang="ja-JP" altLang="en-US" dirty="0" smtClean="0"/>
+            <a:endParaRPr lang="en-US" altLang="ja-JP" dirty="0"/>
+          </a:p>
+          <a:p>
+            <a:r>
+              <a:rPr lang="ja-JP" altLang="en-US" dirty="0"/>
               <a:t>基本型の値に対する操作は型毎に定義されており、等しさの比較などがある。</a:t>
             </a:r>
-            <a:endParaRPr lang="en-US" altLang="ja-JP" dirty="0" smtClean="0"/>
+            <a:endParaRPr lang="en-US" altLang="ja-JP" dirty="0"/>
           </a:p>
           <a:p>
             <a:pPr lvl="1"/>
             <a:r>
-              <a:rPr lang="ja-JP" altLang="en-US" dirty="0" smtClean="0"/>
+              <a:rPr lang="ja-JP" altLang="en-US" dirty="0"/>
               <a:t>（例）</a:t>
             </a:r>
             <a:r>
-              <a:rPr lang="en-US" altLang="ja-JP" dirty="0" smtClean="0"/>
+              <a:rPr lang="en-US" altLang="ja-JP" dirty="0"/>
               <a:t>2=2</a:t>
             </a:r>
             <a:r>
-              <a:rPr lang="ja-JP" altLang="en-US" dirty="0" smtClean="0"/>
+              <a:rPr lang="ja-JP" altLang="en-US" dirty="0"/>
               <a:t>は</a:t>
             </a:r>
             <a:r>
-              <a:rPr lang="en-US" altLang="ja-JP" dirty="0" smtClean="0"/>
+              <a:rPr lang="en-US" altLang="ja-JP" dirty="0"/>
               <a:t>true, 2≠2</a:t>
             </a:r>
             <a:r>
-              <a:rPr lang="ja-JP" altLang="en-US" dirty="0" smtClean="0"/>
+              <a:rPr lang="ja-JP" altLang="en-US" dirty="0"/>
               <a:t>は</a:t>
             </a:r>
             <a:r>
-              <a:rPr lang="en-US" altLang="ja-JP" dirty="0" smtClean="0"/>
+              <a:rPr lang="en-US" altLang="ja-JP" dirty="0"/>
               <a:t>false</a:t>
             </a:r>
             <a:r>
-              <a:rPr lang="ja-JP" altLang="en-US" dirty="0" smtClean="0"/>
+              <a:rPr lang="ja-JP" altLang="en-US" dirty="0"/>
               <a:t>。</a:t>
             </a:r>
-            <a:endParaRPr lang="en-US" altLang="ja-JP" dirty="0" smtClean="0"/>
+            <a:endParaRPr lang="en-US" altLang="ja-JP" dirty="0"/>
           </a:p>
           <a:p>
             <a:pPr lvl="1"/>
-            <a:endParaRPr lang="en-US" altLang="ja-JP" dirty="0" smtClean="0"/>
+            <a:endParaRPr lang="en-US" altLang="ja-JP" dirty="0"/>
           </a:p>
           <a:p>
             <a:pPr lvl="1"/>
-            <a:endParaRPr lang="en-US" altLang="ja-JP" dirty="0" smtClean="0"/>
+            <a:endParaRPr lang="en-US" altLang="ja-JP" dirty="0"/>
           </a:p>
         </p:txBody>
       </p:sp>
@@ -4222,14 +4190,13 @@
           <a:lstStyle/>
           <a:p>
             <a:r>
-              <a:rPr kumimoji="1" lang="en-US" altLang="ja-JP" dirty="0" smtClean="0"/>
+              <a:rPr kumimoji="1" lang="en-US" altLang="ja-JP" dirty="0"/>
               <a:t>ML</a:t>
             </a:r>
             <a:r>
-              <a:rPr kumimoji="1" lang="ja-JP" altLang="en-US" dirty="0" smtClean="0"/>
+              <a:rPr kumimoji="1" lang="ja-JP" altLang="en-US" dirty="0"/>
               <a:t>の基本型</a:t>
             </a:r>
-            <a:endParaRPr kumimoji="1" lang="ja-JP" altLang="en-US" dirty="0"/>
           </a:p>
         </p:txBody>
       </p:sp>
@@ -4260,45 +4227,45 @@
               <a:t>u</a:t>
             </a:r>
             <a:r>
-              <a:rPr kumimoji="1" lang="en-US" altLang="ja-JP" dirty="0" smtClean="0"/>
+              <a:rPr kumimoji="1" lang="en-US" altLang="ja-JP" dirty="0"/>
               <a:t>nit</a:t>
             </a:r>
             <a:r>
-              <a:rPr kumimoji="1" lang="ja-JP" altLang="en-US" sz="2800" dirty="0" smtClean="0"/>
+              <a:rPr kumimoji="1" lang="ja-JP" altLang="en-US" sz="2800" dirty="0"/>
               <a:t>型</a:t>
             </a:r>
-            <a:endParaRPr kumimoji="1" lang="en-US" altLang="ja-JP" sz="2800" dirty="0" smtClean="0"/>
+            <a:endParaRPr kumimoji="1" lang="en-US" altLang="ja-JP" sz="2800" dirty="0"/>
           </a:p>
           <a:p>
             <a:pPr lvl="1"/>
             <a:r>
-              <a:rPr lang="en-US" altLang="ja-JP" sz="2400" dirty="0" smtClean="0"/>
+              <a:rPr lang="en-US" altLang="ja-JP" sz="2400" dirty="0"/>
               <a:t> () : unit</a:t>
             </a:r>
           </a:p>
           <a:p>
             <a:pPr lvl="1"/>
             <a:r>
-              <a:rPr kumimoji="1" lang="ja-JP" altLang="en-US" sz="2400" dirty="0" smtClean="0"/>
+              <a:rPr kumimoji="1" lang="ja-JP" altLang="en-US" sz="2400" dirty="0"/>
               <a:t>返り値の必要ない関数の返り値、引数の必要ない関数の引数に用いられる。（</a:t>
             </a:r>
             <a:r>
-              <a:rPr kumimoji="1" lang="en-US" altLang="ja-JP" sz="2400" dirty="0" smtClean="0"/>
+              <a:rPr kumimoji="1" lang="en-US" altLang="ja-JP" sz="2400" dirty="0"/>
               <a:t>C</a:t>
             </a:r>
             <a:r>
-              <a:rPr kumimoji="1" lang="ja-JP" altLang="en-US" sz="2400" dirty="0" smtClean="0"/>
+              <a:rPr kumimoji="1" lang="ja-JP" altLang="en-US" sz="2400" dirty="0"/>
               <a:t>で言えば</a:t>
             </a:r>
             <a:r>
-              <a:rPr kumimoji="1" lang="en-US" altLang="ja-JP" sz="2400" dirty="0" smtClean="0"/>
+              <a:rPr kumimoji="1" lang="en-US" altLang="ja-JP" sz="2400" dirty="0"/>
               <a:t>void</a:t>
             </a:r>
             <a:r>
-              <a:rPr kumimoji="1" lang="ja-JP" altLang="en-US" sz="2400" dirty="0" smtClean="0"/>
+              <a:rPr kumimoji="1" lang="ja-JP" altLang="en-US" sz="2400" dirty="0"/>
               <a:t>型）</a:t>
             </a:r>
-            <a:endParaRPr kumimoji="1" lang="en-US" altLang="ja-JP" sz="2400" dirty="0" smtClean="0"/>
+            <a:endParaRPr kumimoji="1" lang="en-US" altLang="ja-JP" sz="2400" dirty="0"/>
           </a:p>
           <a:p>
             <a:r>
@@ -4306,14 +4273,14 @@
               <a:t>b</a:t>
             </a:r>
             <a:r>
-              <a:rPr kumimoji="1" lang="en-US" altLang="ja-JP" sz="2800" dirty="0" err="1" smtClean="0"/>
+              <a:rPr kumimoji="1" lang="en-US" altLang="ja-JP" sz="2800" dirty="0" err="1"/>
               <a:t>ool</a:t>
             </a:r>
             <a:r>
-              <a:rPr kumimoji="1" lang="ja-JP" altLang="en-US" sz="2800" dirty="0" smtClean="0"/>
+              <a:rPr kumimoji="1" lang="ja-JP" altLang="en-US" sz="2800" dirty="0"/>
               <a:t>型</a:t>
             </a:r>
-            <a:endParaRPr kumimoji="1" lang="en-US" altLang="ja-JP" sz="2800" dirty="0" smtClean="0"/>
+            <a:endParaRPr kumimoji="1" lang="en-US" altLang="ja-JP" sz="2800" dirty="0"/>
           </a:p>
           <a:p>
             <a:pPr lvl="1"/>
@@ -4322,75 +4289,75 @@
               <a:t>t</a:t>
             </a:r>
             <a:r>
-              <a:rPr kumimoji="1" lang="en-US" altLang="ja-JP" sz="2400" dirty="0" smtClean="0"/>
+              <a:rPr kumimoji="1" lang="en-US" altLang="ja-JP" sz="2400" dirty="0"/>
               <a:t>rue: </a:t>
             </a:r>
             <a:r>
-              <a:rPr kumimoji="1" lang="en-US" altLang="ja-JP" sz="2400" dirty="0" err="1" smtClean="0"/>
+              <a:rPr kumimoji="1" lang="en-US" altLang="ja-JP" sz="2400" dirty="0" err="1"/>
               <a:t>bool</a:t>
             </a:r>
             <a:r>
-              <a:rPr lang="en-US" altLang="ja-JP" sz="2400" dirty="0" smtClean="0"/>
+              <a:rPr lang="en-US" altLang="ja-JP" sz="2400" dirty="0"/>
               <a:t>,  false : </a:t>
             </a:r>
             <a:r>
-              <a:rPr lang="en-US" altLang="ja-JP" sz="2400" dirty="0" err="1" smtClean="0"/>
+              <a:rPr lang="en-US" altLang="ja-JP" sz="2400" dirty="0" err="1"/>
               <a:t>bool</a:t>
             </a:r>
-            <a:endParaRPr lang="en-US" altLang="ja-JP" sz="2400" dirty="0" smtClean="0"/>
+            <a:endParaRPr lang="en-US" altLang="ja-JP" sz="2400" dirty="0"/>
           </a:p>
           <a:p>
             <a:pPr lvl="1"/>
             <a:r>
-              <a:rPr lang="en-US" altLang="ja-JP" sz="2400" dirty="0" smtClean="0"/>
+              <a:rPr lang="en-US" altLang="ja-JP" sz="2400" dirty="0"/>
               <a:t>if</a:t>
             </a:r>
             <a:r>
-              <a:rPr lang="ja-JP" altLang="en-US" sz="2400" dirty="0" smtClean="0"/>
+              <a:rPr lang="ja-JP" altLang="en-US" sz="2400" dirty="0"/>
               <a:t>式</a:t>
             </a:r>
             <a:r>
-              <a:rPr lang="en-US" altLang="ja-JP" sz="2400" dirty="0" smtClean="0"/>
+              <a:rPr lang="en-US" altLang="ja-JP" sz="2400" dirty="0"/>
               <a:t> i</a:t>
             </a:r>
             <a:r>
-              <a:rPr kumimoji="1" lang="en-US" altLang="ja-JP" sz="2400" dirty="0" smtClean="0"/>
+              <a:rPr kumimoji="1" lang="en-US" altLang="ja-JP" sz="2400" dirty="0"/>
               <a:t>f e1 then e2 else e3 </a:t>
             </a:r>
             <a:r>
-              <a:rPr kumimoji="1" lang="ja-JP" altLang="en-US" sz="2400" dirty="0" smtClean="0"/>
+              <a:rPr kumimoji="1" lang="ja-JP" altLang="en-US" sz="2400" dirty="0"/>
               <a:t>において</a:t>
             </a:r>
             <a:r>
-              <a:rPr kumimoji="1" lang="en-US" altLang="ja-JP" sz="2400" dirty="0" smtClean="0"/>
+              <a:rPr kumimoji="1" lang="en-US" altLang="ja-JP" sz="2400" dirty="0"/>
               <a:t>e1</a:t>
             </a:r>
             <a:r>
-              <a:rPr kumimoji="1" lang="ja-JP" altLang="en-US" sz="2400" dirty="0" smtClean="0"/>
+              <a:rPr kumimoji="1" lang="ja-JP" altLang="en-US" sz="2400" dirty="0"/>
               <a:t>は</a:t>
             </a:r>
             <a:r>
-              <a:rPr kumimoji="1" lang="en-US" altLang="ja-JP" sz="2400" dirty="0" err="1" smtClean="0"/>
+              <a:rPr kumimoji="1" lang="en-US" altLang="ja-JP" sz="2400" dirty="0" err="1"/>
               <a:t>bool</a:t>
             </a:r>
             <a:r>
-              <a:rPr kumimoji="1" lang="ja-JP" altLang="en-US" sz="2400" dirty="0" smtClean="0"/>
+              <a:rPr kumimoji="1" lang="ja-JP" altLang="en-US" sz="2400" dirty="0"/>
               <a:t>型、</a:t>
             </a:r>
             <a:r>
-              <a:rPr kumimoji="1" lang="en-US" altLang="ja-JP" sz="2400" dirty="0" smtClean="0"/>
+              <a:rPr kumimoji="1" lang="en-US" altLang="ja-JP" sz="2400" dirty="0"/>
               <a:t>e2</a:t>
             </a:r>
             <a:r>
-              <a:rPr kumimoji="1" lang="ja-JP" altLang="en-US" sz="2400" dirty="0" smtClean="0"/>
+              <a:rPr kumimoji="1" lang="ja-JP" altLang="en-US" sz="2400" dirty="0"/>
               <a:t>と</a:t>
             </a:r>
             <a:r>
-              <a:rPr kumimoji="1" lang="en-US" altLang="ja-JP" sz="2400" dirty="0" smtClean="0"/>
+              <a:rPr kumimoji="1" lang="en-US" altLang="ja-JP" sz="2400" dirty="0"/>
               <a:t>e3</a:t>
             </a:r>
             <a:r>
-              <a:rPr kumimoji="1" lang="ja-JP" altLang="en-US" sz="2400" dirty="0" smtClean="0"/>
+              <a:rPr kumimoji="1" lang="ja-JP" altLang="en-US" sz="2400" dirty="0"/>
               <a:t>は何らかの同じ型を持たなければならない。</a:t>
             </a:r>
             <a:r>
@@ -4398,66 +4365,66 @@
               <a:t>e</a:t>
             </a:r>
             <a:r>
-              <a:rPr kumimoji="1" lang="en-US" altLang="ja-JP" sz="2400" dirty="0" smtClean="0"/>
+              <a:rPr kumimoji="1" lang="en-US" altLang="ja-JP" sz="2400" dirty="0"/>
               <a:t>lse</a:t>
             </a:r>
             <a:r>
-              <a:rPr kumimoji="1" lang="ja-JP" altLang="en-US" sz="2400" dirty="0" smtClean="0"/>
+              <a:rPr kumimoji="1" lang="ja-JP" altLang="en-US" sz="2400" dirty="0"/>
               <a:t>パートのない</a:t>
             </a:r>
             <a:r>
-              <a:rPr kumimoji="1" lang="en-US" altLang="ja-JP" sz="2400" dirty="0" smtClean="0"/>
+              <a:rPr kumimoji="1" lang="en-US" altLang="ja-JP" sz="2400" dirty="0"/>
               <a:t>if</a:t>
             </a:r>
             <a:r>
-              <a:rPr kumimoji="1" lang="ja-JP" altLang="en-US" sz="2400" dirty="0" smtClean="0"/>
+              <a:rPr kumimoji="1" lang="ja-JP" altLang="en-US" sz="2400" dirty="0"/>
               <a:t>式はない。</a:t>
             </a:r>
-            <a:endParaRPr kumimoji="1" lang="en-US" altLang="ja-JP" sz="2400" dirty="0" smtClean="0"/>
+            <a:endParaRPr kumimoji="1" lang="en-US" altLang="ja-JP" sz="2400" dirty="0"/>
           </a:p>
           <a:p>
             <a:pPr lvl="1"/>
             <a:r>
-              <a:rPr lang="ja-JP" altLang="en-US" sz="2400" dirty="0" smtClean="0"/>
+              <a:rPr lang="ja-JP" altLang="en-US" sz="2400" dirty="0"/>
               <a:t>論理演算子</a:t>
             </a:r>
             <a:r>
-              <a:rPr lang="en-US" altLang="ja-JP" sz="2400" dirty="0" err="1" smtClean="0"/>
+              <a:rPr lang="en-US" altLang="ja-JP" sz="2400" dirty="0" err="1"/>
               <a:t>andalso</a:t>
             </a:r>
             <a:r>
-              <a:rPr lang="en-US" altLang="ja-JP" sz="2400" dirty="0" smtClean="0"/>
+              <a:rPr lang="en-US" altLang="ja-JP" sz="2400" dirty="0"/>
               <a:t>, </a:t>
             </a:r>
             <a:r>
-              <a:rPr lang="en-US" altLang="ja-JP" sz="2400" dirty="0" err="1" smtClean="0"/>
+              <a:rPr lang="en-US" altLang="ja-JP" sz="2400" dirty="0" err="1"/>
               <a:t>orelse</a:t>
             </a:r>
             <a:r>
-              <a:rPr lang="en-US" altLang="ja-JP" sz="2400" dirty="0" smtClean="0"/>
+              <a:rPr lang="en-US" altLang="ja-JP" sz="2400" dirty="0"/>
               <a:t>, not</a:t>
             </a:r>
             <a:r>
-              <a:rPr lang="ja-JP" altLang="en-US" sz="2400" dirty="0" smtClean="0"/>
+              <a:rPr lang="ja-JP" altLang="en-US" sz="2400" dirty="0"/>
               <a:t>は</a:t>
             </a:r>
             <a:r>
-              <a:rPr lang="en-US" altLang="ja-JP" sz="2400" dirty="0" smtClean="0"/>
+              <a:rPr lang="en-US" altLang="ja-JP" sz="2400" dirty="0"/>
               <a:t>C</a:t>
             </a:r>
             <a:r>
-              <a:rPr lang="ja-JP" altLang="en-US" sz="2400" dirty="0" smtClean="0"/>
+              <a:rPr lang="ja-JP" altLang="en-US" sz="2400" dirty="0"/>
               <a:t>の</a:t>
             </a:r>
             <a:r>
-              <a:rPr lang="en-US" altLang="ja-JP" sz="2400" dirty="0" smtClean="0"/>
+              <a:rPr lang="en-US" altLang="ja-JP" sz="2400" dirty="0"/>
               <a:t>&amp;&amp;, ||, !</a:t>
             </a:r>
             <a:r>
-              <a:rPr lang="ja-JP" altLang="en-US" sz="2400" dirty="0" smtClean="0"/>
+              <a:rPr lang="ja-JP" altLang="en-US" sz="2400" dirty="0"/>
               <a:t>に相当する。</a:t>
             </a:r>
-            <a:endParaRPr lang="en-US" altLang="ja-JP" sz="2400" dirty="0" smtClean="0"/>
+            <a:endParaRPr lang="en-US" altLang="ja-JP" sz="2400" dirty="0"/>
           </a:p>
         </p:txBody>
       </p:sp>
@@ -4512,14 +4479,13 @@
           <a:lstStyle/>
           <a:p>
             <a:r>
-              <a:rPr kumimoji="1" lang="en-US" altLang="ja-JP" dirty="0" smtClean="0"/>
+              <a:rPr kumimoji="1" lang="en-US" altLang="ja-JP" dirty="0"/>
               <a:t>ML</a:t>
             </a:r>
             <a:r>
-              <a:rPr kumimoji="1" lang="ja-JP" altLang="en-US" dirty="0" smtClean="0"/>
+              <a:rPr kumimoji="1" lang="ja-JP" altLang="en-US" dirty="0"/>
               <a:t>の基本型（続き）</a:t>
             </a:r>
-            <a:endParaRPr kumimoji="1" lang="ja-JP" altLang="en-US" dirty="0"/>
           </a:p>
         </p:txBody>
       </p:sp>
@@ -4546,67 +4512,63 @@
           <a:lstStyle/>
           <a:p>
             <a:r>
-              <a:rPr lang="en-US" altLang="ja-JP" dirty="0" err="1" smtClean="0"/>
+              <a:rPr lang="en-US" altLang="ja-JP" dirty="0" err="1"/>
               <a:t>int</a:t>
             </a:r>
             <a:r>
-              <a:rPr lang="ja-JP" altLang="en-US" dirty="0" smtClean="0"/>
+              <a:rPr lang="ja-JP" altLang="en-US" dirty="0"/>
               <a:t>型</a:t>
             </a:r>
-            <a:endParaRPr lang="en-US" altLang="ja-JP" dirty="0" smtClean="0"/>
+            <a:endParaRPr lang="en-US" altLang="ja-JP" dirty="0"/>
           </a:p>
           <a:p>
             <a:pPr lvl="1"/>
             <a:r>
-              <a:rPr lang="en-US" altLang="ja-JP" dirty="0" smtClean="0"/>
+              <a:rPr lang="en-US" altLang="ja-JP" dirty="0"/>
               <a:t>0,1,2,..,-1,-2,… : </a:t>
             </a:r>
             <a:r>
-              <a:rPr lang="en-US" altLang="ja-JP" dirty="0" err="1" smtClean="0"/>
+              <a:rPr lang="en-US" altLang="ja-JP" dirty="0" err="1"/>
               <a:t>int</a:t>
             </a:r>
-            <a:endParaRPr lang="en-US" altLang="ja-JP" dirty="0" smtClean="0"/>
+            <a:endParaRPr lang="en-US" altLang="ja-JP" dirty="0"/>
           </a:p>
           <a:p>
             <a:pPr lvl="1"/>
             <a:r>
-              <a:rPr lang="en-US" altLang="ja-JP" dirty="0" smtClean="0"/>
+              <a:rPr lang="en-US" altLang="ja-JP" dirty="0"/>
               <a:t>+, -, *, div : </a:t>
             </a:r>
             <a:r>
-              <a:rPr lang="en-US" altLang="ja-JP" dirty="0" err="1" smtClean="0"/>
+              <a:rPr lang="en-US" altLang="ja-JP" dirty="0" err="1"/>
               <a:t>int</a:t>
             </a:r>
             <a:r>
-              <a:rPr lang="en-US" altLang="ja-JP" dirty="0" smtClean="0"/>
-              <a:t> *</a:t>
-            </a:r>
-            <a:r>
               <a:rPr lang="en-US" altLang="ja-JP" dirty="0"/>
-              <a:t> </a:t>
-            </a:r>
-            <a:r>
-              <a:rPr lang="en-US" altLang="ja-JP" dirty="0" err="1" smtClean="0"/>
+              <a:t> * </a:t>
+            </a:r>
+            <a:r>
+              <a:rPr lang="en-US" altLang="ja-JP" dirty="0" err="1"/>
               <a:t>int</a:t>
             </a:r>
             <a:r>
-              <a:rPr lang="en-US" altLang="ja-JP" dirty="0" smtClean="0"/>
+              <a:rPr lang="en-US" altLang="ja-JP" dirty="0"/>
               <a:t> -&gt; </a:t>
             </a:r>
             <a:r>
-              <a:rPr lang="en-US" altLang="ja-JP" dirty="0" err="1" smtClean="0"/>
+              <a:rPr lang="en-US" altLang="ja-JP" dirty="0" err="1"/>
               <a:t>int</a:t>
             </a:r>
             <a:r>
-              <a:rPr lang="en-US" altLang="ja-JP" dirty="0" smtClean="0"/>
+              <a:rPr lang="en-US" altLang="ja-JP" dirty="0"/>
               <a:t> (</a:t>
             </a:r>
             <a:r>
-              <a:rPr lang="ja-JP" altLang="en-US" dirty="0" smtClean="0"/>
+              <a:rPr lang="ja-JP" altLang="en-US" dirty="0"/>
               <a:t>これらは中置演算子</a:t>
             </a:r>
             <a:r>
-              <a:rPr lang="en-US" altLang="ja-JP" dirty="0" smtClean="0"/>
+              <a:rPr lang="en-US" altLang="ja-JP" dirty="0"/>
               <a:t>)</a:t>
             </a:r>
           </a:p>
@@ -4616,95 +4578,91 @@
               <a:t>s</a:t>
             </a:r>
             <a:r>
-              <a:rPr kumimoji="1" lang="en-US" altLang="ja-JP" dirty="0" smtClean="0"/>
+              <a:rPr kumimoji="1" lang="en-US" altLang="ja-JP" dirty="0"/>
               <a:t>tring</a:t>
             </a:r>
             <a:r>
-              <a:rPr kumimoji="1" lang="ja-JP" altLang="en-US" dirty="0" smtClean="0"/>
+              <a:rPr kumimoji="1" lang="ja-JP" altLang="en-US" dirty="0"/>
               <a:t>型</a:t>
             </a:r>
-            <a:endParaRPr kumimoji="1" lang="en-US" altLang="ja-JP" dirty="0" smtClean="0"/>
+            <a:endParaRPr kumimoji="1" lang="en-US" altLang="ja-JP" dirty="0"/>
           </a:p>
           <a:p>
             <a:pPr lvl="1"/>
             <a:r>
-              <a:rPr lang="ja-JP" altLang="en-US" dirty="0" smtClean="0"/>
+              <a:rPr lang="ja-JP" altLang="en-US" dirty="0"/>
               <a:t>ダブルクォートで囲んだ記号列</a:t>
             </a:r>
-            <a:endParaRPr lang="en-US" altLang="ja-JP" dirty="0" smtClean="0"/>
+            <a:endParaRPr lang="en-US" altLang="ja-JP" dirty="0"/>
           </a:p>
           <a:p>
             <a:pPr lvl="1"/>
             <a:r>
-              <a:rPr kumimoji="1" lang="ja-JP" altLang="en-US" dirty="0" smtClean="0"/>
+              <a:rPr kumimoji="1" lang="ja-JP" altLang="en-US" dirty="0"/>
               <a:t>文字列連結演算子</a:t>
             </a:r>
             <a:r>
-              <a:rPr kumimoji="1" lang="en-US" altLang="ja-JP" dirty="0" smtClean="0"/>
+              <a:rPr kumimoji="1" lang="en-US" altLang="ja-JP" dirty="0"/>
               <a:t>^ : string * string -&gt; string (</a:t>
             </a:r>
             <a:r>
-              <a:rPr kumimoji="1" lang="ja-JP" altLang="en-US" dirty="0" smtClean="0"/>
+              <a:rPr kumimoji="1" lang="ja-JP" altLang="en-US" dirty="0"/>
               <a:t>中値</a:t>
             </a:r>
             <a:r>
-              <a:rPr kumimoji="1" lang="en-US" altLang="ja-JP" dirty="0" smtClean="0"/>
+              <a:rPr kumimoji="1" lang="en-US" altLang="ja-JP" dirty="0"/>
               <a:t>)</a:t>
             </a:r>
           </a:p>
           <a:p>
             <a:r>
               <a:rPr lang="en-US" altLang="ja-JP" dirty="0"/>
-              <a:t>r</a:t>
-            </a:r>
-            <a:r>
-              <a:rPr lang="en-US" altLang="ja-JP" dirty="0" smtClean="0"/>
-              <a:t>eal</a:t>
-            </a:r>
-            <a:r>
-              <a:rPr lang="ja-JP" altLang="en-US" dirty="0" smtClean="0"/>
+              <a:t>real</a:t>
+            </a:r>
+            <a:r>
+              <a:rPr lang="ja-JP" altLang="en-US" dirty="0"/>
               <a:t>型</a:t>
             </a:r>
-            <a:endParaRPr lang="en-US" altLang="ja-JP" dirty="0" smtClean="0"/>
+            <a:endParaRPr lang="en-US" altLang="ja-JP" dirty="0"/>
           </a:p>
           <a:p>
             <a:pPr lvl="1"/>
             <a:r>
-              <a:rPr kumimoji="1" lang="en-US" altLang="ja-JP" dirty="0" smtClean="0"/>
+              <a:rPr kumimoji="1" lang="en-US" altLang="ja-JP" dirty="0"/>
               <a:t>1.0, 2.0, 3.14159, 4.4444, … : real</a:t>
             </a:r>
           </a:p>
           <a:p>
             <a:pPr lvl="1"/>
             <a:r>
-              <a:rPr lang="en-US" altLang="ja-JP" dirty="0" smtClean="0"/>
+              <a:rPr lang="en-US" altLang="ja-JP" dirty="0"/>
               <a:t>+, -, *</a:t>
             </a:r>
             <a:r>
-              <a:rPr lang="ja-JP" altLang="en-US" dirty="0" smtClean="0"/>
+              <a:rPr lang="ja-JP" altLang="en-US" dirty="0"/>
               <a:t>は</a:t>
             </a:r>
             <a:r>
-              <a:rPr lang="en-US" altLang="ja-JP" dirty="0" smtClean="0"/>
+              <a:rPr lang="en-US" altLang="ja-JP" dirty="0"/>
               <a:t>real, </a:t>
             </a:r>
             <a:r>
-              <a:rPr lang="en-US" altLang="ja-JP" dirty="0" err="1" smtClean="0"/>
+              <a:rPr lang="en-US" altLang="ja-JP" dirty="0" err="1"/>
               <a:t>int</a:t>
             </a:r>
             <a:r>
-              <a:rPr lang="ja-JP" altLang="en-US" dirty="0" smtClean="0"/>
+              <a:rPr lang="ja-JP" altLang="en-US" dirty="0"/>
               <a:t>どちらにも適用可。</a:t>
             </a:r>
             <a:r>
-              <a:rPr lang="en-US" altLang="ja-JP" dirty="0" smtClean="0"/>
+              <a:rPr lang="en-US" altLang="ja-JP" dirty="0"/>
               <a:t>(</a:t>
             </a:r>
             <a:r>
-              <a:rPr lang="ja-JP" altLang="en-US" dirty="0" smtClean="0"/>
+              <a:rPr lang="ja-JP" altLang="en-US" dirty="0"/>
               <a:t>ただし左右が同じ型でなければならない）</a:t>
             </a:r>
-            <a:endParaRPr lang="en-US" altLang="ja-JP" dirty="0" smtClean="0"/>
+            <a:endParaRPr lang="en-US" altLang="ja-JP" dirty="0"/>
           </a:p>
         </p:txBody>
       </p:sp>
@@ -4735,62 +4693,61 @@
               <a:t>r</a:t>
             </a:r>
             <a:r>
-              <a:rPr kumimoji="1" lang="en-US" altLang="ja-JP" sz="2400" dirty="0" smtClean="0"/>
+              <a:rPr kumimoji="1" lang="en-US" altLang="ja-JP" sz="2400" dirty="0"/>
               <a:t>eal</a:t>
             </a:r>
             <a:r>
-              <a:rPr kumimoji="1" lang="ja-JP" altLang="en-US" sz="2400" dirty="0" smtClean="0"/>
+              <a:rPr kumimoji="1" lang="ja-JP" altLang="en-US" sz="2400" dirty="0"/>
               <a:t>関数で</a:t>
             </a:r>
             <a:r>
-              <a:rPr kumimoji="1" lang="en-US" altLang="ja-JP" sz="2400" dirty="0" err="1" smtClean="0"/>
+              <a:rPr kumimoji="1" lang="en-US" altLang="ja-JP" sz="2400" dirty="0" err="1"/>
               <a:t>int</a:t>
             </a:r>
             <a:r>
-              <a:rPr kumimoji="1" lang="ja-JP" altLang="en-US" sz="2400" dirty="0" smtClean="0"/>
+              <a:rPr kumimoji="1" lang="ja-JP" altLang="en-US" sz="2400" dirty="0"/>
               <a:t>から</a:t>
             </a:r>
             <a:r>
-              <a:rPr kumimoji="1" lang="en-US" altLang="ja-JP" sz="2400" dirty="0" smtClean="0"/>
+              <a:rPr kumimoji="1" lang="en-US" altLang="ja-JP" sz="2400" dirty="0"/>
               <a:t>real</a:t>
             </a:r>
             <a:r>
-              <a:rPr kumimoji="1" lang="ja-JP" altLang="en-US" sz="2400" dirty="0" smtClean="0"/>
+              <a:rPr kumimoji="1" lang="ja-JP" altLang="en-US" sz="2400" dirty="0"/>
               <a:t>への変換を行う。例えば</a:t>
             </a:r>
             <a:r>
-              <a:rPr lang="en-US" altLang="ja-JP" sz="2400" dirty="0" smtClean="0"/>
+              <a:rPr lang="en-US" altLang="ja-JP" sz="2400" dirty="0"/>
               <a:t>r</a:t>
             </a:r>
             <a:r>
-              <a:rPr kumimoji="1" lang="en-US" altLang="ja-JP" sz="2400" dirty="0" smtClean="0"/>
+              <a:rPr kumimoji="1" lang="en-US" altLang="ja-JP" sz="2400" dirty="0"/>
               <a:t>eal(3)</a:t>
             </a:r>
             <a:r>
-              <a:rPr kumimoji="1" lang="ja-JP" altLang="en-US" sz="2400" dirty="0" smtClean="0"/>
+              <a:rPr kumimoji="1" lang="ja-JP" altLang="en-US" sz="2400" dirty="0"/>
               <a:t>は</a:t>
             </a:r>
             <a:r>
-              <a:rPr kumimoji="1" lang="en-US" altLang="ja-JP" sz="2400" dirty="0" smtClean="0"/>
+              <a:rPr kumimoji="1" lang="en-US" altLang="ja-JP" sz="2400" dirty="0"/>
               <a:t>3.0</a:t>
             </a:r>
             <a:r>
-              <a:rPr kumimoji="1" lang="ja-JP" altLang="en-US" sz="2400" dirty="0" smtClean="0"/>
+              <a:rPr kumimoji="1" lang="ja-JP" altLang="en-US" sz="2400" dirty="0"/>
               <a:t>。</a:t>
             </a:r>
             <a:r>
-              <a:rPr kumimoji="1" lang="en-US" altLang="ja-JP" sz="2400" dirty="0" smtClean="0"/>
+              <a:rPr kumimoji="1" lang="en-US" altLang="ja-JP" sz="2400" dirty="0"/>
               <a:t>ML</a:t>
             </a:r>
             <a:r>
-              <a:rPr lang="ja-JP" altLang="en-US" sz="2400" dirty="0" smtClean="0"/>
+              <a:rPr lang="ja-JP" altLang="en-US" sz="2400" dirty="0"/>
               <a:t>は</a:t>
             </a:r>
             <a:r>
-              <a:rPr kumimoji="1" lang="ja-JP" altLang="en-US" sz="2400" dirty="0" smtClean="0"/>
+              <a:rPr kumimoji="1" lang="ja-JP" altLang="en-US" sz="2400" dirty="0"/>
               <a:t>型推論を行うので、明示的な変換を行うのは仕方がない。</a:t>
             </a:r>
-            <a:endParaRPr kumimoji="1" lang="ja-JP" altLang="en-US" sz="2400" dirty="0"/>
           </a:p>
         </p:txBody>
       </p:sp>
@@ -4804,13 +4761,6 @@
   <p:clrMapOvr>
     <a:masterClrMapping/>
   </p:clrMapOvr>
-  <p:timing>
-    <p:tnLst>
-      <p:par>
-        <p:cTn xmlns:p14="http://schemas.microsoft.com/office/powerpoint/2010/main" id="1" dur="indefinite" restart="never" nodeType="tmRoot"/>
-      </p:par>
-    </p:tnLst>
-  </p:timing>
 </p:sld>
 </file>
 
@@ -4847,19 +4797,19 @@
           <a:lstStyle/>
           <a:p>
             <a:r>
-              <a:rPr kumimoji="1" lang="ja-JP" altLang="en-US" dirty="0" smtClean="0"/>
+              <a:rPr kumimoji="1" lang="ja-JP" altLang="en-US" dirty="0"/>
               <a:t>組</a:t>
             </a:r>
             <a:r>
-              <a:rPr kumimoji="1" lang="en-US" altLang="ja-JP" dirty="0" smtClean="0"/>
+              <a:rPr kumimoji="1" lang="en-US" altLang="ja-JP" dirty="0"/>
               <a:t>(tuple)</a:t>
             </a:r>
             <a:r>
-              <a:rPr kumimoji="1" lang="ja-JP" altLang="en-US" dirty="0" smtClean="0"/>
+              <a:rPr kumimoji="1" lang="ja-JP" altLang="en-US" dirty="0"/>
               <a:t>、直積型</a:t>
             </a:r>
             <a:r>
-              <a:rPr kumimoji="1" lang="en-US" altLang="ja-JP" dirty="0" smtClean="0"/>
+              <a:rPr kumimoji="1" lang="en-US" altLang="ja-JP" dirty="0"/>
               <a:t>(product type)</a:t>
             </a:r>
             <a:endParaRPr kumimoji="1" lang="ja-JP" altLang="en-US" dirty="0"/>
@@ -4889,98 +4839,98 @@
           <a:lstStyle/>
           <a:p>
             <a:r>
-              <a:rPr kumimoji="1" lang="en-US" altLang="ja-JP" sz="2800" dirty="0" smtClean="0"/>
+              <a:rPr kumimoji="1" lang="en-US" altLang="ja-JP" sz="2800" dirty="0"/>
               <a:t>2</a:t>
             </a:r>
             <a:r>
-              <a:rPr kumimoji="1" lang="ja-JP" altLang="en-US" sz="2800" dirty="0" smtClean="0"/>
+              <a:rPr kumimoji="1" lang="ja-JP" altLang="en-US" sz="2800" dirty="0"/>
               <a:t>つの型</a:t>
             </a:r>
             <a:r>
-              <a:rPr kumimoji="1" lang="en-US" altLang="ja-JP" sz="2800" i="1" dirty="0" smtClean="0"/>
+              <a:rPr kumimoji="1" lang="en-US" altLang="ja-JP" sz="2800" i="1" dirty="0"/>
               <a:t>A</a:t>
             </a:r>
             <a:r>
-              <a:rPr kumimoji="1" lang="en-US" altLang="ja-JP" sz="2800" dirty="0" smtClean="0"/>
+              <a:rPr kumimoji="1" lang="en-US" altLang="ja-JP" sz="2800" dirty="0"/>
               <a:t>, </a:t>
             </a:r>
             <a:r>
-              <a:rPr kumimoji="1" lang="en-US" altLang="ja-JP" sz="2800" i="1" dirty="0" smtClean="0"/>
+              <a:rPr kumimoji="1" lang="en-US" altLang="ja-JP" sz="2800" i="1" dirty="0"/>
               <a:t>B</a:t>
             </a:r>
             <a:r>
-              <a:rPr kumimoji="1" lang="ja-JP" altLang="en-US" sz="2800" dirty="0" smtClean="0"/>
+              <a:rPr kumimoji="1" lang="ja-JP" altLang="en-US" sz="2800" dirty="0"/>
               <a:t>の直積型</a:t>
             </a:r>
             <a:r>
-              <a:rPr kumimoji="1" lang="en-US" altLang="ja-JP" sz="2800" i="1" dirty="0" smtClean="0"/>
+              <a:rPr kumimoji="1" lang="en-US" altLang="ja-JP" sz="2800" i="1" dirty="0"/>
               <a:t>A</a:t>
             </a:r>
             <a:r>
-              <a:rPr kumimoji="1" lang="en-US" altLang="ja-JP" sz="2800" dirty="0" smtClean="0"/>
+              <a:rPr kumimoji="1" lang="en-US" altLang="ja-JP" sz="2800" dirty="0"/>
               <a:t>*</a:t>
             </a:r>
             <a:r>
-              <a:rPr kumimoji="1" lang="en-US" altLang="ja-JP" sz="2800" i="1" dirty="0" smtClean="0"/>
+              <a:rPr kumimoji="1" lang="en-US" altLang="ja-JP" sz="2800" i="1" dirty="0"/>
               <a:t>B</a:t>
             </a:r>
             <a:r>
-              <a:rPr kumimoji="1" lang="ja-JP" altLang="en-US" sz="2800" dirty="0" smtClean="0"/>
+              <a:rPr kumimoji="1" lang="ja-JP" altLang="en-US" sz="2800" dirty="0"/>
               <a:t>は型</a:t>
             </a:r>
             <a:r>
-              <a:rPr kumimoji="1" lang="en-US" altLang="ja-JP" sz="2800" i="1" dirty="0" smtClean="0"/>
+              <a:rPr kumimoji="1" lang="en-US" altLang="ja-JP" sz="2800" i="1" dirty="0"/>
               <a:t>A</a:t>
             </a:r>
             <a:r>
-              <a:rPr kumimoji="1" lang="ja-JP" altLang="en-US" sz="2800" dirty="0" smtClean="0"/>
+              <a:rPr kumimoji="1" lang="ja-JP" altLang="en-US" sz="2800" dirty="0"/>
               <a:t>の値と型</a:t>
             </a:r>
             <a:r>
-              <a:rPr kumimoji="1" lang="en-US" altLang="ja-JP" sz="2800" i="1" dirty="0" smtClean="0"/>
+              <a:rPr kumimoji="1" lang="en-US" altLang="ja-JP" sz="2800" i="1" dirty="0"/>
               <a:t>B</a:t>
             </a:r>
             <a:r>
-              <a:rPr kumimoji="1" lang="ja-JP" altLang="en-US" sz="2800" dirty="0" smtClean="0"/>
+              <a:rPr kumimoji="1" lang="ja-JP" altLang="en-US" sz="2800" dirty="0"/>
               <a:t>の値の対</a:t>
             </a:r>
             <a:r>
-              <a:rPr lang="ja-JP" altLang="en-US" sz="2800" dirty="0" smtClean="0"/>
+              <a:rPr lang="ja-JP" altLang="en-US" sz="2800" dirty="0"/>
               <a:t>から成る。</a:t>
             </a:r>
-            <a:endParaRPr lang="en-US" altLang="ja-JP" sz="2800" dirty="0" smtClean="0"/>
+            <a:endParaRPr lang="en-US" altLang="ja-JP" sz="2800" dirty="0"/>
           </a:p>
           <a:p>
             <a:pPr lvl="1"/>
             <a:r>
-              <a:rPr lang="ja-JP" altLang="en-US" sz="2400" dirty="0" smtClean="0"/>
+              <a:rPr lang="ja-JP" altLang="en-US" sz="2400" dirty="0"/>
               <a:t>（例）</a:t>
             </a:r>
             <a:r>
-              <a:rPr lang="en-US" altLang="ja-JP" sz="2400" dirty="0" smtClean="0"/>
+              <a:rPr lang="en-US" altLang="ja-JP" sz="2400" dirty="0"/>
               <a:t>(1, “one”)</a:t>
             </a:r>
             <a:r>
-              <a:rPr lang="ja-JP" altLang="en-US" sz="2400" dirty="0" smtClean="0"/>
+              <a:rPr lang="ja-JP" altLang="en-US" sz="2400" dirty="0"/>
               <a:t>は整数</a:t>
             </a:r>
             <a:r>
-              <a:rPr lang="en-US" altLang="ja-JP" sz="2400" dirty="0" smtClean="0"/>
+              <a:rPr lang="en-US" altLang="ja-JP" sz="2400" dirty="0"/>
               <a:t>1</a:t>
             </a:r>
             <a:r>
-              <a:rPr lang="ja-JP" altLang="en-US" sz="2400" dirty="0" smtClean="0"/>
+              <a:rPr lang="ja-JP" altLang="en-US" sz="2400" dirty="0"/>
               <a:t>と文字列</a:t>
             </a:r>
             <a:r>
-              <a:rPr lang="en-US" altLang="ja-JP" sz="2400" dirty="0" smtClean="0"/>
+              <a:rPr lang="en-US" altLang="ja-JP" sz="2400" dirty="0"/>
               <a:t>”one”</a:t>
             </a:r>
             <a:r>
-              <a:rPr lang="ja-JP" altLang="en-US" sz="2400" dirty="0" smtClean="0"/>
+              <a:rPr lang="ja-JP" altLang="en-US" sz="2400" dirty="0"/>
               <a:t>から成る対である。</a:t>
             </a:r>
-            <a:endParaRPr lang="en-US" altLang="ja-JP" sz="2400" dirty="0" smtClean="0"/>
+            <a:endParaRPr lang="en-US" altLang="ja-JP" sz="2400" dirty="0"/>
           </a:p>
           <a:p>
             <a:r>
@@ -4988,149 +4938,149 @@
               <a:t>n</a:t>
             </a:r>
             <a:r>
-              <a:rPr lang="ja-JP" altLang="en-US" sz="2800" dirty="0" smtClean="0"/>
+              <a:rPr lang="ja-JP" altLang="en-US" sz="2800" dirty="0"/>
               <a:t>個の型の直積</a:t>
             </a:r>
             <a:r>
-              <a:rPr lang="en-US" altLang="ja-JP" sz="2800" i="1" dirty="0" smtClean="0"/>
+              <a:rPr lang="en-US" altLang="ja-JP" sz="2800" i="1" dirty="0"/>
               <a:t>A</a:t>
             </a:r>
             <a:r>
-              <a:rPr lang="en-US" altLang="ja-JP" sz="2800" baseline="-25000" dirty="0" smtClean="0"/>
+              <a:rPr lang="en-US" altLang="ja-JP" sz="2800" baseline="-25000" dirty="0"/>
               <a:t>1</a:t>
             </a:r>
             <a:r>
-              <a:rPr lang="en-US" altLang="ja-JP" sz="2800" dirty="0" smtClean="0"/>
+              <a:rPr lang="en-US" altLang="ja-JP" sz="2800" dirty="0"/>
               <a:t>*</a:t>
             </a:r>
             <a:r>
-              <a:rPr lang="en-US" altLang="ja-JP" sz="2800" i="1" dirty="0" smtClean="0"/>
+              <a:rPr lang="en-US" altLang="ja-JP" sz="2800" i="1" dirty="0"/>
               <a:t>A</a:t>
             </a:r>
             <a:r>
-              <a:rPr lang="en-US" altLang="ja-JP" sz="2800" baseline="-25000" dirty="0" smtClean="0"/>
+              <a:rPr lang="en-US" altLang="ja-JP" sz="2800" baseline="-25000" dirty="0"/>
               <a:t>2</a:t>
             </a:r>
             <a:r>
-              <a:rPr lang="en-US" altLang="ja-JP" sz="2800" dirty="0" smtClean="0"/>
+              <a:rPr lang="en-US" altLang="ja-JP" sz="2800" dirty="0"/>
               <a:t>*…*</a:t>
             </a:r>
             <a:r>
-              <a:rPr lang="en-US" altLang="ja-JP" sz="2800" i="1" dirty="0" smtClean="0"/>
+              <a:rPr lang="en-US" altLang="ja-JP" sz="2800" i="1" dirty="0"/>
               <a:t>A</a:t>
             </a:r>
             <a:r>
-              <a:rPr lang="en-US" altLang="ja-JP" sz="2800" i="1" baseline="-25000" dirty="0" smtClean="0"/>
+              <a:rPr lang="en-US" altLang="ja-JP" sz="2800" i="1" baseline="-25000" dirty="0"/>
               <a:t>n</a:t>
             </a:r>
             <a:r>
-              <a:rPr lang="ja-JP" altLang="en-US" sz="2800" dirty="0" smtClean="0"/>
+              <a:rPr lang="ja-JP" altLang="en-US" sz="2800" dirty="0"/>
               <a:t>は組</a:t>
             </a:r>
             <a:r>
-              <a:rPr lang="en-US" altLang="ja-JP" sz="2800" dirty="0" smtClean="0"/>
+              <a:rPr lang="en-US" altLang="ja-JP" sz="2800" dirty="0"/>
               <a:t>(</a:t>
             </a:r>
             <a:r>
-              <a:rPr lang="en-US" altLang="ja-JP" sz="2800" i="1" dirty="0" smtClean="0"/>
+              <a:rPr lang="en-US" altLang="ja-JP" sz="2800" i="1" dirty="0"/>
               <a:t>a</a:t>
             </a:r>
             <a:r>
-              <a:rPr lang="en-US" altLang="ja-JP" sz="2800" baseline="-25000" dirty="0" smtClean="0"/>
+              <a:rPr lang="en-US" altLang="ja-JP" sz="2800" baseline="-25000" dirty="0"/>
               <a:t>1</a:t>
             </a:r>
             <a:r>
-              <a:rPr lang="en-US" altLang="ja-JP" sz="2800" dirty="0" smtClean="0"/>
+              <a:rPr lang="en-US" altLang="ja-JP" sz="2800" dirty="0"/>
               <a:t>,</a:t>
             </a:r>
             <a:r>
-              <a:rPr lang="en-US" altLang="ja-JP" sz="2800" i="1" dirty="0" smtClean="0"/>
+              <a:rPr lang="en-US" altLang="ja-JP" sz="2800" i="1" dirty="0"/>
               <a:t>a</a:t>
             </a:r>
             <a:r>
-              <a:rPr lang="en-US" altLang="ja-JP" sz="2800" baseline="-25000" dirty="0" smtClean="0"/>
+              <a:rPr lang="en-US" altLang="ja-JP" sz="2800" baseline="-25000" dirty="0"/>
               <a:t>2</a:t>
             </a:r>
             <a:r>
-              <a:rPr lang="en-US" altLang="ja-JP" sz="2800" dirty="0" smtClean="0"/>
+              <a:rPr lang="en-US" altLang="ja-JP" sz="2800" dirty="0"/>
               <a:t>,…,</a:t>
             </a:r>
             <a:r>
-              <a:rPr lang="en-US" altLang="ja-JP" sz="2800" i="1" dirty="0" smtClean="0"/>
+              <a:rPr lang="en-US" altLang="ja-JP" sz="2800" i="1" dirty="0"/>
               <a:t>a</a:t>
             </a:r>
             <a:r>
-              <a:rPr lang="en-US" altLang="ja-JP" sz="2800" i="1" baseline="-25000" dirty="0" smtClean="0"/>
+              <a:rPr lang="en-US" altLang="ja-JP" sz="2800" i="1" baseline="-25000" dirty="0"/>
               <a:t>n</a:t>
             </a:r>
             <a:r>
-              <a:rPr lang="en-US" altLang="ja-JP" sz="2800" dirty="0" smtClean="0"/>
+              <a:rPr lang="en-US" altLang="ja-JP" sz="2800" dirty="0"/>
               <a:t>)</a:t>
             </a:r>
             <a:r>
-              <a:rPr lang="ja-JP" altLang="en-US" sz="2800" dirty="0" smtClean="0"/>
+              <a:rPr lang="ja-JP" altLang="en-US" sz="2800" dirty="0"/>
               <a:t>から成る（</a:t>
             </a:r>
             <a:r>
-              <a:rPr lang="en-US" altLang="ja-JP" sz="2800" i="1" dirty="0" err="1" smtClean="0"/>
+              <a:rPr lang="en-US" altLang="ja-JP" sz="2800" i="1" dirty="0" err="1"/>
               <a:t>a</a:t>
             </a:r>
             <a:r>
-              <a:rPr lang="en-US" altLang="ja-JP" sz="2800" i="1" baseline="-25000" dirty="0" err="1" smtClean="0"/>
+              <a:rPr lang="en-US" altLang="ja-JP" sz="2800" i="1" baseline="-25000" dirty="0" err="1"/>
               <a:t>i</a:t>
             </a:r>
             <a:r>
-              <a:rPr lang="ja-JP" altLang="en-US" sz="2800" dirty="0" smtClean="0"/>
+              <a:rPr lang="ja-JP" altLang="en-US" sz="2800" dirty="0"/>
               <a:t>は型</a:t>
             </a:r>
             <a:r>
-              <a:rPr lang="en-US" altLang="ja-JP" sz="2800" i="1" dirty="0" smtClean="0"/>
+              <a:rPr lang="en-US" altLang="ja-JP" sz="2800" i="1" dirty="0"/>
               <a:t>A</a:t>
             </a:r>
             <a:r>
-              <a:rPr lang="en-US" altLang="ja-JP" sz="2800" i="1" baseline="-25000" dirty="0" smtClean="0"/>
+              <a:rPr lang="en-US" altLang="ja-JP" sz="2800" i="1" baseline="-25000" dirty="0"/>
               <a:t>i</a:t>
             </a:r>
             <a:r>
-              <a:rPr lang="ja-JP" altLang="en-US" sz="2800" dirty="0" smtClean="0"/>
+              <a:rPr lang="ja-JP" altLang="en-US" sz="2800" dirty="0"/>
               <a:t>の値</a:t>
             </a:r>
             <a:r>
-              <a:rPr lang="en-US" altLang="ja-JP" sz="2800" dirty="0" smtClean="0"/>
+              <a:rPr lang="en-US" altLang="ja-JP" sz="2800" dirty="0"/>
               <a:t>, 1 ≤ </a:t>
             </a:r>
             <a:r>
-              <a:rPr lang="en-US" altLang="ja-JP" sz="2800" i="1" dirty="0" err="1" smtClean="0"/>
+              <a:rPr lang="en-US" altLang="ja-JP" sz="2800" i="1" dirty="0" err="1"/>
               <a:t>i</a:t>
             </a:r>
             <a:r>
-              <a:rPr lang="en-US" altLang="ja-JP" sz="2800" dirty="0" smtClean="0"/>
+              <a:rPr lang="en-US" altLang="ja-JP" sz="2800" dirty="0"/>
               <a:t> ≤ </a:t>
             </a:r>
             <a:r>
-              <a:rPr lang="en-US" altLang="ja-JP" sz="2800" i="1" dirty="0" smtClean="0"/>
+              <a:rPr lang="en-US" altLang="ja-JP" sz="2800" i="1" dirty="0"/>
               <a:t>n</a:t>
             </a:r>
             <a:r>
-              <a:rPr lang="ja-JP" altLang="en-US" sz="2800" dirty="0" smtClean="0"/>
+              <a:rPr lang="ja-JP" altLang="en-US" sz="2800" dirty="0"/>
               <a:t>）。</a:t>
             </a:r>
-            <a:endParaRPr lang="en-US" altLang="ja-JP" sz="2800" dirty="0" smtClean="0"/>
-          </a:p>
-          <a:p>
-            <a:r>
-              <a:rPr lang="ja-JP" altLang="en-US" sz="2800" dirty="0" smtClean="0"/>
+            <a:endParaRPr lang="en-US" altLang="ja-JP" sz="2800" dirty="0"/>
+          </a:p>
+          <a:p>
+            <a:r>
+              <a:rPr lang="ja-JP" altLang="en-US" sz="2800" dirty="0"/>
               <a:t>直積型に対する演算は、対の最初の要素と</a:t>
             </a:r>
             <a:r>
-              <a:rPr lang="en-US" altLang="ja-JP" sz="2800" dirty="0" smtClean="0"/>
+              <a:rPr lang="en-US" altLang="ja-JP" sz="2800" dirty="0"/>
               <a:t>2</a:t>
             </a:r>
             <a:r>
-              <a:rPr lang="ja-JP" altLang="en-US" sz="2800" dirty="0" smtClean="0"/>
+              <a:rPr lang="ja-JP" altLang="en-US" sz="2800" dirty="0"/>
               <a:t>番目の要素を取り出す関数であり以下のように定義される。</a:t>
             </a:r>
-            <a:endParaRPr lang="en-US" altLang="ja-JP" sz="2800" dirty="0" smtClean="0"/>
+            <a:endParaRPr lang="en-US" altLang="ja-JP" sz="2800" dirty="0"/>
           </a:p>
         </p:txBody>
       </p:sp>
@@ -5161,19 +5111,19 @@
               <a:t> </a:t>
             </a:r>
             <a:r>
-              <a:rPr lang="en-US" altLang="ja-JP" sz="2800" b="1" dirty="0" smtClean="0"/>
+              <a:rPr lang="en-US" altLang="ja-JP" sz="2800" b="1" dirty="0"/>
               <a:t>fun</a:t>
             </a:r>
             <a:r>
-              <a:rPr lang="en-US" altLang="ja-JP" sz="2800" dirty="0" smtClean="0"/>
+              <a:rPr lang="en-US" altLang="ja-JP" sz="2800" dirty="0"/>
               <a:t> first (</a:t>
             </a:r>
             <a:r>
-              <a:rPr lang="en-US" altLang="ja-JP" sz="2800" dirty="0" err="1" smtClean="0"/>
+              <a:rPr lang="en-US" altLang="ja-JP" sz="2800" dirty="0" err="1"/>
               <a:t>x,y</a:t>
             </a:r>
             <a:r>
-              <a:rPr lang="en-US" altLang="ja-JP" sz="2800" dirty="0" smtClean="0"/>
+              <a:rPr lang="en-US" altLang="ja-JP" sz="2800" dirty="0"/>
               <a:t>) = x;</a:t>
             </a:r>
           </a:p>
@@ -5183,19 +5133,19 @@
               <a:t> </a:t>
             </a:r>
             <a:r>
-              <a:rPr kumimoji="1" lang="en-US" altLang="ja-JP" sz="2800" b="1" dirty="0" smtClean="0"/>
+              <a:rPr kumimoji="1" lang="en-US" altLang="ja-JP" sz="2800" b="1" dirty="0"/>
               <a:t>fun</a:t>
             </a:r>
             <a:r>
-              <a:rPr kumimoji="1" lang="en-US" altLang="ja-JP" sz="2800" dirty="0" smtClean="0"/>
+              <a:rPr kumimoji="1" lang="en-US" altLang="ja-JP" sz="2800" dirty="0"/>
               <a:t> second (</a:t>
             </a:r>
             <a:r>
-              <a:rPr kumimoji="1" lang="en-US" altLang="ja-JP" sz="2800" dirty="0" err="1" smtClean="0"/>
+              <a:rPr kumimoji="1" lang="en-US" altLang="ja-JP" sz="2800" dirty="0" err="1"/>
               <a:t>x,y</a:t>
             </a:r>
             <a:r>
-              <a:rPr kumimoji="1" lang="en-US" altLang="ja-JP" sz="2800" dirty="0" smtClean="0"/>
+              <a:rPr kumimoji="1" lang="en-US" altLang="ja-JP" sz="2800" dirty="0"/>
               <a:t>) = y;</a:t>
             </a:r>
             <a:endParaRPr kumimoji="1" lang="ja-JP" altLang="en-US" sz="2800" dirty="0"/>
@@ -5225,18 +5175,18 @@
           <a:lstStyle/>
           <a:p>
             <a:r>
-              <a:rPr kumimoji="1" lang="en-US" altLang="ja-JP" sz="2800" i="1" dirty="0" smtClean="0"/>
+              <a:rPr kumimoji="1" lang="en-US" altLang="ja-JP" sz="2800" i="1" dirty="0"/>
               <a:t>n</a:t>
             </a:r>
             <a:r>
-              <a:rPr kumimoji="1" lang="ja-JP" altLang="en-US" sz="2800" dirty="0" smtClean="0"/>
+              <a:rPr kumimoji="1" lang="ja-JP" altLang="en-US" sz="2800" dirty="0"/>
               <a:t>個の直積</a:t>
             </a:r>
             <a:r>
-              <a:rPr lang="ja-JP" altLang="en-US" sz="2800" dirty="0" smtClean="0"/>
+              <a:rPr lang="ja-JP" altLang="en-US" sz="2800" dirty="0"/>
               <a:t>型に対する演算も同様に定義される。</a:t>
             </a:r>
-            <a:endParaRPr kumimoji="1" lang="en-US" altLang="ja-JP" sz="2800" dirty="0" smtClean="0"/>
+            <a:endParaRPr kumimoji="1" lang="en-US" altLang="ja-JP" sz="2800" dirty="0"/>
           </a:p>
         </p:txBody>
       </p:sp>
@@ -5250,13 +5200,6 @@
   <p:clrMapOvr>
     <a:masterClrMapping/>
   </p:clrMapOvr>
-  <p:timing>
-    <p:tnLst>
-      <p:par>
-        <p:cTn xmlns:p14="http://schemas.microsoft.com/office/powerpoint/2010/main" id="1" dur="indefinite" restart="never" nodeType="tmRoot"/>
-      </p:par>
-    </p:tnLst>
-  </p:timing>
 </p:sld>
 </file>
 
@@ -5298,18 +5241,17 @@
           <a:lstStyle/>
           <a:p>
             <a:r>
-              <a:rPr kumimoji="1" lang="ja-JP" altLang="en-US" dirty="0" smtClean="0"/>
+              <a:rPr kumimoji="1" lang="ja-JP" altLang="en-US" dirty="0"/>
               <a:t>組</a:t>
             </a:r>
             <a:r>
-              <a:rPr kumimoji="1" lang="en-US" altLang="ja-JP" dirty="0" smtClean="0"/>
+              <a:rPr kumimoji="1" lang="en-US" altLang="ja-JP" dirty="0"/>
               <a:t>(tuple)</a:t>
             </a:r>
             <a:r>
-              <a:rPr kumimoji="1" lang="ja-JP" altLang="en-US" dirty="0" smtClean="0"/>
+              <a:rPr kumimoji="1" lang="ja-JP" altLang="en-US" dirty="0"/>
               <a:t>の例</a:t>
             </a:r>
-            <a:endParaRPr kumimoji="1" lang="ja-JP" altLang="en-US" dirty="0"/>
           </a:p>
         </p:txBody>
       </p:sp>
@@ -5339,47 +5281,31 @@
               <a:buNone/>
             </a:pPr>
             <a:r>
-              <a:rPr lang="ja-JP" altLang="en-US" dirty="0" smtClean="0"/>
+              <a:rPr lang="ja-JP" altLang="en-US" dirty="0"/>
               <a:t>対</a:t>
             </a:r>
             <a:r>
-              <a:rPr lang="en-US" altLang="ja-JP" dirty="0" smtClean="0"/>
+              <a:rPr lang="en-US" altLang="ja-JP" dirty="0"/>
               <a:t>(pair)</a:t>
             </a:r>
             <a:r>
-              <a:rPr lang="ja-JP" altLang="en-US" dirty="0" smtClean="0"/>
-              <a:t>、</a:t>
-            </a:r>
-            <a:r>
               <a:rPr lang="ja-JP" altLang="en-US" dirty="0"/>
-              <a:t>３つ</a:t>
-            </a:r>
-            <a:r>
-              <a:rPr lang="ja-JP" altLang="en-US" dirty="0" smtClean="0"/>
-              <a:t>組</a:t>
-            </a:r>
-            <a:r>
-              <a:rPr lang="en-US" altLang="ja-JP" dirty="0" smtClean="0"/>
+              <a:t>、３つ組</a:t>
+            </a:r>
+            <a:r>
+              <a:rPr lang="en-US" altLang="ja-JP" dirty="0"/>
               <a:t>(triple)</a:t>
             </a:r>
             <a:r>
-              <a:rPr lang="ja-JP" altLang="en-US" dirty="0" smtClean="0"/>
-              <a:t>、</a:t>
-            </a:r>
-            <a:r>
               <a:rPr lang="ja-JP" altLang="en-US" dirty="0"/>
-              <a:t>４つ</a:t>
-            </a:r>
-            <a:r>
-              <a:rPr lang="ja-JP" altLang="en-US" dirty="0" smtClean="0"/>
-              <a:t>組</a:t>
-            </a:r>
-            <a:r>
-              <a:rPr lang="en-US" altLang="ja-JP" dirty="0" smtClean="0"/>
+              <a:t>、４つ組</a:t>
+            </a:r>
+            <a:r>
+              <a:rPr lang="en-US" altLang="ja-JP" dirty="0"/>
               <a:t>(quadruple)</a:t>
             </a:r>
             <a:r>
-              <a:rPr lang="ja-JP" altLang="en-US" dirty="0" smtClean="0"/>
+              <a:rPr lang="ja-JP" altLang="en-US" dirty="0"/>
               <a:t>、</a:t>
             </a:r>
             <a:r>
@@ -5391,7 +5317,7 @@
             <a:pPr marL="0" indent="0">
               <a:buNone/>
             </a:pPr>
-            <a:endParaRPr kumimoji="1" lang="en-US" altLang="ja-JP" dirty="0" smtClean="0"/>
+            <a:endParaRPr kumimoji="1" lang="en-US" altLang="ja-JP" dirty="0"/>
           </a:p>
         </p:txBody>
       </p:sp>
@@ -5418,20 +5344,8 @@
           <a:lstStyle/>
           <a:p>
             <a:r>
-              <a:rPr lang="en-US" altLang="ja-JP" sz="2800" dirty="0" smtClean="0"/>
-              <a:t>- </a:t>
-            </a:r>
-            <a:r>
-              <a:rPr lang="en-US" altLang="ja-JP" sz="2800" dirty="0"/>
-              <a:t>(3</a:t>
-            </a:r>
-            <a:r>
-              <a:rPr lang="en-US" altLang="ja-JP" sz="2800" dirty="0" smtClean="0"/>
-              <a:t>, 4</a:t>
-            </a:r>
-            <a:r>
-              <a:rPr lang="en-US" altLang="ja-JP" sz="2800" dirty="0"/>
-              <a:t>);</a:t>
+              <a:rPr lang="en-US" altLang="ja-JP" sz="2800" dirty="0"/>
+              <a:t>- (3, 4);</a:t>
             </a:r>
           </a:p>
           <a:p>
@@ -5460,15 +5374,7 @@
           <a:p>
             <a:r>
               <a:rPr lang="en-US" altLang="ja-JP" sz="2800" dirty="0"/>
-              <a:t>- (4</a:t>
-            </a:r>
-            <a:r>
-              <a:rPr lang="en-US" altLang="ja-JP" sz="2800" dirty="0" smtClean="0"/>
-              <a:t>, 5.5, true</a:t>
-            </a:r>
-            <a:r>
-              <a:rPr lang="en-US" altLang="ja-JP" sz="2800" dirty="0"/>
-              <a:t>);</a:t>
+              <a:t>- (4, 5.5, true);</a:t>
             </a:r>
           </a:p>
           <a:p>
@@ -5518,31 +5424,15 @@
               <a:t> it = ("Taro","Jiro",5) : string * string * </a:t>
             </a:r>
             <a:r>
-              <a:rPr lang="en-US" altLang="ja-JP" sz="2800" dirty="0" err="1" smtClean="0"/>
+              <a:rPr lang="en-US" altLang="ja-JP" sz="2800" dirty="0" err="1"/>
               <a:t>int</a:t>
             </a:r>
-            <a:endParaRPr lang="en-US" altLang="ja-JP" sz="2800" dirty="0" smtClean="0"/>
-          </a:p>
-          <a:p>
-            <a:r>
-              <a:rPr lang="en-US" altLang="ja-JP" sz="2800" dirty="0"/>
-              <a:t>- #</a:t>
-            </a:r>
-            <a:r>
-              <a:rPr lang="en-US" altLang="ja-JP" sz="2800" dirty="0" smtClean="0"/>
-              <a:t>2 (</a:t>
-            </a:r>
-            <a:r>
-              <a:rPr lang="en-US" altLang="ja-JP" sz="2800" dirty="0"/>
-              <a:t>3</a:t>
-            </a:r>
-            <a:r>
-              <a:rPr lang="en-US" altLang="ja-JP" sz="2800" dirty="0" smtClean="0"/>
-              <a:t>, 4</a:t>
-            </a:r>
-            <a:r>
-              <a:rPr lang="en-US" altLang="ja-JP" sz="2800" dirty="0"/>
-              <a:t>);</a:t>
+            <a:endParaRPr lang="en-US" altLang="ja-JP" sz="2800" dirty="0"/>
+          </a:p>
+          <a:p>
+            <a:r>
+              <a:rPr lang="en-US" altLang="ja-JP" sz="2800" dirty="0"/>
+              <a:t>- #2 (3, 4);</a:t>
             </a:r>
           </a:p>
           <a:p>
@@ -5563,31 +5453,7 @@
           <a:p>
             <a:r>
               <a:rPr lang="en-US" altLang="ja-JP" sz="2800" dirty="0"/>
-              <a:t>- #</a:t>
-            </a:r>
-            <a:r>
-              <a:rPr lang="en-US" altLang="ja-JP" sz="2800" dirty="0" smtClean="0"/>
-              <a:t>1 (</a:t>
-            </a:r>
-            <a:r>
-              <a:rPr lang="en-US" altLang="ja-JP" sz="2800" dirty="0"/>
-              <a:t>"Taro"</a:t>
-            </a:r>
-            <a:r>
-              <a:rPr lang="en-US" altLang="ja-JP" sz="2800" dirty="0" smtClean="0"/>
-              <a:t>, "</a:t>
-            </a:r>
-            <a:r>
-              <a:rPr lang="en-US" altLang="ja-JP" sz="2800" dirty="0"/>
-              <a:t>Jiro"</a:t>
-            </a:r>
-            <a:r>
-              <a:rPr lang="en-US" altLang="ja-JP" sz="2800" dirty="0" smtClean="0"/>
-              <a:t>, 5</a:t>
-            </a:r>
-            <a:r>
-              <a:rPr lang="en-US" altLang="ja-JP" sz="2800" dirty="0"/>
-              <a:t>);     </a:t>
+              <a:t>- #1 ("Taro", "Jiro", 5);     </a:t>
             </a:r>
           </a:p>
           <a:p>
@@ -5599,7 +5465,7 @@
               <a:rPr lang="en-US" altLang="ja-JP" sz="2800" dirty="0"/>
               <a:t> it = "Taro" : string</a:t>
             </a:r>
-            <a:endParaRPr kumimoji="1" lang="en-US" altLang="ja-JP" sz="2800" dirty="0" smtClean="0"/>
+            <a:endParaRPr kumimoji="1" lang="en-US" altLang="ja-JP" sz="2800" dirty="0"/>
           </a:p>
         </p:txBody>
       </p:sp>
@@ -5625,12 +5491,8 @@
           <a:lstStyle/>
           <a:p>
             <a:r>
-              <a:rPr lang="ja-JP" altLang="en-US" sz="2800" dirty="0" smtClean="0"/>
-              <a:t>（組の例</a:t>
-            </a:r>
-            <a:r>
               <a:rPr lang="ja-JP" altLang="en-US" sz="2800" dirty="0"/>
-              <a:t>）</a:t>
+              <a:t>（組の例）</a:t>
             </a:r>
             <a:endParaRPr lang="en-US" altLang="ja-JP" sz="2800" dirty="0"/>
           </a:p>
@@ -5659,10 +5521,9 @@
           <a:lstStyle/>
           <a:p>
             <a:r>
-              <a:rPr kumimoji="1" lang="ja-JP" altLang="en-US" sz="2800" dirty="0" smtClean="0"/>
+              <a:rPr kumimoji="1" lang="ja-JP" altLang="en-US" sz="2800" dirty="0"/>
               <a:t>（組の要素の取得例）</a:t>
             </a:r>
-            <a:endParaRPr kumimoji="1" lang="ja-JP" altLang="en-US" sz="2800" dirty="0"/>
           </a:p>
         </p:txBody>
       </p:sp>
@@ -5676,13 +5537,6 @@
   <p:clrMapOvr>
     <a:masterClrMapping/>
   </p:clrMapOvr>
-  <p:timing>
-    <p:tnLst>
-      <p:par>
-        <p:cTn xmlns:p14="http://schemas.microsoft.com/office/powerpoint/2010/main" id="1" dur="indefinite" restart="never" nodeType="tmRoot"/>
-      </p:par>
-    </p:tnLst>
-  </p:timing>
 </p:sld>
 </file>
 
@@ -5719,11 +5573,11 @@
           <a:lstStyle/>
           <a:p>
             <a:r>
-              <a:rPr kumimoji="1" lang="ja-JP" altLang="en-US" dirty="0" smtClean="0"/>
+              <a:rPr kumimoji="1" lang="ja-JP" altLang="en-US" dirty="0"/>
               <a:t>レコード</a:t>
             </a:r>
             <a:r>
-              <a:rPr kumimoji="1" lang="en-US" altLang="ja-JP" dirty="0" smtClean="0"/>
+              <a:rPr kumimoji="1" lang="en-US" altLang="ja-JP" dirty="0"/>
               <a:t>(record)</a:t>
             </a:r>
             <a:endParaRPr kumimoji="1" lang="ja-JP" altLang="en-US" dirty="0"/>
@@ -5752,7 +5606,7 @@
           <a:lstStyle/>
           <a:p>
             <a:r>
-              <a:rPr lang="en-US" altLang="ja-JP" sz="2800" dirty="0" smtClean="0"/>
+              <a:rPr lang="en-US" altLang="ja-JP" sz="2800" dirty="0"/>
               <a:t>- {</a:t>
             </a:r>
             <a:r>
@@ -5761,14 +5615,10 @@
             </a:r>
             <a:r>
               <a:rPr lang="en-US" altLang="ja-JP" sz="2800" dirty="0"/>
-              <a:t>="Donald"</a:t>
-            </a:r>
-            <a:r>
-              <a:rPr lang="en-US" altLang="ja-JP" sz="2800" dirty="0" smtClean="0"/>
-              <a:t>, </a:t>
-            </a:r>
-            <a:r>
-              <a:rPr lang="en-US" altLang="ja-JP" sz="2800" dirty="0" err="1" smtClean="0"/>
+              <a:t>="Donald", </a:t>
+            </a:r>
+            <a:r>
+              <a:rPr lang="en-US" altLang="ja-JP" sz="2800" dirty="0" err="1"/>
               <a:t>last_name</a:t>
             </a:r>
             <a:r>
@@ -5791,14 +5641,10 @@
             </a:r>
             <a:r>
               <a:rPr lang="en-US" altLang="ja-JP" sz="2800" dirty="0"/>
-              <a:t>="Donald"</a:t>
-            </a:r>
-            <a:r>
-              <a:rPr lang="en-US" altLang="ja-JP" sz="2800" dirty="0" smtClean="0"/>
-              <a:t>,</a:t>
-            </a:r>
-            <a:r>
-              <a:rPr lang="en-US" altLang="ja-JP" sz="2800" dirty="0" err="1" smtClean="0"/>
+              <a:t>="Donald",</a:t>
+            </a:r>
+            <a:r>
+              <a:rPr lang="en-US" altLang="ja-JP" sz="2800" dirty="0" err="1"/>
               <a:t>last_name</a:t>
             </a:r>
             <a:r>
@@ -5895,15 +5741,7 @@
             </a:r>
             <a:r>
               <a:rPr lang="ja-JP" altLang="en-US" sz="2800" dirty="0"/>
-              <a:t>の</a:t>
-            </a:r>
-            <a:r>
-              <a:rPr lang="ja-JP" altLang="en-US" sz="2800" dirty="0" smtClean="0"/>
-              <a:t>レコードに対応する。</a:t>
-            </a:r>
-            <a:r>
-              <a:rPr lang="ja-JP" altLang="en-US" sz="2800" dirty="0"/>
-              <a:t>レコードは組と似ているが、各要素に名前がついているのが異なる。</a:t>
+              <a:t>のレコードに対応する。レコードは組と似ているが、各要素に名前がついているのが異なる。</a:t>
             </a:r>
             <a:endParaRPr lang="en-US" altLang="ja-JP" sz="2800" dirty="0"/>
           </a:p>
@@ -5919,13 +5757,6 @@
   <p:clrMapOvr>
     <a:masterClrMapping/>
   </p:clrMapOvr>
-  <p:timing>
-    <p:tnLst>
-      <p:par>
-        <p:cTn xmlns:p14="http://schemas.microsoft.com/office/powerpoint/2010/main" id="1" dur="indefinite" restart="never" nodeType="tmRoot"/>
-      </p:par>
-    </p:tnLst>
-  </p:timing>
 </p:sld>
 </file>
 
@@ -5962,11 +5793,11 @@
           <a:lstStyle/>
           <a:p>
             <a:r>
-              <a:rPr kumimoji="1" lang="ja-JP" altLang="en-US" dirty="0" smtClean="0"/>
+              <a:rPr kumimoji="1" lang="ja-JP" altLang="en-US" dirty="0"/>
               <a:t>リスト</a:t>
             </a:r>
             <a:r>
-              <a:rPr kumimoji="1" lang="en-US" altLang="ja-JP" dirty="0" smtClean="0"/>
+              <a:rPr kumimoji="1" lang="en-US" altLang="ja-JP" dirty="0"/>
               <a:t>(list)</a:t>
             </a:r>
             <a:endParaRPr kumimoji="1" lang="ja-JP" altLang="en-US" dirty="0"/>
@@ -5996,140 +5827,140 @@
           <a:lstStyle/>
           <a:p>
             <a:r>
-              <a:rPr kumimoji="1" lang="ja-JP" altLang="en-US" sz="2800" dirty="0" smtClean="0"/>
+              <a:rPr kumimoji="1" lang="ja-JP" altLang="en-US" sz="2800" dirty="0"/>
               <a:t>リストは有限の長さの要素の列である。</a:t>
             </a:r>
-            <a:endParaRPr kumimoji="1" lang="en-US" altLang="ja-JP" sz="2800" dirty="0" smtClean="0"/>
-          </a:p>
-          <a:p>
-            <a:r>
-              <a:rPr lang="ja-JP" altLang="en-US" sz="2800" dirty="0" smtClean="0"/>
+            <a:endParaRPr kumimoji="1" lang="en-US" altLang="ja-JP" sz="2800" dirty="0"/>
+          </a:p>
+          <a:p>
+            <a:r>
+              <a:rPr lang="ja-JP" altLang="en-US" sz="2800" dirty="0"/>
               <a:t>型</a:t>
             </a:r>
             <a:r>
-              <a:rPr lang="en-US" altLang="ja-JP" sz="2800" i="1" dirty="0" smtClean="0"/>
+              <a:rPr lang="en-US" altLang="ja-JP" sz="2800" i="1" dirty="0"/>
               <a:t>A</a:t>
             </a:r>
             <a:r>
-              <a:rPr lang="en-US" altLang="ja-JP" sz="2800" dirty="0" smtClean="0"/>
+              <a:rPr lang="en-US" altLang="ja-JP" sz="2800" dirty="0"/>
               <a:t> </a:t>
             </a:r>
             <a:r>
-              <a:rPr lang="en-US" altLang="ja-JP" sz="2800" b="1" dirty="0" smtClean="0"/>
+              <a:rPr lang="en-US" altLang="ja-JP" sz="2800" b="1" dirty="0"/>
               <a:t>list</a:t>
             </a:r>
             <a:r>
-              <a:rPr lang="ja-JP" altLang="en-US" sz="2800" dirty="0" smtClean="0"/>
+              <a:rPr lang="ja-JP" altLang="en-US" sz="2800" dirty="0"/>
               <a:t>は</a:t>
             </a:r>
             <a:r>
-              <a:rPr lang="en-US" altLang="ja-JP" sz="2800" i="1" dirty="0" smtClean="0"/>
+              <a:rPr lang="en-US" altLang="ja-JP" sz="2800" i="1" dirty="0"/>
               <a:t>A</a:t>
             </a:r>
             <a:r>
-              <a:rPr lang="ja-JP" altLang="en-US" sz="2800" dirty="0" smtClean="0"/>
+              <a:rPr lang="ja-JP" altLang="en-US" sz="2800" dirty="0"/>
               <a:t>型の要素のリスト全てから成る。</a:t>
             </a:r>
-            <a:endParaRPr lang="en-US" altLang="ja-JP" sz="2800" dirty="0" smtClean="0"/>
+            <a:endParaRPr lang="en-US" altLang="ja-JP" sz="2800" dirty="0"/>
           </a:p>
           <a:p>
             <a:pPr lvl="1"/>
             <a:r>
-              <a:rPr lang="ja-JP" altLang="en-US" sz="2400" dirty="0" smtClean="0"/>
+              <a:rPr lang="ja-JP" altLang="en-US" sz="2400" dirty="0"/>
               <a:t>（例）</a:t>
             </a:r>
             <a:r>
-              <a:rPr lang="en-US" altLang="ja-JP" sz="2400" b="1" dirty="0" err="1" smtClean="0"/>
+              <a:rPr lang="en-US" altLang="ja-JP" sz="2400" b="1" dirty="0" err="1"/>
               <a:t>int</a:t>
             </a:r>
             <a:r>
-              <a:rPr lang="en-US" altLang="ja-JP" sz="2400" b="1" dirty="0" smtClean="0"/>
+              <a:rPr lang="en-US" altLang="ja-JP" sz="2400" b="1" dirty="0"/>
               <a:t> list</a:t>
             </a:r>
             <a:r>
-              <a:rPr lang="ja-JP" altLang="en-US" sz="2400" dirty="0" smtClean="0"/>
+              <a:rPr lang="ja-JP" altLang="en-US" sz="2400" dirty="0"/>
               <a:t>は整数のリスト全てから成る。</a:t>
             </a:r>
-            <a:endParaRPr lang="en-US" altLang="ja-JP" sz="2400" dirty="0" smtClean="0"/>
-          </a:p>
-          <a:p>
-            <a:r>
-              <a:rPr lang="ja-JP" altLang="en-US" sz="2800" dirty="0" smtClean="0"/>
+            <a:endParaRPr lang="en-US" altLang="ja-JP" sz="2400" dirty="0"/>
+          </a:p>
+          <a:p>
+            <a:r>
+              <a:rPr lang="ja-JP" altLang="en-US" sz="2800" dirty="0"/>
               <a:t>リストの要素は</a:t>
             </a:r>
             <a:r>
-              <a:rPr lang="en-US" altLang="ja-JP" sz="2800" dirty="0" smtClean="0"/>
+              <a:rPr lang="en-US" altLang="ja-JP" sz="2800" dirty="0"/>
               <a:t> [ </a:t>
             </a:r>
             <a:r>
-              <a:rPr lang="ja-JP" altLang="en-US" sz="2800" dirty="0" smtClean="0"/>
+              <a:rPr lang="ja-JP" altLang="en-US" sz="2800" dirty="0"/>
               <a:t>と</a:t>
             </a:r>
             <a:r>
-              <a:rPr lang="en-US" altLang="ja-JP" sz="2800" dirty="0" smtClean="0"/>
+              <a:rPr lang="en-US" altLang="ja-JP" sz="2800" dirty="0"/>
               <a:t> ] </a:t>
             </a:r>
             <a:r>
-              <a:rPr lang="ja-JP" altLang="en-US" sz="2800" dirty="0" smtClean="0"/>
+              <a:rPr lang="ja-JP" altLang="en-US" sz="2800" dirty="0"/>
               <a:t>の間にコンマで区切って書かれる。空リストは</a:t>
             </a:r>
             <a:r>
-              <a:rPr lang="en-US" altLang="ja-JP" sz="2800" dirty="0" smtClean="0"/>
+              <a:rPr lang="en-US" altLang="ja-JP" sz="2800" dirty="0"/>
               <a:t>[ ]</a:t>
             </a:r>
             <a:r>
-              <a:rPr lang="ja-JP" altLang="en-US" sz="2800" dirty="0" smtClean="0"/>
+              <a:rPr lang="ja-JP" altLang="en-US" sz="2800" dirty="0"/>
               <a:t>あるいは</a:t>
             </a:r>
             <a:r>
-              <a:rPr lang="en-US" altLang="ja-JP" sz="2800" b="1" dirty="0" smtClean="0"/>
+              <a:rPr lang="en-US" altLang="ja-JP" sz="2800" b="1" dirty="0"/>
               <a:t>nil</a:t>
             </a:r>
             <a:r>
-              <a:rPr lang="ja-JP" altLang="en-US" sz="2800" dirty="0" smtClean="0"/>
+              <a:rPr lang="ja-JP" altLang="en-US" sz="2800" dirty="0"/>
               <a:t>と書かれる。</a:t>
             </a:r>
-            <a:endParaRPr lang="en-US" altLang="ja-JP" sz="2800" dirty="0" smtClean="0"/>
+            <a:endParaRPr lang="en-US" altLang="ja-JP" sz="2800" dirty="0"/>
           </a:p>
           <a:p>
             <a:pPr lvl="1"/>
             <a:r>
-              <a:rPr lang="ja-JP" altLang="en-US" sz="2400" dirty="0" smtClean="0"/>
+              <a:rPr lang="ja-JP" altLang="en-US" sz="2400" dirty="0"/>
               <a:t>（例）</a:t>
             </a:r>
             <a:r>
-              <a:rPr lang="en-US" altLang="ja-JP" sz="2400" dirty="0" smtClean="0"/>
+              <a:rPr lang="en-US" altLang="ja-JP" sz="2400" dirty="0"/>
               <a:t>[1,2,3]</a:t>
             </a:r>
             <a:r>
-              <a:rPr lang="ja-JP" altLang="en-US" sz="2400" dirty="0" smtClean="0"/>
+              <a:rPr lang="ja-JP" altLang="en-US" sz="2400" dirty="0"/>
               <a:t>は３つの整数</a:t>
             </a:r>
             <a:r>
-              <a:rPr lang="en-US" altLang="ja-JP" sz="2400" dirty="0" smtClean="0"/>
+              <a:rPr lang="en-US" altLang="ja-JP" sz="2400" dirty="0"/>
               <a:t>1,2,3</a:t>
             </a:r>
             <a:r>
-              <a:rPr lang="ja-JP" altLang="en-US" sz="2400" dirty="0" smtClean="0"/>
+              <a:rPr lang="ja-JP" altLang="en-US" sz="2400" dirty="0"/>
               <a:t>のリストであり、</a:t>
             </a:r>
             <a:r>
-              <a:rPr lang="en-US" altLang="ja-JP" sz="2400" dirty="0" smtClean="0"/>
+              <a:rPr lang="en-US" altLang="ja-JP" sz="2400" dirty="0"/>
               <a:t>[“red”, “white”, “blue”]</a:t>
             </a:r>
             <a:r>
-              <a:rPr lang="ja-JP" altLang="en-US" sz="2400" dirty="0" smtClean="0"/>
+              <a:rPr lang="ja-JP" altLang="en-US" sz="2400" dirty="0"/>
               <a:t>は３つの文字列</a:t>
             </a:r>
             <a:r>
-              <a:rPr lang="en-US" altLang="ja-JP" sz="2400" dirty="0" smtClean="0"/>
+              <a:rPr lang="en-US" altLang="ja-JP" sz="2400" dirty="0"/>
               <a:t>”red”, “white”, “blue”</a:t>
             </a:r>
             <a:r>
-              <a:rPr lang="ja-JP" altLang="en-US" sz="2400" dirty="0" smtClean="0"/>
+              <a:rPr lang="ja-JP" altLang="en-US" sz="2400" dirty="0"/>
               <a:t>のリストである。</a:t>
             </a:r>
-            <a:endParaRPr lang="en-US" altLang="ja-JP" sz="2400" dirty="0" smtClean="0"/>
+            <a:endParaRPr lang="en-US" altLang="ja-JP" sz="2400" dirty="0"/>
           </a:p>
           <a:p>
             <a:pPr lvl="1"/>
@@ -6152,7 +5983,7 @@
           </a:p>
           <a:p>
             <a:pPr lvl="1"/>
-            <a:endParaRPr lang="en-US" altLang="ja-JP" sz="2400" dirty="0" smtClean="0"/>
+            <a:endParaRPr lang="en-US" altLang="ja-JP" sz="2400" dirty="0"/>
           </a:p>
         </p:txBody>
       </p:sp>
@@ -6250,10 +6081,9 @@
           <a:lstStyle/>
           <a:p>
             <a:r>
-              <a:rPr kumimoji="1" lang="ja-JP" altLang="en-US" sz="2800" dirty="0" smtClean="0"/>
+              <a:rPr kumimoji="1" lang="ja-JP" altLang="en-US" sz="2800" dirty="0"/>
               <a:t>（例）</a:t>
             </a:r>
-            <a:endParaRPr kumimoji="1" lang="ja-JP" altLang="en-US" sz="2800" dirty="0"/>
           </a:p>
         </p:txBody>
       </p:sp>
@@ -6267,13 +6097,6 @@
   <p:clrMapOvr>
     <a:masterClrMapping/>
   </p:clrMapOvr>
-  <p:timing>
-    <p:tnLst>
-      <p:par>
-        <p:cTn xmlns:p14="http://schemas.microsoft.com/office/powerpoint/2010/main" id="1" dur="indefinite" restart="never" nodeType="tmRoot"/>
-      </p:par>
-    </p:tnLst>
-  </p:timing>
 </p:sld>
 </file>
 
@@ -6310,19 +6133,19 @@
           <a:lstStyle/>
           <a:p>
             <a:r>
-              <a:rPr kumimoji="1" lang="ja-JP" altLang="en-US" dirty="0" smtClean="0"/>
+              <a:rPr kumimoji="1" lang="ja-JP" altLang="en-US" dirty="0"/>
               <a:t>リスト</a:t>
             </a:r>
             <a:r>
-              <a:rPr kumimoji="1" lang="en-US" altLang="ja-JP" dirty="0" smtClean="0"/>
+              <a:rPr kumimoji="1" lang="en-US" altLang="ja-JP" dirty="0"/>
               <a:t>(</a:t>
             </a:r>
             <a:r>
-              <a:rPr kumimoji="1" lang="ja-JP" altLang="en-US" dirty="0" smtClean="0"/>
+              <a:rPr kumimoji="1" lang="ja-JP" altLang="en-US" dirty="0"/>
               <a:t>続き</a:t>
             </a:r>
             <a:r>
-              <a:rPr kumimoji="1" lang="en-US" altLang="ja-JP" dirty="0" smtClean="0"/>
+              <a:rPr kumimoji="1" lang="en-US" altLang="ja-JP" dirty="0"/>
               <a:t>)</a:t>
             </a:r>
             <a:endParaRPr kumimoji="1" lang="ja-JP" altLang="en-US" dirty="0"/>
@@ -6357,25 +6180,21 @@
             </a:r>
             <a:r>
               <a:rPr lang="ja-JP" altLang="en-US" sz="2800" dirty="0"/>
-              <a:t>におけるリストとは異なり</a:t>
-            </a:r>
-            <a:r>
-              <a:rPr lang="ja-JP" altLang="en-US" sz="2800" dirty="0" smtClean="0"/>
-              <a:t>、</a:t>
-            </a:r>
-            <a:r>
-              <a:rPr kumimoji="1" lang="en-US" altLang="ja-JP" sz="2800" dirty="0" smtClean="0"/>
+              <a:t>におけるリストとは異なり、</a:t>
+            </a:r>
+            <a:r>
+              <a:rPr kumimoji="1" lang="en-US" altLang="ja-JP" sz="2800" dirty="0"/>
               <a:t>ML</a:t>
             </a:r>
             <a:r>
-              <a:rPr kumimoji="1" lang="ja-JP" altLang="en-US" sz="2800" dirty="0" smtClean="0"/>
+              <a:rPr kumimoji="1" lang="ja-JP" altLang="en-US" sz="2800" dirty="0"/>
               <a:t>のリストは要素がすべて同じ型でなければならない</a:t>
             </a:r>
             <a:r>
-              <a:rPr lang="ja-JP" altLang="en-US" sz="2800" dirty="0" smtClean="0"/>
+              <a:rPr lang="ja-JP" altLang="en-US" sz="2800" dirty="0"/>
               <a:t>。</a:t>
             </a:r>
-            <a:endParaRPr kumimoji="1" lang="en-US" altLang="ja-JP" sz="2800" dirty="0" smtClean="0"/>
+            <a:endParaRPr kumimoji="1" lang="en-US" altLang="ja-JP" sz="2800" dirty="0"/>
           </a:p>
         </p:txBody>
       </p:sp>
@@ -6473,10 +6292,9 @@
           <a:lstStyle/>
           <a:p>
             <a:r>
-              <a:rPr kumimoji="1" lang="ja-JP" altLang="en-US" sz="2800" dirty="0" smtClean="0"/>
+              <a:rPr kumimoji="1" lang="ja-JP" altLang="en-US" sz="2800" dirty="0"/>
               <a:t>（例）</a:t>
             </a:r>
-            <a:endParaRPr kumimoji="1" lang="ja-JP" altLang="en-US" sz="2800" dirty="0"/>
           </a:p>
         </p:txBody>
       </p:sp>
@@ -6490,13 +6308,6 @@
   <p:clrMapOvr>
     <a:masterClrMapping/>
   </p:clrMapOvr>
-  <p:timing>
-    <p:tnLst>
-      <p:par>
-        <p:cTn xmlns:p14="http://schemas.microsoft.com/office/powerpoint/2010/main" id="1" dur="indefinite" restart="never" nodeType="tmRoot"/>
-      </p:par>
-    </p:tnLst>
-  </p:timing>
 </p:sld>
 </file>
 
@@ -6533,7 +6344,7 @@
           <a:lstStyle/>
           <a:p>
             <a:r>
-              <a:rPr kumimoji="1" lang="en-US" altLang="ja-JP" dirty="0" smtClean="0"/>
+              <a:rPr kumimoji="1" lang="en-US" altLang="ja-JP" dirty="0"/>
               <a:t>ML</a:t>
             </a:r>
             <a:endParaRPr kumimoji="1" lang="ja-JP" altLang="en-US" dirty="0"/>
@@ -6563,139 +6374,139 @@
           <a:lstStyle/>
           <a:p>
             <a:r>
-              <a:rPr kumimoji="1" lang="en-US" altLang="ja-JP" sz="2800" dirty="0" smtClean="0"/>
+              <a:rPr kumimoji="1" lang="en-US" altLang="ja-JP" sz="2800" dirty="0"/>
               <a:t>ML</a:t>
             </a:r>
             <a:r>
-              <a:rPr kumimoji="1" lang="ja-JP" altLang="en-US" sz="2800" dirty="0" smtClean="0"/>
+              <a:rPr kumimoji="1" lang="ja-JP" altLang="en-US" sz="2800" dirty="0"/>
               <a:t>は関数型言語で、命令型の機能も持つ。（</a:t>
             </a:r>
             <a:r>
-              <a:rPr kumimoji="1" lang="en-US" altLang="ja-JP" sz="2800" dirty="0" smtClean="0"/>
+              <a:rPr kumimoji="1" lang="en-US" altLang="ja-JP" sz="2800" dirty="0"/>
               <a:t>function-oriented imperative language</a:t>
             </a:r>
             <a:r>
-              <a:rPr kumimoji="1" lang="ja-JP" altLang="en-US" sz="2800" dirty="0" smtClean="0"/>
+              <a:rPr kumimoji="1" lang="ja-JP" altLang="en-US" sz="2800" dirty="0"/>
               <a:t>）</a:t>
             </a:r>
-            <a:endParaRPr kumimoji="1" lang="en-US" altLang="ja-JP" sz="2800" dirty="0" smtClean="0"/>
-          </a:p>
-          <a:p>
-            <a:r>
-              <a:rPr lang="ja-JP" altLang="en-US" sz="2800" dirty="0" smtClean="0"/>
+            <a:endParaRPr kumimoji="1" lang="en-US" altLang="ja-JP" sz="2800" dirty="0"/>
+          </a:p>
+          <a:p>
+            <a:r>
+              <a:rPr lang="ja-JP" altLang="en-US" sz="2800" dirty="0"/>
               <a:t>関数型の特徴（</a:t>
             </a:r>
             <a:r>
-              <a:rPr lang="en-US" altLang="ja-JP" sz="2800" dirty="0" smtClean="0"/>
+              <a:rPr lang="en-US" altLang="ja-JP" sz="2800" dirty="0"/>
               <a:t>Lisp</a:t>
             </a:r>
             <a:r>
-              <a:rPr lang="ja-JP" altLang="en-US" sz="2800" dirty="0" smtClean="0"/>
+              <a:rPr lang="ja-JP" altLang="en-US" sz="2800" dirty="0"/>
               <a:t>と同様）</a:t>
             </a:r>
             <a:r>
-              <a:rPr lang="en-US" altLang="ja-JP" sz="2800" dirty="0" smtClean="0"/>
+              <a:rPr lang="en-US" altLang="ja-JP" sz="2800" dirty="0"/>
               <a:t>: </a:t>
             </a:r>
             <a:r>
-              <a:rPr lang="ja-JP" altLang="en-US" sz="2800" dirty="0" smtClean="0"/>
+              <a:rPr lang="ja-JP" altLang="en-US" sz="2800" dirty="0"/>
               <a:t>関数が第一級の値（</a:t>
             </a:r>
             <a:r>
-              <a:rPr lang="en-US" altLang="ja-JP" sz="2800" dirty="0" smtClean="0"/>
+              <a:rPr lang="en-US" altLang="ja-JP" sz="2800" dirty="0"/>
               <a:t>first class value</a:t>
             </a:r>
             <a:r>
-              <a:rPr lang="ja-JP" altLang="en-US" sz="2800" dirty="0" smtClean="0"/>
+              <a:rPr lang="ja-JP" altLang="en-US" sz="2800" dirty="0"/>
               <a:t>）</a:t>
             </a:r>
-            <a:endParaRPr lang="en-US" altLang="ja-JP" sz="2800" dirty="0" smtClean="0"/>
+            <a:endParaRPr lang="en-US" altLang="ja-JP" sz="2800" dirty="0"/>
           </a:p>
           <a:p>
             <a:pPr lvl="1"/>
             <a:r>
-              <a:rPr kumimoji="1" lang="ja-JP" altLang="en-US" sz="2400" dirty="0" smtClean="0"/>
+              <a:rPr kumimoji="1" lang="ja-JP" altLang="en-US" sz="2400" dirty="0"/>
               <a:t>式の一部</a:t>
             </a:r>
             <a:r>
-              <a:rPr lang="ja-JP" altLang="en-US" sz="2400" dirty="0" smtClean="0"/>
+              <a:rPr lang="ja-JP" altLang="en-US" sz="2400" dirty="0"/>
               <a:t>で</a:t>
             </a:r>
             <a:r>
-              <a:rPr kumimoji="1" lang="ja-JP" altLang="en-US" sz="2400" dirty="0" smtClean="0"/>
+              <a:rPr kumimoji="1" lang="ja-JP" altLang="en-US" sz="2400" dirty="0"/>
               <a:t>関数が生成できる</a:t>
             </a:r>
-            <a:endParaRPr kumimoji="1" lang="en-US" altLang="ja-JP" sz="2400" dirty="0" smtClean="0"/>
+            <a:endParaRPr kumimoji="1" lang="en-US" altLang="ja-JP" sz="2400" dirty="0"/>
           </a:p>
           <a:p>
             <a:pPr lvl="1"/>
             <a:r>
-              <a:rPr lang="ja-JP" altLang="en-US" sz="2400" dirty="0" smtClean="0"/>
+              <a:rPr lang="ja-JP" altLang="en-US" sz="2400" dirty="0"/>
               <a:t>関数へ引数として関数を渡せる</a:t>
             </a:r>
-            <a:endParaRPr lang="en-US" altLang="ja-JP" sz="2400" dirty="0" smtClean="0"/>
+            <a:endParaRPr lang="en-US" altLang="ja-JP" sz="2400" dirty="0"/>
           </a:p>
           <a:p>
             <a:pPr lvl="1"/>
             <a:r>
-              <a:rPr lang="ja-JP" altLang="en-US" sz="2400" dirty="0" smtClean="0"/>
+              <a:rPr lang="ja-JP" altLang="en-US" sz="2400" dirty="0"/>
               <a:t>関数の返り値として関数を返せる</a:t>
             </a:r>
-            <a:endParaRPr kumimoji="1" lang="en-US" altLang="ja-JP" sz="2400" dirty="0" smtClean="0"/>
-          </a:p>
-          <a:p>
-            <a:r>
-              <a:rPr lang="en-US" altLang="ja-JP" sz="2800" dirty="0" smtClean="0"/>
+            <a:endParaRPr kumimoji="1" lang="en-US" altLang="ja-JP" sz="2400" dirty="0"/>
+          </a:p>
+          <a:p>
+            <a:r>
+              <a:rPr lang="en-US" altLang="ja-JP" sz="2800" dirty="0"/>
               <a:t>ML</a:t>
             </a:r>
             <a:r>
-              <a:rPr lang="ja-JP" altLang="en-US" sz="2800" dirty="0" smtClean="0"/>
+              <a:rPr lang="ja-JP" altLang="en-US" sz="2800" dirty="0"/>
               <a:t>の型システムは最もきれいで表現力が高いと考えられている</a:t>
             </a:r>
-            <a:endParaRPr lang="en-US" altLang="ja-JP" sz="2800" dirty="0" smtClean="0"/>
-          </a:p>
-          <a:p>
-            <a:r>
-              <a:rPr kumimoji="1" lang="en-US" altLang="ja-JP" sz="2800" dirty="0" smtClean="0"/>
+            <a:endParaRPr lang="en-US" altLang="ja-JP" sz="2800" dirty="0"/>
+          </a:p>
+          <a:p>
+            <a:r>
+              <a:rPr kumimoji="1" lang="en-US" altLang="ja-JP" sz="2800" dirty="0"/>
               <a:t>Lisp/</a:t>
             </a:r>
             <a:r>
-              <a:rPr kumimoji="1" lang="en-US" altLang="ja-JP" sz="2800" dirty="0" err="1" smtClean="0"/>
+              <a:rPr kumimoji="1" lang="en-US" altLang="ja-JP" sz="2800" dirty="0" err="1"/>
               <a:t>Algol</a:t>
             </a:r>
             <a:r>
-              <a:rPr kumimoji="1" lang="ja-JP" altLang="en-US" sz="2800" dirty="0" smtClean="0"/>
+              <a:rPr kumimoji="1" lang="ja-JP" altLang="en-US" sz="2800" dirty="0"/>
               <a:t>系言語の重要な概念を含んでいる</a:t>
             </a:r>
-            <a:endParaRPr kumimoji="1" lang="en-US" altLang="ja-JP" sz="2800" dirty="0" smtClean="0"/>
-          </a:p>
-          <a:p>
-            <a:r>
-              <a:rPr lang="ja-JP" altLang="en-US" sz="2800" dirty="0" smtClean="0"/>
+            <a:endParaRPr kumimoji="1" lang="en-US" altLang="ja-JP" sz="2800" dirty="0"/>
+          </a:p>
+          <a:p>
+            <a:r>
+              <a:rPr lang="ja-JP" altLang="en-US" sz="2800" dirty="0"/>
               <a:t>このスライドでは</a:t>
             </a:r>
             <a:r>
-              <a:rPr lang="en-US" altLang="ja-JP" sz="2800" dirty="0" smtClean="0"/>
+              <a:rPr lang="en-US" altLang="ja-JP" sz="2800" dirty="0"/>
               <a:t>Standard ML</a:t>
             </a:r>
             <a:r>
-              <a:rPr lang="ja-JP" altLang="en-US" sz="2800" dirty="0" smtClean="0"/>
+              <a:rPr lang="ja-JP" altLang="en-US" sz="2800" dirty="0"/>
               <a:t>を用いて説明する。その他の関数型言語としては</a:t>
             </a:r>
             <a:r>
-              <a:rPr lang="en-US" altLang="ja-JP" sz="2800" dirty="0" err="1" smtClean="0"/>
+              <a:rPr lang="en-US" altLang="ja-JP" sz="2800" dirty="0" err="1"/>
               <a:t>OCaml</a:t>
             </a:r>
             <a:r>
-              <a:rPr lang="ja-JP" altLang="en-US" sz="2800" dirty="0" smtClean="0"/>
+              <a:rPr lang="ja-JP" altLang="en-US" sz="2800" dirty="0"/>
               <a:t>、</a:t>
             </a:r>
             <a:r>
-              <a:rPr lang="en-US" altLang="ja-JP" sz="2800" dirty="0" smtClean="0"/>
+              <a:rPr lang="en-US" altLang="ja-JP" sz="2800" dirty="0"/>
               <a:t>Haskell</a:t>
             </a:r>
             <a:r>
-              <a:rPr lang="ja-JP" altLang="en-US" sz="2800" dirty="0" smtClean="0"/>
+              <a:rPr lang="ja-JP" altLang="en-US" sz="2800" dirty="0"/>
               <a:t>などがある。</a:t>
             </a:r>
             <a:endParaRPr kumimoji="1" lang="ja-JP" altLang="en-US" sz="2800" dirty="0"/>
@@ -6748,10 +6559,9 @@
           <a:lstStyle/>
           <a:p>
             <a:r>
-              <a:rPr kumimoji="1" lang="ja-JP" altLang="en-US" dirty="0" smtClean="0"/>
+              <a:rPr kumimoji="1" lang="ja-JP" altLang="en-US" dirty="0"/>
               <a:t>リストに対する操作</a:t>
             </a:r>
-            <a:endParaRPr kumimoji="1" lang="ja-JP" altLang="en-US" dirty="0"/>
           </a:p>
         </p:txBody>
       </p:sp>
@@ -6782,154 +6592,142 @@
               <a:t>n</a:t>
             </a:r>
             <a:r>
-              <a:rPr kumimoji="1" lang="en-US" altLang="ja-JP" sz="2800" dirty="0" smtClean="0"/>
+              <a:rPr kumimoji="1" lang="en-US" altLang="ja-JP" sz="2800" dirty="0"/>
               <a:t>ull(x) x</a:t>
             </a:r>
             <a:r>
-              <a:rPr kumimoji="1" lang="ja-JP" altLang="en-US" sz="2800" dirty="0" smtClean="0"/>
+              <a:rPr kumimoji="1" lang="ja-JP" altLang="en-US" sz="2800" dirty="0"/>
               <a:t>が空リストなら</a:t>
             </a:r>
             <a:r>
-              <a:rPr kumimoji="1" lang="en-US" altLang="ja-JP" sz="2800" dirty="0" smtClean="0"/>
+              <a:rPr kumimoji="1" lang="en-US" altLang="ja-JP" sz="2800" dirty="0"/>
               <a:t>true, </a:t>
             </a:r>
             <a:r>
-              <a:rPr kumimoji="1" lang="ja-JP" altLang="en-US" sz="2800" dirty="0" smtClean="0"/>
+              <a:rPr kumimoji="1" lang="ja-JP" altLang="en-US" sz="2800" dirty="0"/>
               <a:t>そうでなければ</a:t>
             </a:r>
             <a:r>
-              <a:rPr kumimoji="1" lang="en-US" altLang="ja-JP" sz="2800" dirty="0" smtClean="0"/>
+              <a:rPr kumimoji="1" lang="en-US" altLang="ja-JP" sz="2800" dirty="0"/>
               <a:t>false</a:t>
             </a:r>
           </a:p>
           <a:p>
             <a:r>
               <a:rPr lang="en-US" altLang="ja-JP" sz="2800" dirty="0" err="1"/>
-              <a:t>h</a:t>
-            </a:r>
-            <a:r>
-              <a:rPr lang="en-US" altLang="ja-JP" sz="2800" dirty="0" err="1" smtClean="0"/>
-              <a:t>d</a:t>
-            </a:r>
-            <a:r>
-              <a:rPr lang="en-US" altLang="ja-JP" sz="2800" dirty="0" smtClean="0"/>
+              <a:t>hd</a:t>
+            </a:r>
+            <a:r>
+              <a:rPr lang="en-US" altLang="ja-JP" sz="2800" dirty="0"/>
               <a:t>(x) </a:t>
             </a:r>
             <a:r>
-              <a:rPr lang="ja-JP" altLang="en-US" sz="2800" dirty="0" smtClean="0"/>
+              <a:rPr lang="ja-JP" altLang="en-US" sz="2800" dirty="0"/>
               <a:t>リスト</a:t>
             </a:r>
             <a:r>
-              <a:rPr lang="en-US" altLang="ja-JP" sz="2800" dirty="0" smtClean="0"/>
+              <a:rPr lang="en-US" altLang="ja-JP" sz="2800" dirty="0"/>
               <a:t>x</a:t>
             </a:r>
             <a:r>
-              <a:rPr lang="ja-JP" altLang="en-US" sz="2800" dirty="0" smtClean="0"/>
+              <a:rPr lang="ja-JP" altLang="en-US" sz="2800" dirty="0"/>
               <a:t>の最初の要素</a:t>
             </a:r>
-            <a:endParaRPr lang="en-US" altLang="ja-JP" sz="2800" dirty="0" smtClean="0"/>
+            <a:endParaRPr lang="en-US" altLang="ja-JP" sz="2800" dirty="0"/>
           </a:p>
           <a:p>
             <a:r>
               <a:rPr lang="en-US" altLang="ja-JP" sz="2800" dirty="0" err="1"/>
-              <a:t>t</a:t>
-            </a:r>
-            <a:r>
-              <a:rPr lang="en-US" altLang="ja-JP" sz="2800" dirty="0" err="1" smtClean="0"/>
-              <a:t>l</a:t>
-            </a:r>
-            <a:r>
-              <a:rPr lang="en-US" altLang="ja-JP" sz="2800" dirty="0" smtClean="0"/>
+              <a:t>tl</a:t>
+            </a:r>
+            <a:r>
+              <a:rPr lang="en-US" altLang="ja-JP" sz="2800" dirty="0"/>
               <a:t>(x) </a:t>
             </a:r>
             <a:r>
-              <a:rPr lang="ja-JP" altLang="en-US" sz="2800" dirty="0" smtClean="0"/>
+              <a:rPr lang="ja-JP" altLang="en-US" sz="2800" dirty="0"/>
               <a:t>リスト</a:t>
             </a:r>
             <a:r>
-              <a:rPr lang="en-US" altLang="ja-JP" sz="2800" dirty="0" smtClean="0"/>
+              <a:rPr lang="en-US" altLang="ja-JP" sz="2800" dirty="0"/>
               <a:t>x</a:t>
             </a:r>
             <a:r>
-              <a:rPr lang="ja-JP" altLang="en-US" sz="2800" dirty="0" smtClean="0"/>
+              <a:rPr lang="ja-JP" altLang="en-US" sz="2800" dirty="0"/>
               <a:t>の最初の要素を除いたリスト</a:t>
             </a:r>
-            <a:endParaRPr lang="en-US" altLang="ja-JP" sz="2800" dirty="0" smtClean="0"/>
-          </a:p>
-          <a:p>
+            <a:endParaRPr lang="en-US" altLang="ja-JP" sz="2800" dirty="0"/>
+          </a:p>
+          <a:p>
+            <a:r>
+              <a:rPr lang="en-US" altLang="ja-JP" sz="2800" dirty="0"/>
+              <a:t>a::x </a:t>
+            </a:r>
+            <a:r>
+              <a:rPr lang="ja-JP" altLang="en-US" sz="2800" dirty="0"/>
+              <a:t>最初の要素が</a:t>
+            </a:r>
             <a:r>
               <a:rPr lang="en-US" altLang="ja-JP" sz="2800" dirty="0"/>
               <a:t>a</a:t>
             </a:r>
             <a:r>
-              <a:rPr lang="en-US" altLang="ja-JP" sz="2800" dirty="0" smtClean="0"/>
-              <a:t>::x </a:t>
-            </a:r>
-            <a:r>
-              <a:rPr lang="ja-JP" altLang="en-US" sz="2800" dirty="0" smtClean="0"/>
-              <a:t>最初の要素が</a:t>
-            </a:r>
-            <a:r>
-              <a:rPr lang="en-US" altLang="ja-JP" sz="2800" dirty="0" smtClean="0"/>
-              <a:t>a</a:t>
-            </a:r>
-            <a:r>
-              <a:rPr lang="ja-JP" altLang="en-US" sz="2800" dirty="0" smtClean="0"/>
+              <a:rPr lang="ja-JP" altLang="en-US" sz="2800" dirty="0"/>
               <a:t>で残りのリストが</a:t>
             </a:r>
             <a:r>
-              <a:rPr lang="en-US" altLang="ja-JP" sz="2800" dirty="0" smtClean="0"/>
+              <a:rPr lang="en-US" altLang="ja-JP" sz="2800" dirty="0"/>
               <a:t>x</a:t>
             </a:r>
             <a:r>
-              <a:rPr lang="ja-JP" altLang="en-US" sz="2800" dirty="0" smtClean="0"/>
+              <a:rPr lang="ja-JP" altLang="en-US" sz="2800" dirty="0"/>
               <a:t>のリスト</a:t>
             </a:r>
-            <a:endParaRPr lang="en-US" altLang="ja-JP" sz="2800" dirty="0" smtClean="0"/>
-          </a:p>
-          <a:p>
-            <a:r>
-              <a:rPr lang="ja-JP" altLang="en-US" sz="2800" dirty="0" smtClean="0"/>
+            <a:endParaRPr lang="en-US" altLang="ja-JP" sz="2800" dirty="0"/>
+          </a:p>
+          <a:p>
+            <a:r>
+              <a:rPr lang="ja-JP" altLang="en-US" sz="2800" dirty="0"/>
               <a:t>（例）</a:t>
             </a:r>
             <a:r>
-              <a:rPr lang="en-US" altLang="ja-JP" sz="2800" dirty="0" smtClean="0"/>
+              <a:rPr lang="en-US" altLang="ja-JP" sz="2800" dirty="0"/>
               <a:t>null [ ] </a:t>
             </a:r>
             <a:r>
-              <a:rPr lang="ja-JP" altLang="en-US" sz="2800" dirty="0" smtClean="0"/>
+              <a:rPr lang="ja-JP" altLang="en-US" sz="2800" dirty="0"/>
               <a:t>は</a:t>
             </a:r>
             <a:r>
-              <a:rPr lang="en-US" altLang="ja-JP" sz="2800" dirty="0" smtClean="0"/>
+              <a:rPr lang="en-US" altLang="ja-JP" sz="2800" dirty="0"/>
               <a:t>true</a:t>
             </a:r>
           </a:p>
           <a:p>
             <a:r>
-              <a:rPr lang="ja-JP" altLang="en-US" sz="2800" dirty="0" smtClean="0"/>
+              <a:rPr lang="ja-JP" altLang="en-US" sz="2800" dirty="0"/>
               <a:t>（例）</a:t>
             </a:r>
             <a:r>
-              <a:rPr lang="en-US" altLang="ja-JP" sz="2800" dirty="0" smtClean="0"/>
+              <a:rPr lang="en-US" altLang="ja-JP" sz="2800" dirty="0"/>
               <a:t>null [1,2,3]</a:t>
             </a:r>
             <a:r>
-              <a:rPr lang="ja-JP" altLang="en-US" sz="2800" dirty="0" smtClean="0"/>
+              <a:rPr lang="ja-JP" altLang="en-US" sz="2800" dirty="0"/>
               <a:t>は</a:t>
             </a:r>
             <a:r>
-              <a:rPr lang="en-US" altLang="ja-JP" sz="2800" dirty="0" smtClean="0"/>
+              <a:rPr lang="en-US" altLang="ja-JP" sz="2800" dirty="0"/>
               <a:t>false</a:t>
             </a:r>
           </a:p>
           <a:p>
             <a:r>
-              <a:rPr lang="ja-JP" altLang="en-US" sz="2800" dirty="0" smtClean="0"/>
+              <a:rPr lang="ja-JP" altLang="en-US" sz="2800" dirty="0"/>
               <a:t>（例）</a:t>
             </a:r>
             <a:r>
-              <a:rPr lang="en-US" altLang="ja-JP" sz="2800" dirty="0" smtClean="0"/>
+              <a:rPr lang="en-US" altLang="ja-JP" sz="2800" dirty="0"/>
               <a:t>[1,2,3] = 1::[2,3] = 1::2::[3] = 1::2::3::[ ]</a:t>
             </a:r>
           </a:p>
@@ -6938,67 +6736,67 @@
           </a:p>
           <a:p>
             <a:r>
-              <a:rPr lang="en-US" altLang="ja-JP" sz="2800" dirty="0" smtClean="0"/>
+              <a:rPr lang="en-US" altLang="ja-JP" sz="2800" dirty="0"/>
               <a:t>::</a:t>
             </a:r>
             <a:r>
-              <a:rPr lang="ja-JP" altLang="en-US" sz="2800" dirty="0" smtClean="0"/>
+              <a:rPr lang="ja-JP" altLang="en-US" sz="2800" dirty="0"/>
               <a:t>は右結合であり、</a:t>
             </a:r>
             <a:r>
-              <a:rPr lang="en-US" altLang="ja-JP" sz="2800" dirty="0" smtClean="0"/>
+              <a:rPr lang="en-US" altLang="ja-JP" sz="2800" dirty="0"/>
               <a:t>1::2::[3]</a:t>
             </a:r>
             <a:r>
-              <a:rPr lang="ja-JP" altLang="en-US" sz="2800" dirty="0" smtClean="0"/>
+              <a:rPr lang="ja-JP" altLang="en-US" sz="2800" dirty="0"/>
               <a:t>は</a:t>
             </a:r>
             <a:r>
-              <a:rPr lang="en-US" altLang="ja-JP" sz="2800" dirty="0" smtClean="0"/>
+              <a:rPr lang="en-US" altLang="ja-JP" sz="2800" dirty="0"/>
               <a:t>1:</a:t>
             </a:r>
             <a:r>
-              <a:rPr lang="en-US" altLang="ja-JP" sz="2800" dirty="0" smtClean="0">
+              <a:rPr lang="en-US" altLang="ja-JP" sz="2800" dirty="0">
                 <a:sym typeface="Wingdings"/>
               </a:rPr>
               <a:t>:(2::[3])</a:t>
             </a:r>
             <a:r>
-              <a:rPr lang="ja-JP" altLang="en-US" sz="2800" dirty="0" smtClean="0">
+              <a:rPr lang="ja-JP" altLang="en-US" sz="2800" dirty="0">
                 <a:sym typeface="Wingdings"/>
               </a:rPr>
               <a:t>と同じであり、</a:t>
             </a:r>
-            <a:endParaRPr lang="en-US" altLang="ja-JP" sz="2800" dirty="0" smtClean="0">
+            <a:endParaRPr lang="en-US" altLang="ja-JP" sz="2800" dirty="0">
               <a:sym typeface="Wingdings"/>
             </a:endParaRPr>
           </a:p>
           <a:p>
             <a:r>
-              <a:rPr lang="en-US" altLang="ja-JP" sz="2800" dirty="0" smtClean="0">
+              <a:rPr lang="en-US" altLang="ja-JP" sz="2800" dirty="0">
                 <a:sym typeface="Wingdings"/>
               </a:rPr>
               <a:t>1::2::3::[ ]</a:t>
             </a:r>
             <a:r>
-              <a:rPr lang="ja-JP" altLang="en-US" sz="2800" dirty="0" smtClean="0">
+              <a:rPr lang="ja-JP" altLang="en-US" sz="2800" dirty="0">
                 <a:sym typeface="Wingdings"/>
               </a:rPr>
               <a:t>は</a:t>
             </a:r>
             <a:r>
-              <a:rPr lang="en-US" altLang="ja-JP" sz="2800" dirty="0" smtClean="0">
+              <a:rPr lang="en-US" altLang="ja-JP" sz="2800" dirty="0">
                 <a:sym typeface="Wingdings"/>
               </a:rPr>
               <a:t>1::(2::(3::[ ]))</a:t>
             </a:r>
             <a:r>
-              <a:rPr lang="ja-JP" altLang="en-US" sz="2800" dirty="0" smtClean="0">
+              <a:rPr lang="ja-JP" altLang="en-US" sz="2800" dirty="0">
                 <a:sym typeface="Wingdings"/>
               </a:rPr>
               <a:t>と同じである。</a:t>
             </a:r>
-            <a:endParaRPr lang="en-US" altLang="ja-JP" sz="2800" dirty="0" smtClean="0">
+            <a:endParaRPr lang="en-US" altLang="ja-JP" sz="2800" dirty="0">
               <a:sym typeface="Wingdings"/>
             </a:endParaRPr>
           </a:p>
@@ -7050,11 +6848,11 @@
           <a:lstStyle/>
           <a:p>
             <a:r>
-              <a:rPr kumimoji="1" lang="ja-JP" altLang="en-US" dirty="0" smtClean="0"/>
+              <a:rPr kumimoji="1" lang="ja-JP" altLang="en-US" dirty="0"/>
               <a:t>パターン</a:t>
             </a:r>
             <a:r>
-              <a:rPr kumimoji="1" lang="en-US" altLang="ja-JP" dirty="0" smtClean="0"/>
+              <a:rPr kumimoji="1" lang="en-US" altLang="ja-JP" dirty="0"/>
               <a:t>(pattern)</a:t>
             </a:r>
             <a:endParaRPr kumimoji="1" lang="ja-JP" altLang="en-US" dirty="0"/>
@@ -7090,22 +6888,18 @@
           <a:p>
             <a:r>
               <a:rPr lang="en-US" altLang="ja-JP" sz="2800" dirty="0" err="1"/>
-              <a:t>v</a:t>
-            </a:r>
-            <a:r>
-              <a:rPr lang="en-US" altLang="ja-JP" sz="2800" dirty="0" err="1" smtClean="0"/>
-              <a:t>al</a:t>
-            </a:r>
-            <a:r>
-              <a:rPr lang="en-US" altLang="ja-JP" sz="2800" dirty="0" smtClean="0"/>
+              <a:t>val</a:t>
+            </a:r>
+            <a:r>
+              <a:rPr lang="en-US" altLang="ja-JP" sz="2800" dirty="0"/>
               <a:t> &lt;pattern&gt; = &lt;</a:t>
             </a:r>
             <a:r>
-              <a:rPr lang="en-US" altLang="ja-JP" sz="2800" dirty="0" err="1" smtClean="0"/>
+              <a:rPr lang="en-US" altLang="ja-JP" sz="2800" dirty="0" err="1"/>
               <a:t>exp</a:t>
             </a:r>
             <a:r>
-              <a:rPr lang="en-US" altLang="ja-JP" sz="2800" dirty="0" smtClean="0"/>
+              <a:rPr lang="en-US" altLang="ja-JP" sz="2800" dirty="0"/>
               <a:t>&gt;;</a:t>
             </a:r>
           </a:p>
@@ -7138,15 +6932,15 @@
               <a:t>v</a:t>
             </a:r>
             <a:r>
-              <a:rPr kumimoji="1" lang="en-US" altLang="ja-JP" sz="2800" dirty="0" err="1" smtClean="0"/>
+              <a:rPr kumimoji="1" lang="en-US" altLang="ja-JP" sz="2800" dirty="0" err="1"/>
               <a:t>al</a:t>
             </a:r>
             <a:r>
-              <a:rPr kumimoji="1" lang="ja-JP" altLang="en-US" sz="2800" dirty="0" smtClean="0"/>
+              <a:rPr kumimoji="1" lang="ja-JP" altLang="en-US" sz="2800" dirty="0"/>
               <a:t>宣言の左辺は識別子１つではなく、パターンを用いることが</a:t>
             </a:r>
             <a:r>
-              <a:rPr lang="ja-JP" altLang="en-US" sz="2800" dirty="0" smtClean="0"/>
+              <a:rPr lang="ja-JP" altLang="en-US" sz="2800" dirty="0"/>
               <a:t>できる。</a:t>
             </a:r>
             <a:endParaRPr kumimoji="1" lang="ja-JP" altLang="en-US" sz="2800" dirty="0"/>
@@ -7176,47 +6970,47 @@
           <a:lstStyle/>
           <a:p>
             <a:r>
-              <a:rPr lang="en-US" altLang="ja-JP" sz="2800" dirty="0" smtClean="0"/>
+              <a:rPr lang="en-US" altLang="ja-JP" sz="2800" dirty="0"/>
               <a:t>&lt;pattern&gt; ::= &lt;id&gt;|&lt;tuple&gt;|&lt;cons&gt;|&lt;record&gt;|&lt;</a:t>
             </a:r>
             <a:r>
-              <a:rPr lang="en-US" altLang="ja-JP" sz="2800" dirty="0" err="1" smtClean="0"/>
+              <a:rPr lang="en-US" altLang="ja-JP" sz="2800" dirty="0" err="1"/>
               <a:t>constr</a:t>
             </a:r>
             <a:r>
-              <a:rPr lang="en-US" altLang="ja-JP" sz="2800" dirty="0" smtClean="0"/>
+              <a:rPr lang="en-US" altLang="ja-JP" sz="2800" dirty="0"/>
               <a:t>&gt;</a:t>
             </a:r>
           </a:p>
           <a:p>
             <a:r>
-              <a:rPr lang="en-US" altLang="ja-JP" sz="2800" dirty="0" smtClean="0"/>
+              <a:rPr lang="en-US" altLang="ja-JP" sz="2800" dirty="0"/>
               <a:t>&lt;tuple&gt; ::= (&lt;pattern&gt;, …, &lt;pattern&gt;)</a:t>
             </a:r>
           </a:p>
           <a:p>
             <a:r>
-              <a:rPr lang="en-US" altLang="ja-JP" sz="2800" dirty="0" smtClean="0"/>
+              <a:rPr lang="en-US" altLang="ja-JP" sz="2800" dirty="0"/>
               <a:t>&lt;cons&gt; ::= &lt;pattern&gt; :: &lt;pattern&gt;</a:t>
             </a:r>
           </a:p>
           <a:p>
             <a:r>
-              <a:rPr lang="en-US" altLang="ja-JP" sz="2800" dirty="0" smtClean="0"/>
+              <a:rPr lang="en-US" altLang="ja-JP" sz="2800" dirty="0"/>
               <a:t>&lt;record&gt; ::= {&lt;id&gt;=&lt;pattern&gt;, …, &lt;id&gt;=&lt;pattern&gt;}</a:t>
             </a:r>
           </a:p>
           <a:p>
             <a:r>
-              <a:rPr lang="en-US" altLang="ja-JP" sz="2800" dirty="0" smtClean="0"/>
+              <a:rPr lang="en-US" altLang="ja-JP" sz="2800" dirty="0"/>
               <a:t>&lt;</a:t>
             </a:r>
             <a:r>
-              <a:rPr lang="en-US" altLang="ja-JP" sz="2800" dirty="0" err="1" smtClean="0"/>
+              <a:rPr lang="en-US" altLang="ja-JP" sz="2800" dirty="0" err="1"/>
               <a:t>constr</a:t>
             </a:r>
             <a:r>
-              <a:rPr lang="en-US" altLang="ja-JP" sz="2800" dirty="0" smtClean="0"/>
+              <a:rPr lang="en-US" altLang="ja-JP" sz="2800" dirty="0"/>
               <a:t>&gt; ::= &lt;id&gt;(&lt;pattern&gt;,…,&lt;pattern&gt;)</a:t>
             </a:r>
           </a:p>
@@ -7245,58 +7039,58 @@
           <a:lstStyle/>
           <a:p>
             <a:r>
-              <a:rPr kumimoji="1" lang="ja-JP" altLang="en-US" sz="2400" dirty="0" smtClean="0"/>
+              <a:rPr kumimoji="1" lang="ja-JP" altLang="en-US" sz="2400" dirty="0"/>
               <a:t>（注意）パターン中に同じ変数が</a:t>
             </a:r>
             <a:r>
-              <a:rPr kumimoji="1" lang="en-US" altLang="ja-JP" sz="2400" dirty="0" smtClean="0"/>
+              <a:rPr kumimoji="1" lang="en-US" altLang="ja-JP" sz="2400" dirty="0"/>
               <a:t>2</a:t>
             </a:r>
             <a:r>
-              <a:rPr kumimoji="1" lang="ja-JP" altLang="en-US" sz="2400" dirty="0" smtClean="0"/>
+              <a:rPr kumimoji="1" lang="ja-JP" altLang="en-US" sz="2400" dirty="0"/>
               <a:t>回以上現れてはいけない等の制約がある。（</a:t>
             </a:r>
             <a:r>
-              <a:rPr kumimoji="1" lang="en-US" altLang="ja-JP" sz="2400" dirty="0" smtClean="0"/>
+              <a:rPr kumimoji="1" lang="en-US" altLang="ja-JP" sz="2400" dirty="0"/>
               <a:t>BNF</a:t>
             </a:r>
             <a:r>
-              <a:rPr kumimoji="1" lang="ja-JP" altLang="en-US" sz="2400" dirty="0" smtClean="0"/>
+              <a:rPr kumimoji="1" lang="ja-JP" altLang="en-US" sz="2400" dirty="0"/>
               <a:t>では表現できないので別途</a:t>
             </a:r>
             <a:r>
-              <a:rPr kumimoji="1" lang="en-US" altLang="ja-JP" sz="2400" dirty="0" smtClean="0"/>
+              <a:rPr kumimoji="1" lang="en-US" altLang="ja-JP" sz="2400" dirty="0"/>
               <a:t>check</a:t>
             </a:r>
             <a:r>
-              <a:rPr lang="ja-JP" altLang="en-US" sz="2400" dirty="0" smtClean="0"/>
+              <a:rPr lang="ja-JP" altLang="en-US" sz="2400" dirty="0"/>
               <a:t>される。）</a:t>
             </a:r>
-            <a:endParaRPr lang="en-US" altLang="ja-JP" sz="2400" dirty="0" smtClean="0"/>
-          </a:p>
-          <a:p>
-            <a:r>
-              <a:rPr lang="en-US" altLang="ja-JP" sz="2400" dirty="0" smtClean="0"/>
+            <a:endParaRPr lang="en-US" altLang="ja-JP" sz="2400" dirty="0"/>
+          </a:p>
+          <a:p>
+            <a:r>
+              <a:rPr lang="en-US" altLang="ja-JP" sz="2400" dirty="0"/>
               <a:t>nil</a:t>
             </a:r>
             <a:r>
-              <a:rPr lang="ja-JP" altLang="en-US" sz="2400" dirty="0" smtClean="0"/>
+              <a:rPr lang="ja-JP" altLang="en-US" sz="2400" dirty="0"/>
               <a:t>は</a:t>
             </a:r>
             <a:r>
-              <a:rPr lang="en-US" altLang="ja-JP" sz="2400" dirty="0" smtClean="0"/>
+              <a:rPr lang="en-US" altLang="ja-JP" sz="2400" dirty="0"/>
               <a:t>&lt;</a:t>
             </a:r>
             <a:r>
-              <a:rPr lang="en-US" altLang="ja-JP" sz="2400" dirty="0" err="1" smtClean="0"/>
+              <a:rPr lang="en-US" altLang="ja-JP" sz="2400" dirty="0" err="1"/>
               <a:t>constr</a:t>
             </a:r>
             <a:r>
-              <a:rPr lang="en-US" altLang="ja-JP" sz="2400" dirty="0" smtClean="0"/>
+              <a:rPr lang="en-US" altLang="ja-JP" sz="2400" dirty="0"/>
               <a:t>&gt;</a:t>
             </a:r>
             <a:r>
-              <a:rPr lang="ja-JP" altLang="en-US" sz="2400" dirty="0" smtClean="0"/>
+              <a:rPr lang="ja-JP" altLang="en-US" sz="2400" dirty="0"/>
               <a:t>であり、引数のない構成子である。</a:t>
             </a:r>
             <a:endParaRPr kumimoji="1" lang="ja-JP" altLang="en-US" sz="2400" dirty="0"/>
@@ -7354,10 +7148,9 @@
           <a:lstStyle/>
           <a:p>
             <a:r>
-              <a:rPr kumimoji="1" lang="ja-JP" altLang="en-US" dirty="0" smtClean="0"/>
+              <a:rPr kumimoji="1" lang="ja-JP" altLang="en-US" dirty="0"/>
               <a:t>パターンの例</a:t>
             </a:r>
-            <a:endParaRPr kumimoji="1" lang="ja-JP" altLang="en-US" dirty="0"/>
           </a:p>
         </p:txBody>
       </p:sp>
@@ -7456,10 +7249,10 @@
               <a:t>val z = 3 : </a:t>
             </a:r>
             <a:r>
-              <a:rPr lang="es-ES_tradnl" altLang="ja-JP" sz="2800" dirty="0" err="1" smtClean="0"/>
+              <a:rPr lang="es-ES_tradnl" altLang="ja-JP" sz="2800" dirty="0" err="1"/>
               <a:t>int</a:t>
             </a:r>
-            <a:endParaRPr lang="es-ES_tradnl" altLang="ja-JP" sz="2800" dirty="0" smtClean="0"/>
+            <a:endParaRPr lang="es-ES_tradnl" altLang="ja-JP" sz="2800" dirty="0"/>
           </a:p>
           <a:p>
             <a:r>
@@ -7492,10 +7285,10 @@
               <a:t> </a:t>
             </a:r>
             <a:r>
-              <a:rPr lang="fr-FR" altLang="ja-JP" sz="2800" dirty="0" err="1" smtClean="0"/>
+              <a:rPr lang="fr-FR" altLang="ja-JP" sz="2800" dirty="0" err="1"/>
               <a:t>list</a:t>
             </a:r>
-            <a:endParaRPr lang="fr-FR" altLang="ja-JP" sz="2800" dirty="0" smtClean="0"/>
+            <a:endParaRPr lang="fr-FR" altLang="ja-JP" sz="2800" dirty="0"/>
           </a:p>
           <a:p>
             <a:r>
@@ -7600,10 +7393,9 @@
           <a:lstStyle/>
           <a:p>
             <a:r>
-              <a:rPr kumimoji="1" lang="ja-JP" altLang="en-US" dirty="0" smtClean="0"/>
+              <a:rPr kumimoji="1" lang="ja-JP" altLang="en-US" dirty="0"/>
               <a:t>パターンを用いた関数宣言</a:t>
             </a:r>
-            <a:endParaRPr kumimoji="1" lang="ja-JP" altLang="en-US" dirty="0"/>
           </a:p>
         </p:txBody>
       </p:sp>
@@ -7635,19 +7427,19 @@
           <a:lstStyle/>
           <a:p>
             <a:r>
-              <a:rPr lang="en-US" altLang="ja-JP" sz="2800" dirty="0" smtClean="0"/>
+              <a:rPr lang="en-US" altLang="ja-JP" sz="2800" dirty="0"/>
               <a:t>fun &lt;id&gt; &lt;pattern&gt; = </a:t>
             </a:r>
             <a:r>
-              <a:rPr kumimoji="1" lang="en-US" altLang="ja-JP" sz="2800" dirty="0" smtClean="0"/>
+              <a:rPr kumimoji="1" lang="en-US" altLang="ja-JP" sz="2800" dirty="0"/>
               <a:t>&lt;</a:t>
             </a:r>
             <a:r>
-              <a:rPr lang="en-US" altLang="ja-JP" sz="2800" dirty="0" err="1" smtClean="0"/>
+              <a:rPr lang="en-US" altLang="ja-JP" sz="2800" dirty="0" err="1"/>
               <a:t>exp</a:t>
             </a:r>
             <a:r>
-              <a:rPr kumimoji="1" lang="en-US" altLang="ja-JP" sz="2800" dirty="0" smtClean="0"/>
+              <a:rPr kumimoji="1" lang="en-US" altLang="ja-JP" sz="2800" dirty="0"/>
               <a:t>&gt;</a:t>
             </a:r>
           </a:p>
@@ -7676,34 +7468,34 @@
           <a:lstStyle/>
           <a:p>
             <a:r>
-              <a:rPr lang="is-IS" altLang="ja-JP" sz="2800" dirty="0" smtClean="0"/>
+              <a:rPr lang="is-IS" altLang="ja-JP" sz="2800" dirty="0"/>
               <a:t>- fun f (x,y) = x+y;</a:t>
             </a:r>
           </a:p>
           <a:p>
             <a:r>
-              <a:rPr lang="is-IS" altLang="ja-JP" sz="2800" dirty="0" smtClean="0"/>
+              <a:rPr lang="is-IS" altLang="ja-JP" sz="2800" dirty="0"/>
               <a:t>val f = fn : int * int -&gt; int</a:t>
             </a:r>
           </a:p>
           <a:p>
             <a:r>
-              <a:rPr lang="is-IS" altLang="ja-JP" sz="2800" dirty="0" smtClean="0"/>
+              <a:rPr lang="is-IS" altLang="ja-JP" sz="2800" dirty="0"/>
               <a:t>- fun length nil = 0</a:t>
             </a:r>
           </a:p>
           <a:p>
             <a:r>
-              <a:rPr lang="is-IS" altLang="ja-JP" sz="2800" dirty="0" smtClean="0"/>
+              <a:rPr lang="is-IS" altLang="ja-JP" sz="2800" dirty="0"/>
               <a:t>      | length (x::xs) = 1 + length xs;</a:t>
             </a:r>
           </a:p>
           <a:p>
             <a:r>
-              <a:rPr lang="is-IS" altLang="ja-JP" sz="2800" dirty="0" smtClean="0"/>
+              <a:rPr lang="is-IS" altLang="ja-JP" sz="2800" dirty="0"/>
               <a:t>val length = fn : 'a list -&gt; int</a:t>
             </a:r>
-            <a:endParaRPr kumimoji="1" lang="en-US" altLang="ja-JP" sz="2800" dirty="0" smtClean="0"/>
+            <a:endParaRPr kumimoji="1" lang="en-US" altLang="ja-JP" sz="2800" dirty="0"/>
           </a:p>
         </p:txBody>
       </p:sp>
@@ -7735,42 +7527,42 @@
           <a:lstStyle/>
           <a:p>
             <a:r>
-              <a:rPr lang="en-US" altLang="ja-JP" sz="2800" dirty="0" smtClean="0"/>
+              <a:rPr lang="en-US" altLang="ja-JP" sz="2800" dirty="0"/>
               <a:t>fun &lt;id&gt; &lt;pattern&gt; = </a:t>
             </a:r>
             <a:r>
-              <a:rPr kumimoji="1" lang="en-US" altLang="ja-JP" sz="2800" dirty="0" smtClean="0"/>
+              <a:rPr kumimoji="1" lang="en-US" altLang="ja-JP" sz="2800" dirty="0"/>
               <a:t>&lt;</a:t>
             </a:r>
             <a:r>
-              <a:rPr lang="en-US" altLang="ja-JP" sz="2800" dirty="0" err="1" smtClean="0"/>
+              <a:rPr lang="en-US" altLang="ja-JP" sz="2800" dirty="0" err="1"/>
               <a:t>exp</a:t>
             </a:r>
             <a:r>
-              <a:rPr kumimoji="1" lang="en-US" altLang="ja-JP" sz="2800" dirty="0" smtClean="0"/>
+              <a:rPr kumimoji="1" lang="en-US" altLang="ja-JP" sz="2800" dirty="0"/>
               <a:t>&gt;</a:t>
             </a:r>
           </a:p>
           <a:p>
             <a:r>
-              <a:rPr lang="en-US" altLang="ja-JP" sz="2800" dirty="0" smtClean="0"/>
+              <a:rPr lang="en-US" altLang="ja-JP" sz="2800" dirty="0"/>
               <a:t>   |… </a:t>
             </a:r>
           </a:p>
           <a:p>
             <a:r>
-              <a:rPr lang="en-US" altLang="ja-JP" sz="2800" dirty="0" smtClean="0"/>
+              <a:rPr lang="en-US" altLang="ja-JP" sz="2800" dirty="0"/>
               <a:t>   | &lt;id&gt; &lt;pattern&gt; = &lt;</a:t>
             </a:r>
             <a:r>
-              <a:rPr lang="en-US" altLang="ja-JP" sz="2800" dirty="0" err="1" smtClean="0"/>
+              <a:rPr lang="en-US" altLang="ja-JP" sz="2800" dirty="0" err="1"/>
               <a:t>exp</a:t>
             </a:r>
             <a:r>
-              <a:rPr lang="en-US" altLang="ja-JP" sz="2800" dirty="0" smtClean="0"/>
+              <a:rPr lang="en-US" altLang="ja-JP" sz="2800" dirty="0"/>
               <a:t>&gt;</a:t>
             </a:r>
-            <a:endParaRPr kumimoji="1" lang="en-US" altLang="ja-JP" sz="2800" dirty="0" smtClean="0"/>
+            <a:endParaRPr kumimoji="1" lang="en-US" altLang="ja-JP" sz="2800" dirty="0"/>
           </a:p>
         </p:txBody>
       </p:sp>
@@ -7797,10 +7589,9 @@
           <a:lstStyle/>
           <a:p>
             <a:r>
-              <a:rPr kumimoji="1" lang="ja-JP" altLang="en-US" sz="2400" dirty="0" smtClean="0"/>
+              <a:rPr kumimoji="1" lang="ja-JP" altLang="en-US" sz="2400" dirty="0"/>
               <a:t>のいずれかの形で宣言できる。</a:t>
             </a:r>
-            <a:endParaRPr kumimoji="1" lang="ja-JP" altLang="en-US" sz="2400" dirty="0"/>
           </a:p>
         </p:txBody>
       </p:sp>
@@ -7856,42 +7647,41 @@
           <a:lstStyle/>
           <a:p>
             <a:r>
-              <a:rPr lang="ja-JP" altLang="en-US" sz="2400" dirty="0" smtClean="0"/>
+              <a:rPr lang="ja-JP" altLang="en-US" sz="2400" dirty="0"/>
               <a:t>（注意）上記の例の</a:t>
             </a:r>
             <a:r>
-              <a:rPr lang="en-US" altLang="ja-JP" sz="2400" dirty="0" smtClean="0"/>
+              <a:rPr lang="en-US" altLang="ja-JP" sz="2400" dirty="0"/>
               <a:t>f</a:t>
             </a:r>
             <a:r>
-              <a:rPr kumimoji="1" lang="ja-JP" altLang="en-US" sz="2400" dirty="0" smtClean="0"/>
+              <a:rPr kumimoji="1" lang="ja-JP" altLang="en-US" sz="2400" dirty="0"/>
               <a:t>は</a:t>
             </a:r>
             <a:r>
-              <a:rPr kumimoji="1" lang="en-US" altLang="ja-JP" sz="2400" dirty="0" smtClean="0"/>
+              <a:rPr kumimoji="1" lang="en-US" altLang="ja-JP" sz="2400" dirty="0"/>
               <a:t>2</a:t>
             </a:r>
             <a:r>
-              <a:rPr kumimoji="1" lang="ja-JP" altLang="en-US" sz="2400" dirty="0" smtClean="0"/>
+              <a:rPr kumimoji="1" lang="ja-JP" altLang="en-US" sz="2400" dirty="0"/>
               <a:t>引数関数のように見えるが、対を</a:t>
             </a:r>
             <a:r>
-              <a:rPr kumimoji="1" lang="en-US" altLang="ja-JP" sz="2400" dirty="0" smtClean="0"/>
+              <a:rPr kumimoji="1" lang="en-US" altLang="ja-JP" sz="2400" dirty="0"/>
               <a:t>1</a:t>
             </a:r>
             <a:r>
-              <a:rPr kumimoji="1" lang="ja-JP" altLang="en-US" sz="2400" dirty="0" smtClean="0"/>
+              <a:rPr kumimoji="1" lang="ja-JP" altLang="en-US" sz="2400" dirty="0"/>
               <a:t>つ引数にとる</a:t>
             </a:r>
             <a:r>
-              <a:rPr kumimoji="1" lang="en-US" altLang="ja-JP" sz="2400" dirty="0" smtClean="0"/>
+              <a:rPr kumimoji="1" lang="en-US" altLang="ja-JP" sz="2400" dirty="0"/>
               <a:t>1</a:t>
             </a:r>
             <a:r>
-              <a:rPr kumimoji="1" lang="ja-JP" altLang="en-US" sz="2400" dirty="0" smtClean="0"/>
+              <a:rPr kumimoji="1" lang="ja-JP" altLang="en-US" sz="2400" dirty="0"/>
               <a:t>引数関数である。</a:t>
             </a:r>
-            <a:endParaRPr kumimoji="1" lang="ja-JP" altLang="en-US" sz="2400" dirty="0"/>
           </a:p>
         </p:txBody>
       </p:sp>
@@ -7941,10 +7731,9 @@
           <a:lstStyle/>
           <a:p>
             <a:r>
-              <a:rPr kumimoji="1" lang="ja-JP" altLang="en-US" dirty="0" smtClean="0"/>
+              <a:rPr kumimoji="1" lang="ja-JP" altLang="en-US" dirty="0"/>
               <a:t>（続き）</a:t>
             </a:r>
-            <a:endParaRPr kumimoji="1" lang="ja-JP" altLang="en-US" dirty="0"/>
           </a:p>
         </p:txBody>
       </p:sp>
@@ -8022,19 +7811,19 @@
           <a:lstStyle/>
           <a:p>
             <a:r>
-              <a:rPr lang="ja-JP" altLang="en-US" sz="2800" dirty="0" smtClean="0"/>
+              <a:rPr lang="ja-JP" altLang="en-US" sz="2800" dirty="0"/>
               <a:t>関数</a:t>
             </a:r>
             <a:r>
-              <a:rPr lang="en-US" altLang="ja-JP" sz="2800" dirty="0" smtClean="0"/>
+              <a:rPr lang="en-US" altLang="ja-JP" sz="2800" dirty="0"/>
               <a:t>l</a:t>
             </a:r>
             <a:r>
-              <a:rPr kumimoji="1" lang="en-US" altLang="ja-JP" sz="2800" dirty="0" smtClean="0"/>
+              <a:rPr kumimoji="1" lang="en-US" altLang="ja-JP" sz="2800" dirty="0"/>
               <a:t>ength</a:t>
             </a:r>
             <a:r>
-              <a:rPr lang="ja-JP" altLang="en-US" sz="2800" dirty="0" smtClean="0"/>
+              <a:rPr lang="ja-JP" altLang="en-US" sz="2800" dirty="0"/>
               <a:t>の宣言は</a:t>
             </a:r>
             <a:r>
@@ -8042,50 +7831,50 @@
               <a:t>2</a:t>
             </a:r>
             <a:r>
-              <a:rPr kumimoji="1" lang="ja-JP" altLang="en-US" sz="2800" dirty="0" smtClean="0"/>
+              <a:rPr kumimoji="1" lang="ja-JP" altLang="en-US" sz="2800" dirty="0"/>
               <a:t>つの節からなり、上から順にパターンマッチングが行われる。引数</a:t>
             </a:r>
             <a:r>
-              <a:rPr lang="ja-JP" altLang="en-US" sz="2800" dirty="0" smtClean="0"/>
+              <a:rPr lang="ja-JP" altLang="en-US" sz="2800" dirty="0"/>
               <a:t>が</a:t>
             </a:r>
             <a:r>
-              <a:rPr lang="en-US" altLang="ja-JP" sz="2800" dirty="0" smtClean="0"/>
+              <a:rPr lang="en-US" altLang="ja-JP" sz="2800" dirty="0"/>
               <a:t>nil</a:t>
             </a:r>
             <a:r>
-              <a:rPr lang="ja-JP" altLang="en-US" sz="2800" dirty="0" smtClean="0"/>
+              <a:rPr lang="ja-JP" altLang="en-US" sz="2800" dirty="0"/>
               <a:t>にマッチするとき（引数が空リストのとき）は</a:t>
             </a:r>
             <a:r>
-              <a:rPr lang="en-US" altLang="ja-JP" sz="2800" dirty="0" smtClean="0"/>
+              <a:rPr lang="en-US" altLang="ja-JP" sz="2800" dirty="0"/>
               <a:t>length</a:t>
             </a:r>
             <a:r>
-              <a:rPr lang="ja-JP" altLang="en-US" sz="2800" dirty="0" smtClean="0"/>
+              <a:rPr lang="ja-JP" altLang="en-US" sz="2800" dirty="0"/>
               <a:t>は</a:t>
             </a:r>
             <a:r>
-              <a:rPr lang="en-US" altLang="ja-JP" sz="2800" dirty="0" smtClean="0"/>
+              <a:rPr lang="en-US" altLang="ja-JP" sz="2800" dirty="0"/>
               <a:t>0</a:t>
             </a:r>
             <a:r>
-              <a:rPr lang="ja-JP" altLang="en-US" sz="2800" dirty="0" smtClean="0"/>
+              <a:rPr lang="ja-JP" altLang="en-US" sz="2800" dirty="0"/>
               <a:t>を返し、そうでない時は</a:t>
             </a:r>
             <a:r>
-              <a:rPr lang="en-US" altLang="ja-JP" sz="2800" dirty="0" smtClean="0"/>
+              <a:rPr lang="en-US" altLang="ja-JP" sz="2800" dirty="0"/>
               <a:t>x::</a:t>
             </a:r>
             <a:r>
-              <a:rPr lang="en-US" altLang="ja-JP" sz="2800" dirty="0" err="1" smtClean="0"/>
+              <a:rPr lang="en-US" altLang="ja-JP" sz="2800" dirty="0" err="1"/>
               <a:t>xs</a:t>
             </a:r>
             <a:r>
-              <a:rPr lang="ja-JP" altLang="en-US" sz="2800" dirty="0" smtClean="0"/>
+              <a:rPr lang="ja-JP" altLang="en-US" sz="2800" dirty="0"/>
               <a:t>とパターンマッチングが行われる。</a:t>
             </a:r>
-            <a:endParaRPr lang="en-US" altLang="ja-JP" sz="2800" dirty="0" smtClean="0"/>
+            <a:endParaRPr lang="en-US" altLang="ja-JP" sz="2800" dirty="0"/>
           </a:p>
         </p:txBody>
       </p:sp>
@@ -8112,22 +7901,22 @@
           <a:lstStyle/>
           <a:p>
             <a:r>
-              <a:rPr kumimoji="1" lang="ja-JP" altLang="en-US" sz="2800" dirty="0" smtClean="0"/>
+              <a:rPr kumimoji="1" lang="ja-JP" altLang="en-US" sz="2800" dirty="0"/>
               <a:t>データ型を定義する場合は</a:t>
             </a:r>
             <a:r>
-              <a:rPr kumimoji="1" lang="en-US" altLang="ja-JP" sz="2800" dirty="0" err="1" smtClean="0"/>
+              <a:rPr kumimoji="1" lang="en-US" altLang="ja-JP" sz="2800" dirty="0" err="1"/>
               <a:t>datatype</a:t>
             </a:r>
             <a:r>
-              <a:rPr kumimoji="1" lang="ja-JP" altLang="en-US" sz="2800" dirty="0" smtClean="0"/>
+              <a:rPr kumimoji="1" lang="ja-JP" altLang="en-US" sz="2800" dirty="0"/>
               <a:t>宣言を用いる。</a:t>
             </a:r>
-            <a:endParaRPr kumimoji="1" lang="en-US" altLang="ja-JP" sz="2800" dirty="0" smtClean="0"/>
-          </a:p>
-          <a:p>
-            <a:r>
-              <a:rPr lang="ja-JP" altLang="en-US" sz="2800" dirty="0" smtClean="0"/>
+            <a:endParaRPr kumimoji="1" lang="en-US" altLang="ja-JP" sz="2800" dirty="0"/>
+          </a:p>
+          <a:p>
+            <a:r>
+              <a:rPr lang="ja-JP" altLang="en-US" sz="2800" dirty="0"/>
               <a:t>（例）</a:t>
             </a:r>
             <a:r>
@@ -8150,7 +7939,7 @@
           </a:p>
           <a:p>
             <a:r>
-              <a:rPr lang="ja-JP" altLang="en-US" sz="2800" dirty="0" smtClean="0"/>
+              <a:rPr lang="ja-JP" altLang="en-US" sz="2800" dirty="0"/>
               <a:t>の宣言下で以下のような関数が定義できる。</a:t>
             </a:r>
             <a:endParaRPr kumimoji="1" lang="ja-JP" altLang="en-US" sz="2800" dirty="0"/>
@@ -8179,7 +7968,7 @@
           <a:lstStyle/>
           <a:p>
             <a:r>
-              <a:rPr lang="en-US" altLang="ja-JP" sz="2800" dirty="0" smtClean="0"/>
+              <a:rPr lang="en-US" altLang="ja-JP" sz="2800" dirty="0"/>
               <a:t>- fun </a:t>
             </a:r>
             <a:r>
@@ -8202,11 +7991,7 @@
           <a:p>
             <a:r>
               <a:rPr lang="en-US" altLang="ja-JP" sz="2800" dirty="0"/>
-              <a:t> </a:t>
-            </a:r>
-            <a:r>
-              <a:rPr lang="en-US" altLang="ja-JP" sz="2800" dirty="0" smtClean="0"/>
-              <a:t>     | </a:t>
+              <a:t>      | </a:t>
             </a:r>
             <a:r>
               <a:rPr lang="en-US" altLang="ja-JP" sz="2800" dirty="0" err="1"/>
@@ -8360,14 +8145,13 @@
           <a:lstStyle/>
           <a:p>
             <a:r>
-              <a:rPr kumimoji="1" lang="en-US" altLang="ja-JP" dirty="0" smtClean="0"/>
+              <a:rPr kumimoji="1" lang="en-US" altLang="ja-JP" dirty="0"/>
               <a:t>ML</a:t>
             </a:r>
             <a:r>
-              <a:rPr kumimoji="1" lang="ja-JP" altLang="en-US" dirty="0" smtClean="0"/>
+              <a:rPr kumimoji="1" lang="ja-JP" altLang="en-US" dirty="0"/>
               <a:t>の型システム</a:t>
             </a:r>
-            <a:endParaRPr kumimoji="1" lang="ja-JP" altLang="en-US" dirty="0"/>
           </a:p>
         </p:txBody>
       </p:sp>
@@ -8389,50 +8173,50 @@
           <a:lstStyle/>
           <a:p>
             <a:r>
-              <a:rPr kumimoji="1" lang="en-US" altLang="ja-JP" dirty="0" smtClean="0"/>
+              <a:rPr kumimoji="1" lang="en-US" altLang="ja-JP" dirty="0"/>
               <a:t>ML</a:t>
             </a:r>
             <a:r>
-              <a:rPr kumimoji="1" lang="ja-JP" altLang="en-US" dirty="0" smtClean="0"/>
+              <a:rPr kumimoji="1" lang="ja-JP" altLang="en-US" dirty="0"/>
               <a:t>の型システムは</a:t>
             </a:r>
             <a:r>
-              <a:rPr lang="ja-JP" altLang="en-US" dirty="0" smtClean="0"/>
+              <a:rPr lang="ja-JP" altLang="en-US" dirty="0"/>
               <a:t>安全（</a:t>
             </a:r>
             <a:r>
-              <a:rPr kumimoji="1" lang="en-US" altLang="ja-JP" dirty="0" smtClean="0"/>
+              <a:rPr kumimoji="1" lang="en-US" altLang="ja-JP" dirty="0"/>
               <a:t>safe</a:t>
             </a:r>
             <a:r>
-              <a:rPr lang="ja-JP" altLang="en-US" dirty="0" smtClean="0"/>
+              <a:rPr lang="ja-JP" altLang="en-US" dirty="0"/>
               <a:t>）</a:t>
             </a:r>
-            <a:endParaRPr kumimoji="1" lang="en-US" altLang="ja-JP" dirty="0" smtClean="0"/>
+            <a:endParaRPr kumimoji="1" lang="en-US" altLang="ja-JP" dirty="0"/>
           </a:p>
           <a:p>
             <a:pPr lvl="1"/>
             <a:r>
-              <a:rPr lang="ja-JP" altLang="en-US" dirty="0" smtClean="0"/>
+              <a:rPr lang="ja-JP" altLang="en-US" dirty="0"/>
               <a:t>型検査器が式がある型を持つと判定した場合、その式の評価が終わった時にその型の値を生成することが保証される。</a:t>
             </a:r>
-            <a:endParaRPr lang="en-US" altLang="ja-JP" dirty="0" smtClean="0"/>
+            <a:endParaRPr lang="en-US" altLang="ja-JP" dirty="0"/>
           </a:p>
           <a:p>
             <a:pPr lvl="1"/>
             <a:r>
-              <a:rPr lang="ja-JP" altLang="en-US" dirty="0" smtClean="0"/>
+              <a:rPr lang="ja-JP" altLang="en-US" dirty="0"/>
               <a:t>（例）ある式が文字列へのポインタ型の場合、その式の値は文字列を保持しているメモリ領域を指すポインタであることが保証される。（解放された領域を指すポインタ</a:t>
             </a:r>
             <a:r>
-              <a:rPr lang="en-US" altLang="ja-JP" dirty="0" smtClean="0"/>
+              <a:rPr lang="en-US" altLang="ja-JP" dirty="0"/>
               <a:t>(dangling pointer)</a:t>
             </a:r>
             <a:r>
-              <a:rPr lang="ja-JP" altLang="en-US" dirty="0" smtClean="0"/>
+              <a:rPr lang="ja-JP" altLang="en-US" dirty="0"/>
               <a:t>や文字列以外の値を指すポインタにはならない。）</a:t>
             </a:r>
-            <a:endParaRPr lang="en-US" altLang="ja-JP" dirty="0" smtClean="0"/>
+            <a:endParaRPr lang="en-US" altLang="ja-JP" dirty="0"/>
           </a:p>
         </p:txBody>
       </p:sp>
@@ -8482,11 +8266,11 @@
           <a:lstStyle/>
           <a:p>
             <a:r>
-              <a:rPr kumimoji="1" lang="ja-JP" altLang="en-US" dirty="0" smtClean="0"/>
+              <a:rPr kumimoji="1" lang="ja-JP" altLang="en-US" dirty="0"/>
               <a:t>対話環境</a:t>
             </a:r>
             <a:r>
-              <a:rPr kumimoji="1" lang="en-US" altLang="ja-JP" dirty="0" smtClean="0"/>
+              <a:rPr kumimoji="1" lang="en-US" altLang="ja-JP" dirty="0"/>
               <a:t>(interactive session)</a:t>
             </a:r>
             <a:endParaRPr kumimoji="1" lang="ja-JP" altLang="en-US" dirty="0"/>
@@ -8525,41 +8309,41 @@
               <a:buChar char="-"/>
             </a:pPr>
             <a:r>
-              <a:rPr kumimoji="1" lang="en-US" altLang="ja-JP" sz="2800" dirty="0" smtClean="0"/>
+              <a:rPr kumimoji="1" lang="en-US" altLang="ja-JP" sz="2800" dirty="0"/>
               <a:t>&lt;</a:t>
             </a:r>
             <a:r>
-              <a:rPr kumimoji="1" lang="ja-JP" altLang="en-US" sz="2800" dirty="0" smtClean="0"/>
+              <a:rPr kumimoji="1" lang="ja-JP" altLang="en-US" sz="2800" dirty="0"/>
               <a:t>式</a:t>
             </a:r>
             <a:r>
-              <a:rPr kumimoji="1" lang="en-US" altLang="ja-JP" sz="2800" dirty="0" smtClean="0"/>
+              <a:rPr kumimoji="1" lang="en-US" altLang="ja-JP" sz="2800" dirty="0"/>
               <a:t>&gt;;</a:t>
             </a:r>
           </a:p>
           <a:p>
             <a:r>
-              <a:rPr lang="en-US" altLang="ja-JP" sz="2800" dirty="0" err="1" smtClean="0"/>
+              <a:rPr lang="en-US" altLang="ja-JP" sz="2800" dirty="0" err="1"/>
               <a:t>val</a:t>
             </a:r>
             <a:r>
-              <a:rPr lang="en-US" altLang="ja-JP" sz="2800" dirty="0" smtClean="0"/>
+              <a:rPr lang="en-US" altLang="ja-JP" sz="2800" dirty="0"/>
               <a:t> it = &lt;</a:t>
             </a:r>
             <a:r>
-              <a:rPr lang="ja-JP" altLang="en-US" sz="2800" dirty="0" smtClean="0"/>
+              <a:rPr lang="ja-JP" altLang="en-US" sz="2800" dirty="0"/>
               <a:t>値の表示</a:t>
             </a:r>
             <a:r>
-              <a:rPr lang="en-US" altLang="ja-JP" sz="2800" dirty="0" smtClean="0"/>
+              <a:rPr lang="en-US" altLang="ja-JP" sz="2800" dirty="0"/>
               <a:t>&gt; : &lt;</a:t>
             </a:r>
             <a:r>
-              <a:rPr lang="ja-JP" altLang="en-US" sz="2800" dirty="0" smtClean="0"/>
+              <a:rPr lang="ja-JP" altLang="en-US" sz="2800" dirty="0"/>
               <a:t>型</a:t>
             </a:r>
             <a:r>
-              <a:rPr lang="en-US" altLang="ja-JP" sz="2800" dirty="0" smtClean="0"/>
+              <a:rPr lang="en-US" altLang="ja-JP" sz="2800" dirty="0"/>
               <a:t>&gt;</a:t>
             </a:r>
             <a:endParaRPr kumimoji="1" lang="ja-JP" altLang="en-US" sz="2800" dirty="0"/>
@@ -8589,19 +8373,15 @@
           <a:lstStyle/>
           <a:p>
             <a:r>
-              <a:rPr lang="ja-JP" altLang="en-US" sz="2800" dirty="0" smtClean="0"/>
+              <a:rPr lang="ja-JP" altLang="en-US" sz="2800" dirty="0"/>
               <a:t>（例）</a:t>
             </a:r>
-            <a:endParaRPr lang="en-US" altLang="ja-JP" sz="2800" dirty="0" smtClean="0"/>
-          </a:p>
-          <a:p>
-            <a:r>
-              <a:rPr lang="en-US" altLang="ja-JP" sz="2800" dirty="0" smtClean="0"/>
-              <a:t>- </a:t>
-            </a:r>
-            <a:r>
-              <a:rPr lang="en-US" altLang="ja-JP" sz="2800" dirty="0"/>
-              <a:t>5+3-2;</a:t>
+            <a:endParaRPr lang="en-US" altLang="ja-JP" sz="2800" dirty="0"/>
+          </a:p>
+          <a:p>
+            <a:r>
+              <a:rPr lang="en-US" altLang="ja-JP" sz="2800" dirty="0"/>
+              <a:t>- 5+3-2;</a:t>
             </a:r>
           </a:p>
           <a:p>
@@ -8680,7 +8460,7 @@
               <a:rPr lang="en-US" altLang="ja-JP" sz="2800" dirty="0" err="1"/>
               <a:t>bool</a:t>
             </a:r>
-            <a:endParaRPr kumimoji="1" lang="en-US" altLang="ja-JP" sz="2800" dirty="0" smtClean="0"/>
+            <a:endParaRPr kumimoji="1" lang="en-US" altLang="ja-JP" sz="2800" dirty="0"/>
           </a:p>
         </p:txBody>
       </p:sp>
@@ -8730,15 +8510,15 @@
           <a:lstStyle/>
           <a:p>
             <a:r>
-              <a:rPr kumimoji="1" lang="en-US" altLang="ja-JP" dirty="0" smtClean="0"/>
+              <a:rPr kumimoji="1" lang="en-US" altLang="ja-JP" dirty="0"/>
               <a:t>ML</a:t>
             </a:r>
             <a:r>
-              <a:rPr kumimoji="1" lang="ja-JP" altLang="en-US" dirty="0" smtClean="0"/>
+              <a:rPr kumimoji="1" lang="ja-JP" altLang="en-US" dirty="0"/>
               <a:t>の式の評価（実行）</a:t>
             </a:r>
             <a:r>
-              <a:rPr kumimoji="1" lang="en-US" altLang="ja-JP" dirty="0" smtClean="0"/>
+              <a:rPr kumimoji="1" lang="en-US" altLang="ja-JP" dirty="0"/>
               <a:t>	</a:t>
             </a:r>
             <a:endParaRPr kumimoji="1" lang="ja-JP" altLang="en-US" dirty="0"/>
@@ -8768,61 +8548,53 @@
           <a:lstStyle/>
           <a:p>
             <a:r>
-              <a:rPr kumimoji="1" lang="ja-JP" altLang="en-US" sz="2800" dirty="0" smtClean="0"/>
+              <a:rPr kumimoji="1" lang="ja-JP" altLang="en-US" sz="2800" dirty="0"/>
               <a:t>式は構文解析、型検査、コンパイルの後実行される。</a:t>
             </a:r>
-            <a:endParaRPr kumimoji="1" lang="en-US" altLang="ja-JP" sz="2800" dirty="0" smtClean="0"/>
-          </a:p>
-          <a:p>
-            <a:r>
-              <a:rPr lang="ja-JP" altLang="en-US" sz="2800" dirty="0" smtClean="0"/>
+            <a:endParaRPr kumimoji="1" lang="en-US" altLang="ja-JP" sz="2800" dirty="0"/>
+          </a:p>
+          <a:p>
+            <a:r>
+              <a:rPr lang="ja-JP" altLang="en-US" sz="2800" dirty="0"/>
               <a:t>式が構文エラーや型エラーだった場合、コードは生成されず、実行もされない。</a:t>
             </a:r>
-            <a:endParaRPr lang="en-US" altLang="ja-JP" sz="2800" dirty="0" smtClean="0"/>
-          </a:p>
-          <a:p>
-            <a:r>
-              <a:rPr kumimoji="1" lang="ja-JP" altLang="en-US" sz="2800" dirty="0" smtClean="0"/>
+            <a:endParaRPr lang="en-US" altLang="ja-JP" sz="2800" dirty="0"/>
+          </a:p>
+          <a:p>
+            <a:r>
+              <a:rPr kumimoji="1" lang="ja-JP" altLang="en-US" sz="2800" dirty="0"/>
               <a:t>（例）式</a:t>
             </a:r>
             <a:r>
-              <a:rPr lang="en-US" altLang="ja-JP" sz="2800" dirty="0" smtClean="0"/>
-              <a:t>if </a:t>
-            </a:r>
-            <a:r>
-              <a:rPr lang="en-US" altLang="ja-JP" sz="2800" dirty="0"/>
-              <a:t>true then 3 else </a:t>
-            </a:r>
-            <a:r>
-              <a:rPr lang="en-US" altLang="ja-JP" sz="2800" dirty="0" smtClean="0"/>
-              <a:t>false</a:t>
-            </a:r>
-            <a:r>
-              <a:rPr lang="ja-JP" altLang="en-US" sz="2800" dirty="0" smtClean="0"/>
+              <a:rPr lang="en-US" altLang="ja-JP" sz="2800" dirty="0"/>
+              <a:t>if true then 3 else false</a:t>
+            </a:r>
+            <a:r>
+              <a:rPr lang="ja-JP" altLang="en-US" sz="2800" dirty="0"/>
               <a:t>は構文エラーはないが、</a:t>
             </a:r>
             <a:r>
-              <a:rPr lang="en-US" altLang="ja-JP" sz="2800" dirty="0" smtClean="0"/>
+              <a:rPr lang="en-US" altLang="ja-JP" sz="2800" dirty="0"/>
               <a:t>ML</a:t>
             </a:r>
             <a:r>
-              <a:rPr lang="ja-JP" altLang="en-US" sz="2800" dirty="0" smtClean="0"/>
+              <a:rPr lang="ja-JP" altLang="en-US" sz="2800" dirty="0"/>
               <a:t>の型システムは</a:t>
             </a:r>
             <a:r>
-              <a:rPr lang="en-US" altLang="ja-JP" sz="2800" dirty="0" smtClean="0"/>
+              <a:rPr lang="en-US" altLang="ja-JP" sz="2800" dirty="0"/>
               <a:t>then part</a:t>
             </a:r>
             <a:r>
-              <a:rPr lang="ja-JP" altLang="en-US" sz="2800" dirty="0" smtClean="0"/>
+              <a:rPr lang="ja-JP" altLang="en-US" sz="2800" dirty="0"/>
               <a:t>と</a:t>
             </a:r>
             <a:r>
-              <a:rPr lang="en-US" altLang="ja-JP" sz="2800" dirty="0" smtClean="0"/>
+              <a:rPr lang="en-US" altLang="ja-JP" sz="2800" dirty="0"/>
               <a:t>else part</a:t>
             </a:r>
             <a:r>
-              <a:rPr lang="ja-JP" altLang="en-US" sz="2800" dirty="0" smtClean="0"/>
+              <a:rPr lang="ja-JP" altLang="en-US" sz="2800" dirty="0"/>
               <a:t>が同じ型を持つことを要求するので、型エラーとなる。</a:t>
             </a:r>
             <a:endParaRPr kumimoji="1" lang="ja-JP" altLang="en-US" sz="2800" dirty="0"/>
@@ -8886,15 +8658,7 @@
           <a:p>
             <a:r>
               <a:rPr lang="en-US" altLang="ja-JP" sz="2800" dirty="0"/>
-              <a:t>  in </a:t>
-            </a:r>
-            <a:r>
-              <a:rPr lang="en-US" altLang="ja-JP" sz="2800" dirty="0" smtClean="0"/>
-              <a:t>expression:  if </a:t>
-            </a:r>
-            <a:r>
-              <a:rPr lang="en-US" altLang="ja-JP" sz="2800" dirty="0"/>
-              <a:t>true then 3 else false</a:t>
+              <a:t>  in expression:  if true then 3 else false</a:t>
             </a:r>
             <a:endParaRPr lang="ja-JP" altLang="en-US" sz="2800" dirty="0"/>
           </a:p>
@@ -8946,10 +8710,9 @@
           <a:lstStyle/>
           <a:p>
             <a:r>
-              <a:rPr kumimoji="1" lang="ja-JP" altLang="en-US" dirty="0" smtClean="0"/>
+              <a:rPr kumimoji="1" lang="ja-JP" altLang="en-US" dirty="0"/>
               <a:t>宣言</a:t>
             </a:r>
-            <a:endParaRPr kumimoji="1" lang="ja-JP" altLang="en-US" dirty="0"/>
           </a:p>
         </p:txBody>
       </p:sp>
@@ -8985,45 +8748,41 @@
               <a:buChar char="-"/>
             </a:pPr>
             <a:r>
-              <a:rPr lang="en-US" altLang="ja-JP" sz="2800" dirty="0" err="1" smtClean="0"/>
+              <a:rPr lang="en-US" altLang="ja-JP" sz="2800" dirty="0" err="1"/>
               <a:t>val</a:t>
             </a:r>
             <a:r>
-              <a:rPr lang="en-US" altLang="ja-JP" sz="2800" dirty="0" smtClean="0"/>
+              <a:rPr lang="en-US" altLang="ja-JP" sz="2800" dirty="0"/>
               <a:t> &lt;id&gt; = </a:t>
             </a:r>
             <a:r>
-              <a:rPr kumimoji="1" lang="en-US" altLang="ja-JP" sz="2800" dirty="0" smtClean="0"/>
+              <a:rPr kumimoji="1" lang="en-US" altLang="ja-JP" sz="2800" dirty="0"/>
               <a:t>&lt;</a:t>
             </a:r>
             <a:r>
-              <a:rPr kumimoji="1" lang="en-US" altLang="ja-JP" sz="2800" dirty="0" err="1" smtClean="0"/>
+              <a:rPr kumimoji="1" lang="en-US" altLang="ja-JP" sz="2800" dirty="0" err="1"/>
               <a:t>exp</a:t>
             </a:r>
             <a:r>
-              <a:rPr kumimoji="1" lang="en-US" altLang="ja-JP" sz="2800" dirty="0" smtClean="0"/>
+              <a:rPr kumimoji="1" lang="en-US" altLang="ja-JP" sz="2800" dirty="0"/>
               <a:t>&gt;;</a:t>
             </a:r>
           </a:p>
           <a:p>
             <a:r>
               <a:rPr lang="en-US" altLang="ja-JP" sz="2800" dirty="0" err="1"/>
-              <a:t>v</a:t>
-            </a:r>
-            <a:r>
-              <a:rPr lang="en-US" altLang="ja-JP" sz="2800" dirty="0" err="1" smtClean="0"/>
-              <a:t>al</a:t>
-            </a:r>
-            <a:r>
-              <a:rPr lang="en-US" altLang="ja-JP" sz="2800" dirty="0" smtClean="0"/>
+              <a:t>val</a:t>
+            </a:r>
+            <a:r>
+              <a:rPr lang="en-US" altLang="ja-JP" sz="2800" dirty="0"/>
               <a:t> &lt;id&gt; = &lt;</a:t>
             </a:r>
             <a:r>
-              <a:rPr lang="ja-JP" altLang="en-US" sz="2800" dirty="0" smtClean="0"/>
+              <a:rPr lang="ja-JP" altLang="en-US" sz="2800" dirty="0"/>
               <a:t>値の表示</a:t>
             </a:r>
             <a:r>
-              <a:rPr lang="en-US" altLang="ja-JP" sz="2800" dirty="0" smtClean="0"/>
+              <a:rPr lang="en-US" altLang="ja-JP" sz="2800" dirty="0"/>
               <a:t>&gt; : &lt;type&gt;</a:t>
             </a:r>
             <a:endParaRPr kumimoji="1" lang="ja-JP" altLang="en-US" sz="2800" dirty="0"/>
@@ -9057,29 +8816,29 @@
               <a:t>v</a:t>
             </a:r>
             <a:r>
-              <a:rPr kumimoji="1" lang="en-US" altLang="ja-JP" sz="2800" dirty="0" err="1" smtClean="0"/>
+              <a:rPr kumimoji="1" lang="en-US" altLang="ja-JP" sz="2800" dirty="0" err="1"/>
               <a:t>al</a:t>
             </a:r>
             <a:r>
-              <a:rPr kumimoji="1" lang="ja-JP" altLang="en-US" sz="2800" dirty="0" smtClean="0"/>
+              <a:rPr kumimoji="1" lang="ja-JP" altLang="en-US" sz="2800" dirty="0"/>
               <a:t>は</a:t>
             </a:r>
             <a:r>
-              <a:rPr kumimoji="1" lang="en-US" altLang="ja-JP" sz="2800" dirty="0" smtClean="0"/>
+              <a:rPr kumimoji="1" lang="en-US" altLang="ja-JP" sz="2800" dirty="0"/>
               <a:t>value</a:t>
             </a:r>
             <a:r>
-              <a:rPr lang="ja-JP" altLang="en-US" sz="2800" dirty="0" smtClean="0"/>
+              <a:rPr lang="ja-JP" altLang="en-US" sz="2800" dirty="0"/>
               <a:t>の頭文字３文字。宣言が入力されると、右辺の式が評価され、左辺の識別子に束縛される。</a:t>
             </a:r>
-            <a:endParaRPr lang="en-US" altLang="ja-JP" sz="2800" dirty="0" smtClean="0"/>
-          </a:p>
-          <a:p>
-            <a:r>
-              <a:rPr kumimoji="1" lang="ja-JP" altLang="en-US" sz="2800" dirty="0" smtClean="0"/>
+            <a:endParaRPr lang="en-US" altLang="ja-JP" sz="2800" dirty="0"/>
+          </a:p>
+          <a:p>
+            <a:r>
+              <a:rPr kumimoji="1" lang="ja-JP" altLang="en-US" sz="2800" dirty="0"/>
               <a:t>（例）</a:t>
             </a:r>
-            <a:endParaRPr kumimoji="1" lang="en-US" altLang="ja-JP" sz="2800" dirty="0" smtClean="0"/>
+            <a:endParaRPr kumimoji="1" lang="en-US" altLang="ja-JP" sz="2800" dirty="0"/>
           </a:p>
           <a:p>
             <a:r>
@@ -9180,10 +8939,9 @@
           <a:lstStyle/>
           <a:p>
             <a:r>
-              <a:rPr kumimoji="1" lang="ja-JP" altLang="en-US" dirty="0" smtClean="0"/>
+              <a:rPr kumimoji="1" lang="ja-JP" altLang="en-US" dirty="0"/>
               <a:t>（参考）</a:t>
             </a:r>
-            <a:endParaRPr kumimoji="1" lang="ja-JP" altLang="en-US" dirty="0"/>
           </a:p>
         </p:txBody>
       </p:sp>
@@ -9210,62 +8968,62 @@
           <a:lstStyle/>
           <a:p>
             <a:r>
-              <a:rPr kumimoji="1" lang="en-US" altLang="ja-JP" sz="2800" dirty="0" smtClean="0"/>
+              <a:rPr kumimoji="1" lang="en-US" altLang="ja-JP" sz="2800" dirty="0"/>
               <a:t>ML</a:t>
             </a:r>
             <a:r>
-              <a:rPr kumimoji="1" lang="ja-JP" altLang="en-US" sz="2800" dirty="0" smtClean="0"/>
+              <a:rPr kumimoji="1" lang="ja-JP" altLang="en-US" sz="2800" dirty="0"/>
               <a:t>では</a:t>
             </a:r>
             <a:r>
-              <a:rPr kumimoji="1" lang="en-US" altLang="ja-JP" sz="2800" dirty="0" smtClean="0"/>
+              <a:rPr kumimoji="1" lang="en-US" altLang="ja-JP" sz="2800" dirty="0"/>
               <a:t>/</a:t>
             </a:r>
             <a:r>
-              <a:rPr kumimoji="1" lang="ja-JP" altLang="en-US" sz="2800" dirty="0" smtClean="0"/>
+              <a:rPr kumimoji="1" lang="ja-JP" altLang="en-US" sz="2800" dirty="0"/>
               <a:t>は</a:t>
             </a:r>
             <a:r>
-              <a:rPr lang="en-US" altLang="ja-JP" sz="2800" dirty="0" smtClean="0"/>
+              <a:rPr lang="en-US" altLang="ja-JP" sz="2800" dirty="0"/>
               <a:t>real</a:t>
             </a:r>
             <a:r>
-              <a:rPr lang="ja-JP" altLang="en-US" sz="2800" dirty="0" smtClean="0"/>
+              <a:rPr lang="ja-JP" altLang="en-US" sz="2800" dirty="0"/>
               <a:t>型（浮動小数）の割り算に用いられる。</a:t>
             </a:r>
-            <a:endParaRPr lang="en-US" altLang="ja-JP" sz="2800" dirty="0" smtClean="0"/>
-          </a:p>
-          <a:p>
-            <a:r>
-              <a:rPr lang="en-US" altLang="ja-JP" sz="2800" dirty="0" smtClean="0"/>
+            <a:endParaRPr lang="en-US" altLang="ja-JP" sz="2800" dirty="0"/>
+          </a:p>
+          <a:p>
+            <a:r>
+              <a:rPr lang="en-US" altLang="ja-JP" sz="2800" dirty="0"/>
               <a:t>C</a:t>
             </a:r>
             <a:r>
-              <a:rPr lang="ja-JP" altLang="en-US" sz="2800" dirty="0" smtClean="0"/>
+              <a:rPr lang="ja-JP" altLang="en-US" sz="2800" dirty="0"/>
               <a:t>の暗黙の型変換のように、</a:t>
             </a:r>
             <a:r>
-              <a:rPr lang="en-US" altLang="ja-JP" sz="2800" dirty="0" err="1" smtClean="0"/>
+              <a:rPr lang="en-US" altLang="ja-JP" sz="2800" dirty="0" err="1"/>
               <a:t>i</a:t>
             </a:r>
             <a:r>
-              <a:rPr kumimoji="1" lang="en-US" altLang="ja-JP" sz="2800" dirty="0" err="1" smtClean="0"/>
+              <a:rPr kumimoji="1" lang="en-US" altLang="ja-JP" sz="2800" dirty="0" err="1"/>
               <a:t>nt</a:t>
             </a:r>
             <a:r>
-              <a:rPr kumimoji="1" lang="ja-JP" altLang="en-US" sz="2800" dirty="0" smtClean="0"/>
+              <a:rPr kumimoji="1" lang="ja-JP" altLang="en-US" sz="2800" dirty="0"/>
               <a:t>型から</a:t>
             </a:r>
             <a:r>
-              <a:rPr kumimoji="1" lang="en-US" altLang="ja-JP" sz="2800" dirty="0" smtClean="0"/>
+              <a:rPr kumimoji="1" lang="en-US" altLang="ja-JP" sz="2800" dirty="0"/>
               <a:t>real</a:t>
             </a:r>
             <a:r>
-              <a:rPr kumimoji="1" lang="ja-JP" altLang="en-US" sz="2800" dirty="0" smtClean="0"/>
+              <a:rPr kumimoji="1" lang="ja-JP" altLang="en-US" sz="2800" dirty="0"/>
               <a:t>型への型変換が自動的</a:t>
             </a:r>
             <a:r>
-              <a:rPr kumimoji="1" lang="ja-JP" altLang="en-US" sz="2800" smtClean="0"/>
+              <a:rPr kumimoji="1" lang="ja-JP" altLang="en-US" sz="2800"/>
               <a:t>には行われない。</a:t>
             </a:r>
             <a:endParaRPr kumimoji="1" lang="ja-JP" altLang="en-US" sz="2800" dirty="0"/>
@@ -9294,19 +9052,15 @@
           <a:lstStyle/>
           <a:p>
             <a:r>
-              <a:rPr lang="ja-JP" altLang="en-US" sz="2800" dirty="0" smtClean="0"/>
+              <a:rPr lang="ja-JP" altLang="en-US" sz="2800" dirty="0"/>
               <a:t>（例）</a:t>
             </a:r>
-            <a:endParaRPr lang="en-US" altLang="ja-JP" sz="2800" dirty="0" smtClean="0"/>
-          </a:p>
-          <a:p>
-            <a:r>
-              <a:rPr lang="en-US" altLang="ja-JP" sz="2800" dirty="0" smtClean="0"/>
-              <a:t>- </a:t>
-            </a:r>
-            <a:r>
-              <a:rPr lang="en-US" altLang="ja-JP" sz="2800" dirty="0"/>
-              <a:t>9/12;</a:t>
+            <a:endParaRPr lang="en-US" altLang="ja-JP" sz="2800" dirty="0"/>
+          </a:p>
+          <a:p>
+            <a:r>
+              <a:rPr lang="en-US" altLang="ja-JP" sz="2800" dirty="0"/>
+              <a:t>- 9/12;</a:t>
             </a:r>
           </a:p>
           <a:p>
@@ -9343,15 +9097,7 @@
           <a:p>
             <a:r>
               <a:rPr lang="en-US" altLang="ja-JP" sz="2800" dirty="0"/>
-              <a:t>  in expression</a:t>
-            </a:r>
-            <a:r>
-              <a:rPr lang="en-US" altLang="ja-JP" sz="2800" dirty="0" smtClean="0"/>
-              <a:t>:  9 </a:t>
-            </a:r>
-            <a:r>
-              <a:rPr lang="en-US" altLang="ja-JP" sz="2800" dirty="0"/>
-              <a:t>/ 12</a:t>
+              <a:t>  in expression:  9 / 12</a:t>
             </a:r>
           </a:p>
         </p:txBody>
@@ -9402,10 +9148,9 @@
           <a:lstStyle/>
           <a:p>
             <a:r>
-              <a:rPr kumimoji="1" lang="ja-JP" altLang="en-US" dirty="0" smtClean="0"/>
+              <a:rPr kumimoji="1" lang="ja-JP" altLang="en-US" dirty="0"/>
               <a:t>関数宣言</a:t>
             </a:r>
-            <a:endParaRPr kumimoji="1" lang="ja-JP" altLang="en-US" dirty="0"/>
           </a:p>
         </p:txBody>
       </p:sp>
@@ -9441,57 +9186,53 @@
               <a:buChar char="-"/>
             </a:pPr>
             <a:r>
-              <a:rPr lang="en-US" altLang="ja-JP" sz="2800" dirty="0" smtClean="0"/>
+              <a:rPr lang="en-US" altLang="ja-JP" sz="2800" dirty="0"/>
               <a:t>fun &lt;id&gt; &lt;arguments&gt; = </a:t>
             </a:r>
             <a:r>
-              <a:rPr kumimoji="1" lang="en-US" altLang="ja-JP" sz="2800" dirty="0" smtClean="0"/>
+              <a:rPr kumimoji="1" lang="en-US" altLang="ja-JP" sz="2800" dirty="0"/>
               <a:t>&lt;</a:t>
             </a:r>
             <a:r>
-              <a:rPr lang="en-US" altLang="ja-JP" sz="2800" dirty="0" err="1" smtClean="0"/>
+              <a:rPr lang="en-US" altLang="ja-JP" sz="2800" dirty="0" err="1"/>
               <a:t>exp</a:t>
             </a:r>
             <a:r>
-              <a:rPr kumimoji="1" lang="en-US" altLang="ja-JP" sz="2800" dirty="0" smtClean="0"/>
+              <a:rPr kumimoji="1" lang="en-US" altLang="ja-JP" sz="2800" dirty="0"/>
               <a:t>&gt;;</a:t>
             </a:r>
           </a:p>
           <a:p>
             <a:r>
               <a:rPr lang="en-US" altLang="ja-JP" sz="2800" dirty="0" err="1"/>
-              <a:t>v</a:t>
-            </a:r>
-            <a:r>
-              <a:rPr lang="en-US" altLang="ja-JP" sz="2800" dirty="0" err="1" smtClean="0"/>
-              <a:t>al</a:t>
-            </a:r>
-            <a:r>
-              <a:rPr lang="en-US" altLang="ja-JP" sz="2800" dirty="0" smtClean="0"/>
+              <a:t>val</a:t>
+            </a:r>
+            <a:r>
+              <a:rPr lang="en-US" altLang="ja-JP" sz="2800" dirty="0"/>
               <a:t> &lt;id&gt; = </a:t>
             </a:r>
             <a:r>
-              <a:rPr lang="en-US" altLang="ja-JP" sz="2800" dirty="0" err="1" smtClean="0"/>
+              <a:rPr lang="en-US" altLang="ja-JP" sz="2800" dirty="0" err="1"/>
               <a:t>fn</a:t>
             </a:r>
             <a:r>
-              <a:rPr lang="en-US" altLang="ja-JP" sz="2800" dirty="0" smtClean="0"/>
+              <a:rPr lang="en-US" altLang="ja-JP" sz="2800" dirty="0"/>
               <a:t> : &lt;</a:t>
             </a:r>
             <a:r>
-              <a:rPr lang="ja-JP" altLang="en-US" sz="2800" dirty="0" smtClean="0"/>
+              <a:rPr lang="ja-JP" altLang="en-US" sz="2800" dirty="0"/>
               <a:t>引数の型</a:t>
             </a:r>
             <a:r>
-              <a:rPr lang="en-US" altLang="ja-JP" sz="2800" dirty="0" smtClean="0"/>
+              <a:rPr lang="en-US" altLang="ja-JP" sz="2800" dirty="0"/>
               <a:t>&gt; -&gt; &lt;</a:t>
             </a:r>
             <a:r>
-              <a:rPr lang="ja-JP" altLang="en-US" sz="2800" dirty="0" smtClean="0"/>
+              <a:rPr lang="ja-JP" altLang="en-US" sz="2800" dirty="0"/>
               <a:t>結果の型</a:t>
             </a:r>
             <a:r>
-              <a:rPr lang="en-US" altLang="ja-JP" sz="2800" dirty="0" smtClean="0"/>
+              <a:rPr lang="en-US" altLang="ja-JP" sz="2800" dirty="0"/>
               <a:t>&gt;</a:t>
             </a:r>
             <a:endParaRPr kumimoji="1" lang="ja-JP" altLang="en-US" sz="2800" dirty="0"/>
@@ -9521,10 +9262,10 @@
           <a:lstStyle/>
           <a:p>
             <a:r>
-              <a:rPr kumimoji="1" lang="ja-JP" altLang="en-US" sz="2800" dirty="0" smtClean="0"/>
+              <a:rPr kumimoji="1" lang="ja-JP" altLang="en-US" sz="2800" dirty="0"/>
               <a:t>（例）</a:t>
             </a:r>
-            <a:endParaRPr kumimoji="1" lang="en-US" altLang="ja-JP" sz="2800" dirty="0" smtClean="0"/>
+            <a:endParaRPr kumimoji="1" lang="en-US" altLang="ja-JP" sz="2800" dirty="0"/>
           </a:p>
           <a:p>
             <a:r>
@@ -9535,52 +9276,48 @@
           <a:p>
             <a:r>
               <a:rPr lang="is-IS" altLang="ja-JP" sz="2800" dirty="0"/>
-              <a:t>val f = fn : int -&gt; </a:t>
-            </a:r>
-            <a:r>
-              <a:rPr lang="is-IS" altLang="ja-JP" sz="2800" dirty="0" smtClean="0"/>
+              <a:t>val f = fn : int -&gt; int</a:t>
+            </a:r>
+          </a:p>
+          <a:p>
+            <a:r>
+              <a:rPr lang="ja-JP" altLang="en-US" sz="2800" dirty="0"/>
+              <a:t>これは関数</a:t>
+            </a:r>
+            <a:r>
+              <a:rPr lang="en-US" altLang="ja-JP" sz="2800" dirty="0"/>
+              <a:t>(</a:t>
+            </a:r>
+            <a:r>
+              <a:rPr lang="en-US" altLang="ja-JP" sz="2800" dirty="0" err="1"/>
               <a:t>int</a:t>
             </a:r>
-          </a:p>
-          <a:p>
-            <a:r>
-              <a:rPr lang="ja-JP" altLang="en-US" sz="2800" dirty="0" smtClean="0"/>
-              <a:t>これは関数</a:t>
-            </a:r>
-            <a:r>
-              <a:rPr lang="en-US" altLang="ja-JP" sz="2800" dirty="0" smtClean="0"/>
-              <a:t>(</a:t>
-            </a:r>
-            <a:r>
-              <a:rPr lang="en-US" altLang="ja-JP" sz="2800" dirty="0" err="1" smtClean="0"/>
+            <a:r>
+              <a:rPr lang="en-US" altLang="ja-JP" sz="2800" dirty="0"/>
+              <a:t> -&gt; </a:t>
+            </a:r>
+            <a:r>
+              <a:rPr lang="en-US" altLang="ja-JP" sz="2800" dirty="0" err="1"/>
               <a:t>int</a:t>
             </a:r>
             <a:r>
-              <a:rPr lang="en-US" altLang="ja-JP" sz="2800" dirty="0" smtClean="0"/>
-              <a:t> -&gt; </a:t>
-            </a:r>
-            <a:r>
-              <a:rPr lang="en-US" altLang="ja-JP" sz="2800" dirty="0" err="1" smtClean="0"/>
-              <a:t>int</a:t>
-            </a:r>
-            <a:r>
-              <a:rPr lang="ja-JP" altLang="en-US" sz="2800" dirty="0" smtClean="0"/>
+              <a:rPr lang="ja-JP" altLang="en-US" sz="2800" dirty="0"/>
               <a:t>型</a:t>
             </a:r>
             <a:r>
-              <a:rPr lang="en-US" altLang="ja-JP" sz="2800" dirty="0" smtClean="0"/>
+              <a:rPr lang="en-US" altLang="ja-JP" sz="2800" dirty="0"/>
               <a:t>)</a:t>
             </a:r>
             <a:r>
-              <a:rPr lang="ja-JP" altLang="en-US" sz="2800" dirty="0" smtClean="0"/>
+              <a:rPr lang="ja-JP" altLang="en-US" sz="2800" dirty="0"/>
               <a:t>を</a:t>
             </a:r>
             <a:r>
-              <a:rPr lang="en-US" altLang="ja-JP" sz="2800" dirty="0" smtClean="0"/>
+              <a:rPr lang="en-US" altLang="ja-JP" sz="2800" dirty="0"/>
               <a:t>f</a:t>
             </a:r>
             <a:r>
-              <a:rPr lang="ja-JP" altLang="en-US" sz="2800" dirty="0" smtClean="0"/>
+              <a:rPr lang="ja-JP" altLang="en-US" sz="2800" dirty="0"/>
               <a:t>に束縛する。</a:t>
             </a:r>
             <a:endParaRPr lang="is-IS" altLang="ja-JP" sz="2800" dirty="0"/>
@@ -9594,65 +9331,57 @@
           <a:p>
             <a:r>
               <a:rPr lang="is-IS" altLang="ja-JP" sz="2800" dirty="0"/>
-              <a:t>val f = fn : int -&gt; </a:t>
-            </a:r>
-            <a:r>
-              <a:rPr lang="is-IS" altLang="ja-JP" sz="2800" dirty="0" smtClean="0"/>
-              <a:t>int</a:t>
-            </a:r>
-          </a:p>
-          <a:p>
-            <a:r>
-              <a:rPr kumimoji="1" lang="ja-JP" altLang="en-US" sz="2800" dirty="0" smtClean="0"/>
+              <a:t>val f = fn : int -&gt; int</a:t>
+            </a:r>
+          </a:p>
+          <a:p>
+            <a:r>
+              <a:rPr kumimoji="1" lang="ja-JP" altLang="en-US" sz="2800" dirty="0"/>
               <a:t>のように宣言することもで</a:t>
             </a:r>
             <a:r>
-              <a:rPr lang="ja-JP" altLang="en-US" sz="2800" dirty="0" smtClean="0"/>
+              <a:rPr lang="ja-JP" altLang="en-US" sz="2800" dirty="0"/>
               <a:t>きる。</a:t>
             </a:r>
-            <a:endParaRPr lang="en-US" altLang="ja-JP" sz="2800" dirty="0" smtClean="0"/>
+            <a:endParaRPr lang="en-US" altLang="ja-JP" sz="2800" dirty="0"/>
           </a:p>
           <a:p>
             <a:r>
               <a:rPr lang="en-US" altLang="ja-JP" sz="2800" dirty="0" err="1"/>
-              <a:t>f</a:t>
-            </a:r>
-            <a:r>
-              <a:rPr lang="en-US" altLang="ja-JP" sz="2800" dirty="0" err="1" smtClean="0"/>
-              <a:t>n</a:t>
-            </a:r>
-            <a:r>
-              <a:rPr lang="en-US" altLang="ja-JP" sz="2800" dirty="0" smtClean="0"/>
+              <a:t>fn</a:t>
+            </a:r>
+            <a:r>
+              <a:rPr lang="en-US" altLang="ja-JP" sz="2800" dirty="0"/>
               <a:t> x =&gt; x+5</a:t>
             </a:r>
             <a:r>
-              <a:rPr kumimoji="1" lang="ja-JP" altLang="en-US" sz="2800" dirty="0" smtClean="0"/>
+              <a:rPr kumimoji="1" lang="ja-JP" altLang="en-US" sz="2800" dirty="0"/>
               <a:t>は</a:t>
             </a:r>
             <a:r>
-              <a:rPr lang="ja-JP" altLang="en-US" sz="2800" dirty="0" smtClean="0"/>
+              <a:rPr lang="ja-JP" altLang="en-US" sz="2800" dirty="0"/>
               <a:t>ラムダ</a:t>
             </a:r>
             <a:r>
-              <a:rPr kumimoji="1" lang="ja-JP" altLang="en-US" sz="2800" dirty="0" smtClean="0"/>
+              <a:rPr kumimoji="1" lang="ja-JP" altLang="en-US" sz="2800" dirty="0"/>
               <a:t>式の</a:t>
             </a:r>
             <a:r>
-              <a:rPr kumimoji="1" lang="en-US" altLang="ja-JP" sz="2800" dirty="0" err="1" smtClean="0"/>
+              <a:rPr kumimoji="1" lang="en-US" altLang="ja-JP" sz="2800" dirty="0" err="1"/>
               <a:t>λ</a:t>
             </a:r>
             <a:r>
-              <a:rPr kumimoji="1" lang="en-US" altLang="ja-JP" sz="2800" dirty="0" smtClean="0"/>
+              <a:rPr kumimoji="1" lang="en-US" altLang="ja-JP" sz="2800" dirty="0"/>
               <a:t> x. x + 5</a:t>
             </a:r>
             <a:r>
-              <a:rPr kumimoji="1" lang="ja-JP" altLang="en-US" sz="2800" dirty="0" smtClean="0"/>
+              <a:rPr kumimoji="1" lang="ja-JP" altLang="en-US" sz="2800" dirty="0"/>
               <a:t>に対応する。</a:t>
             </a:r>
-            <a:endParaRPr kumimoji="1" lang="en-US" altLang="ja-JP" sz="2800" dirty="0" smtClean="0"/>
-          </a:p>
-          <a:p>
-            <a:endParaRPr kumimoji="1" lang="en-US" altLang="ja-JP" sz="2800" dirty="0" smtClean="0"/>
+            <a:endParaRPr kumimoji="1" lang="en-US" altLang="ja-JP" sz="2800" dirty="0"/>
+          </a:p>
+          <a:p>
+            <a:endParaRPr kumimoji="1" lang="en-US" altLang="ja-JP" sz="2800" dirty="0"/>
           </a:p>
         </p:txBody>
       </p:sp>
@@ -9702,7 +9431,7 @@
           <a:lstStyle/>
           <a:p>
             <a:r>
-              <a:rPr lang="ja-JP" altLang="en-US" dirty="0" smtClean="0"/>
+              <a:rPr lang="ja-JP" altLang="en-US" dirty="0"/>
               <a:t>代入について</a:t>
             </a:r>
             <a:endParaRPr kumimoji="1" lang="ja-JP" altLang="en-US" dirty="0"/>
@@ -9731,7 +9460,7 @@
           <a:lstStyle/>
           <a:p>
             <a:r>
-              <a:rPr lang="en-US" altLang="ja-JP" sz="2800" dirty="0" smtClean="0"/>
+              <a:rPr lang="en-US" altLang="ja-JP" sz="2800" dirty="0"/>
               <a:t>- </a:t>
             </a:r>
             <a:r>
@@ -9844,10 +9573,9 @@
           <a:lstStyle/>
           <a:p>
             <a:r>
-              <a:rPr kumimoji="1" lang="ja-JP" altLang="en-US" sz="2800" dirty="0" smtClean="0"/>
+              <a:rPr kumimoji="1" lang="ja-JP" altLang="en-US" sz="2800" dirty="0"/>
               <a:t>（例）</a:t>
             </a:r>
-            <a:endParaRPr kumimoji="1" lang="ja-JP" altLang="en-US" sz="2800" dirty="0"/>
           </a:p>
         </p:txBody>
       </p:sp>
